--- a/קורס בסיסי AI/שיעור 4/מצגת שיעור 4.pptx
+++ b/קורס בסיסי AI/שיעור 4/מצגת שיעור 4.pptx
@@ -2207,7 +2207,7 @@
           </a:p>
           <a:p>
             <a:r>
-              <a:t>חמש דקות הפסקה. בינתיים, מי שעוד לא פתח חשבון ב-Make, זה הזמן. הקישור בצ'אט.</a:t>
+              <a:t>חמש דקות הפסקה. בינתיים, ודאו שאתם מחוברים ל-Make ולגוגל פורמס. מי שעוד לא פתח חשבון, זה הזמן. הקישור בצ'אט.</a:t>
             </a:r>
           </a:p>
           <a:p/>
@@ -17408,7 +17408,7 @@
                 <a:latin typeface="Arial"/>
                 <a:cs typeface="Arial"/>
               </a:rPr>
-              <a:t>5 דקות. פתחו חשבון ב-Make בינתיים.</a:t>
+              <a:t>5 דקות. ודאו שאתם מחוברים ל-Make.</a:t>
             </a:r>
           </a:p>
         </p:txBody>

--- a/קורס בסיסי AI/שיעור 4/מצגת שיעור 4.pptx
+++ b/קורס בסיסי AI/שיעור 4/מצגת שיעור 4.pptx
@@ -28,6 +28,7 @@
     <p:sldId id="315" r:id="rId68"/>
     <p:sldId id="316" r:id="rId69"/>
     <p:sldId id="317" r:id="rId70"/>
+    <p:sldId id="318" r:id="rId71"/>
   </p:sldIdLst>
   <p:notesMasterIdLst>
     <p:notesMasterId r:id="rId16"/>
@@ -1869,7 +1870,7 @@
           <a:lstStyle/>
           <a:p>
             <a:r>
-              <a:t>⏱ 4 דקות  |  🎯 להכיר ברמת עיקרון את Dots, Grok Bot ו-Instinct, ולהבין את הסיכונים.</a:t>
+              <a:t>⏱ 3 דקות  |  🎯 להבין את ההיגיון של סוכן: לולאה של תכנון, פעולה ובדיקה.</a:t>
             </a:r>
           </a:p>
           <a:p/>
@@ -1880,38 +1881,53 @@
           </a:p>
           <a:p>
             <a:r>
-              <a:t>שלושה סוכנים, כולם חדשים, וכולם בתשלום או בהזמנה. אז רק להכיר.</a:t>
-            </a:r>
-          </a:p>
-          <a:p>
-            <a:r>
-              <a:t>Dots של OpenAI: עוזר עם מחשב משלו בענן. אומרים לו "עקוב אחרי הלידים ותזכיר לי", והוא עושה.</a:t>
-            </a:r>
-          </a:p>
-          <a:p>
-            <a:r>
-              <a:t>Grok Bot של xAI: מראים לו פעם אחת משימה בהקלטת מסך, והוא חוזר עליה לבד.</a:t>
-            </a:r>
-          </a:p>
-          <a:p>
-            <a:r>
-              <a:t>Instinct: שולחים לו הודעה, "תזמין טכנאי ליום שלישי", והוא מתקשר ומסדר.</a:t>
-            </a:r>
-          </a:p>
-          <a:p>
-            <a:r>
-              <a:t>מה משותף? נותנים להם מטרה, לא הוראות.</a:t>
-            </a:r>
-          </a:p>
-          <a:p>
-            <a:r>
-              <a:t>ושימו לב למשבצת הצהובה: סוכן עם גישה למייל ולכרטיס אשראי? מתחילים מהרשאות קטנות, ובודקים כל פעולה.</a:t>
+              <a:t>לפני שנכיר סוכנים, ההיגיון. מה ההבדל בין צ'אט לסוכן?</a:t>
+            </a:r>
+          </a:p>
+          <a:p>
+            <a:r>
+              <a:t>צ'אט עושה סיבוב אחד: שאלתם, ענה, נגמר.</a:t>
+            </a:r>
+          </a:p>
+          <a:p>
+            <a:r>
+              <a:t>סוכן מסתובב בלולאה. מקבל מטרה, למשל "תזמין לי טכנאי ליום שלישי".</a:t>
+            </a:r>
+          </a:p>
+          <a:p>
+            <a:r>
+              <a:t>חושב: מה הצעד הבא? צריך לחפש טכנאי.</a:t>
+            </a:r>
+          </a:p>
+          <a:p>
+            <a:r>
+              <a:t>פועל: משתמש בכלי, חיפוש.</a:t>
+            </a:r>
+          </a:p>
+          <a:p>
+            <a:r>
+              <a:t>בודק: מצאתי שלושה. הצלחתי? עוד לא.</a:t>
+            </a:r>
+          </a:p>
+          <a:p>
+            <a:r>
+              <a:t>וחוזר: מתכנן שוב, מתקשר, בודק ביומן, קובע. עד שהמטרה הושגה.</a:t>
+            </a:r>
+          </a:p>
+          <a:p>
+            <a:r>
+              <a:t>זה כל ההבדל. ולכן סוכן חזק מאוד, וגם צריך הרשאות זהירות.</a:t>
+            </a:r>
+          </a:p>
+          <a:p>
+            <a:r>
+              <a:t>שאלה לצ'אט: איזו משימה הייתם נותנים לסוכן, אם הייתם בטוחים שהוא לא יטעה?</a:t>
             </a:r>
           </a:p>
           <a:p/>
           <a:p>
             <a:r>
-              <a:t>➡️ מעבר: ויש סוכנים שכותבים קוד.</a:t>
+              <a:t>➡️ מעבר: והנה שלושה סוכנים שכבר קיימים.</a:t>
             </a:r>
           </a:p>
         </p:txBody>
@@ -1981,50 +1997,49 @@
           <a:lstStyle/>
           <a:p>
             <a:r>
-              <a:t>⏱ 4 דקות  |  🎯 להבין במילים פשוטות איך סוכני קוד עובדים.</a:t>
+              <a:t>⏱ 4 דקות  |  🎯 להכיר ברמת עיקרון את Dots, Grok Bot ו-Instinct, ולהבין את הסיכונים.</a:t>
             </a:r>
           </a:p>
           <a:p/>
           <a:p>
             <a:r>
-              <a:t>🧰 הכנה מראש: סרטון ההסבר בעברית מוכן להפעלה (קובץ בתיקייה). בשיתוף מסך מסמנים "שיתוף צליל".</a:t>
+              <a:t>🗣 מה לומר:</a:t>
+            </a:r>
+          </a:p>
+          <a:p>
+            <a:r>
+              <a:t>שלושה סוכנים, כולם חדשים, וכולם בתשלום או בהזמנה. אז רק להכיר, ואני משתפת מסך עם דוגמאות.</a:t>
+            </a:r>
+          </a:p>
+          <a:p>
+            <a:r>
+              <a:t>Dots של OpenAI: עוזר עם מחשב משלו בענן. אומרים לו "עקוב אחרי הלידים ותזכיר לי", והוא עושה.</a:t>
+            </a:r>
+          </a:p>
+          <a:p>
+            <a:r>
+              <a:t>Grok Bot של xAI: מראים לו פעם אחת משימה בהקלטת מסך, והוא חוזר עליה לבד.</a:t>
+            </a:r>
+          </a:p>
+          <a:p>
+            <a:r>
+              <a:t>Instinct: שולחים לו הודעה, "תזמין טכנאי ליום שלישי", והוא מתקשר ומסדר.</a:t>
+            </a:r>
+          </a:p>
+          <a:p>
+            <a:r>
+              <a:t>מה משותף? נותנים להם מטרה, לא הוראות.</a:t>
+            </a:r>
+          </a:p>
+          <a:p>
+            <a:r>
+              <a:t>ושימו לב למשבצת הצהובה: סוכן עם גישה למייל ולכרטיס אשראי? מתחילים מהרשאות קטנות, ובודקים כל פעולה.</a:t>
             </a:r>
           </a:p>
           <a:p/>
           <a:p>
             <a:r>
-              <a:t>🗣 מה לומר:</a:t>
-            </a:r>
-          </a:p>
-          <a:p>
-            <a:r>
-              <a:t>Codex של OpenAI ו-Claude Code של Anthropic הם מתכנתים שעובדים בשבילכם.</a:t>
-            </a:r>
-          </a:p>
-          <a:p>
-            <a:r>
-              <a:t>הם עובדים בארבעה שלבים: מקבלים משימה במילים, קוראים את הקבצים ומתכננים, כותבים ומריצים קוד ומתקנים שגיאות, ומחזירים לכם לאישור.</a:t>
-            </a:r>
-          </a:p>
-          <a:p>
-            <a:r>
-              <a:t>סרטון של דקה שמסביר את זה.</a:t>
-            </a:r>
-          </a:p>
-          <a:p>
-            <a:r>
-              <a:t>(מפעילים את הסרטון)</a:t>
-            </a:r>
-          </a:p>
-          <a:p>
-            <a:r>
-              <a:t>אתם לא צריכים להיות מתכנתים. אבל כדאי לדעת שזה קיים, כי כך נבנים היום הרבה אתרים ואפליקציות.</a:t>
-            </a:r>
-          </a:p>
-          <a:p/>
-          <a:p>
-            <a:r>
-              <a:t>➡️ מעבר: ואפשר לבנות אפליקציה גם בלי לראות קוד בכלל.</a:t>
+              <a:t>➡️ מעבר: ויש סוכנים שכותבים קוד.</a:t>
             </a:r>
           </a:p>
         </p:txBody>
@@ -2094,39 +2109,50 @@
           <a:lstStyle/>
           <a:p>
             <a:r>
-              <a:t>⏱ 3 דקות  |  🎯 לחבר לשאלון החי מהמפגש הראשון, ולתת רעיון לבית.</a:t>
+              <a:t>⏱ 4 דקות  |  🎯 להבין במילים פשוטות איך סוכני קוד עובדים.</a:t>
             </a:r>
           </a:p>
           <a:p/>
           <a:p>
             <a:r>
+              <a:t>🧰 הכנה מראש: סרטון ההסבר בעברית מוכן להפעלה (קובץ בתיקייה). בשיתוף מסך מסמנים "שיתוף צליל".</a:t>
+            </a:r>
+          </a:p>
+          <a:p/>
+          <a:p>
+            <a:r>
               <a:t>🗣 מה לומר:</a:t>
             </a:r>
           </a:p>
           <a:p>
             <a:r>
-              <a:t>זוכרים את השאלון החי מהמפגש הראשון? אמרתי לכם שלא תכנתתי אותו. תיארתי ל-AI במילים, ב-Lovable.</a:t>
-            </a:r>
-          </a:p>
-          <a:p>
-            <a:r>
-              <a:t>מתארים את האפליקציה, ה-AI בונה מסכים ומאגר מידע, משפרים בשיחה, ומפרסמים בלחיצה.</a:t>
-            </a:r>
-          </a:p>
-          <a:p>
-            <a:r>
-              <a:t>Lovable ו-Base44 נותנים קרדיטים חינם להתחלה. הקישורים בארגז הכלים.</a:t>
-            </a:r>
-          </a:p>
-          <a:p>
-            <a:r>
-              <a:t>והרעיון לנסות בבית: טופס הזמנה ללקוחות, רשימת הזמנות, ואישור במייל. ההנחיה על המסך ובחוברת.</a:t>
+              <a:t>Codex של OpenAI ו-Claude Code של Anthropic הם מתכנתים שעובדים בשבילכם.</a:t>
+            </a:r>
+          </a:p>
+          <a:p>
+            <a:r>
+              <a:t>הם עובדים בארבעה שלבים: מקבלים משימה במילים, קוראים את הקבצים ומתכננים, כותבים ומריצים קוד ומתקנים שגיאות, ומחזירים לכם לאישור.</a:t>
+            </a:r>
+          </a:p>
+          <a:p>
+            <a:r>
+              <a:t>סרטון של דקה שמסביר את זה.</a:t>
+            </a:r>
+          </a:p>
+          <a:p>
+            <a:r>
+              <a:t>(מפעילים את הסרטון)</a:t>
+            </a:r>
+          </a:p>
+          <a:p>
+            <a:r>
+              <a:t>אתם לא צריכים להיות מתכנתים. אבל כדאי לדעת שזה קיים, כי כך נבנים היום הרבה אתרים ואפליקציות.</a:t>
             </a:r>
           </a:p>
           <a:p/>
           <a:p>
             <a:r>
-              <a:t>➡️ מעבר: הפסקה קצרה.</a:t>
+              <a:t>➡️ מעבר: ואפשר לבנות אפליקציה גם בלי לראות קוד בכלל.</a:t>
             </a:r>
           </a:p>
         </p:txBody>
@@ -2196,7 +2222,7 @@
           <a:lstStyle/>
           <a:p>
             <a:r>
-              <a:t>⏱ 5 דקות  |  🎯 מנוחה, והכנה ל-Make.</a:t>
+              <a:t>⏱ 3 דקות  |  🎯 לחבר לשאלון החי מהמפגש הראשון, ולתת רעיון לבית.</a:t>
             </a:r>
           </a:p>
           <a:p/>
@@ -2207,19 +2233,28 @@
           </a:p>
           <a:p>
             <a:r>
-              <a:t>חמש דקות הפסקה. בינתיים, ודאו שאתם מחוברים ל-Make ולגוגל פורמס. מי שעוד לא פתח חשבון, זה הזמן. הקישור בצ'אט.</a:t>
+              <a:t>זוכרים את השאלון החי מהמפגש הראשון? אמרתי לכם שלא תכנתתי אותו. תיארתי ל-AI במילים, ב-Lovable.</a:t>
+            </a:r>
+          </a:p>
+          <a:p>
+            <a:r>
+              <a:t>מתארים את האפליקציה, ה-AI בונה מסכים ומאגר מידע, משפרים בשיחה, ומפרסמים בלחיצה.</a:t>
+            </a:r>
+          </a:p>
+          <a:p>
+            <a:r>
+              <a:t>Lovable ו-Base44 נותנים קרדיטים חינם להתחלה. הקישורים בארגז הכלים.</a:t>
+            </a:r>
+          </a:p>
+          <a:p>
+            <a:r>
+              <a:t>והרעיון לנסות בבית: טופס הזמנה ללקוחות, רשימת הזמנות, ואישור במייל. ההנחיה על המסך ובחוברת.</a:t>
             </a:r>
           </a:p>
           <a:p/>
           <a:p>
             <a:r>
-              <a:t>🖐 פעולה: מדביקים בצ'אט את הקישור ל-Make ולגוגל פורמס.</a:t>
-            </a:r>
-          </a:p>
-          <a:p/>
-          <a:p>
-            <a:r>
-              <a:t>➡️ מעבר: ברוכים השבים. בונים את האוטומציה הראשונה.</a:t>
+              <a:t>➡️ מעבר: הפסקה קצרה.</a:t>
             </a:r>
           </a:p>
         </p:txBody>
@@ -2289,7 +2324,7 @@
           <a:lstStyle/>
           <a:p>
             <a:r>
-              <a:t>⏱ 0.5 דקות  |  🎯 מעבר לפרק.</a:t>
+              <a:t>⏱ 5 דקות  |  🎯 מנוחה, והכנה ל-Make.</a:t>
             </a:r>
           </a:p>
           <a:p/>
@@ -2300,13 +2335,19 @@
           </a:p>
           <a:p>
             <a:r>
-              <a:t>פרק שלישי, והכי מעשי: אוטומציה אמיתית, בחינם, בלי קוד.</a:t>
+              <a:t>חמש דקות הפסקה. בינתיים, ודאו שאתם מחוברים ל-Make ולגוגל פורמס. מי שעוד לא פתח חשבון, זה הזמן. הקישור בצ'אט.</a:t>
             </a:r>
           </a:p>
           <a:p/>
           <a:p>
             <a:r>
-              <a:t>➡️ מעבר: קודם, איך Make חושב.</a:t>
+              <a:t>🖐 פעולה: מדביקים בצ'אט את הקישור ל-Make ולגוגל פורמס.</a:t>
+            </a:r>
+          </a:p>
+          <a:p/>
+          <a:p>
+            <a:r>
+              <a:t>➡️ מעבר: ברוכים השבים. בונים את האוטומציה הראשונה.</a:t>
             </a:r>
           </a:p>
         </p:txBody>
@@ -2376,50 +2417,24 @@
           <a:lstStyle/>
           <a:p>
             <a:r>
-              <a:t>⏱ 3 דקות  |  🎯 להבין את מבנה טריגר ופעולה.</a:t>
+              <a:t>⏱ 0.5 דקות  |  🎯 מעבר לפרק.</a:t>
             </a:r>
           </a:p>
           <a:p/>
           <a:p>
             <a:r>
-              <a:t>🏆 אפליקציית הקורס: פותחים את האתגר "אוטומציה ראשונה".</a:t>
+              <a:t>🗣 מה לומר:</a:t>
+            </a:r>
+          </a:p>
+          <a:p>
+            <a:r>
+              <a:t>פרק שלישי, והכי מעשי: אוטומציה אמיתית, בחינם, בלי קוד.</a:t>
             </a:r>
           </a:p>
           <a:p/>
           <a:p>
             <a:r>
-              <a:t>🗣 מה לומר:</a:t>
-            </a:r>
-          </a:p>
-          <a:p>
-            <a:r>
-              <a:t>כל אוטומציה בנויה משני חלקים.</a:t>
-            </a:r>
-          </a:p>
-          <a:p>
-            <a:r>
-              <a:t>טריגר: משהו קורה. למשל, לקוח ממלא טופס.</a:t>
-            </a:r>
-          </a:p>
-          <a:p>
-            <a:r>
-              <a:t>ופעולה: משהו נעשה. Make לוקח את הפרטים, שולח ללקוח מייל תודה, ושומר שורה בגיליון.</a:t>
-            </a:r>
-          </a:p>
-          <a:p>
-            <a:r>
-              <a:t>במשפט: "כש... אז...".</a:t>
-            </a:r>
-          </a:p>
-          <a:p>
-            <a:r>
-              <a:t>באפליקציה פתחתי אתגר: כתבו במשפט אחד אוטומציה שהייתם רוצים. "כש[טריגר], אז [פעולה]". הכי שימושית מנצחת.</a:t>
-            </a:r>
-          </a:p>
-          <a:p/>
-          <a:p>
-            <a:r>
-              <a:t>➡️ מעבר: ועכשיו בונים יחד.</a:t>
+              <a:t>➡️ מעבר: קודם, איך Make חושב.</a:t>
             </a:r>
           </a:p>
         </p:txBody>
@@ -2489,13 +2504,13 @@
           <a:lstStyle/>
           <a:p>
             <a:r>
-              <a:t>⏱ 20 דקות  |  🎯 שכל משתתף יפעיל אוטומציה חינמית אחת.</a:t>
+              <a:t>⏱ 3 דקות  |  🎯 להבין את מבנה טריגר ופעולה.</a:t>
             </a:r>
           </a:p>
           <a:p/>
           <a:p>
             <a:r>
-              <a:t>🧰 הכנה מראש: דוגמה מוכנה מראש ב-Make לגיבוי. טופס גוגל לדוגמה.</a:t>
+              <a:t>🏆 אפליקציית הקורס: פותחים את האתגר "אוטומציה ראשונה".</a:t>
             </a:r>
           </a:p>
           <a:p/>
@@ -2506,58 +2521,33 @@
           </a:p>
           <a:p>
             <a:r>
-              <a:t>בונים יחד, צעד אחרי צעד. אני משתפת מסך ואתם אחריי.</a:t>
-            </a:r>
-          </a:p>
-          <a:p>
-            <a:r>
-              <a:t>אחת: בגוגל פורמס, טופס "צור קשר": שם, מייל, ובמה אפשר לעזור.</a:t>
-            </a:r>
-          </a:p>
-          <a:p>
-            <a:r>
-              <a:t>שתיים: ב-Make, Create scenario. הטריגר: Google Forms, Watch Responses. מחברים את החשבון.</a:t>
-            </a:r>
-          </a:p>
-          <a:p>
-            <a:r>
-              <a:t>(מדגימים כל שלב, ומחכים שרובם יגיעו)</a:t>
-            </a:r>
-          </a:p>
-          <a:p>
-            <a:r>
-              <a:t>שלוש: מוסיפים Gmail, Send an email. למי? למייל מהטופס. מה? "תודה שפנית! נחזור אליך תוך יום".</a:t>
-            </a:r>
-          </a:p>
-          <a:p>
-            <a:r>
-              <a:t>ארבע: מוסיפים Google Sheets, Add a row. כל ליד נשמר בגיליון.</a:t>
-            </a:r>
-          </a:p>
-          <a:p>
-            <a:r>
-              <a:t>חמש: Run once. ממלאים את הטופס בעצמכם... ותראו את המייל מגיע!</a:t>
-            </a:r>
-          </a:p>
-          <a:p>
-            <a:r>
-              <a:t>(רגע הוואו: בודקים את המייל בשידור חי)</a:t>
-            </a:r>
-          </a:p>
-          <a:p>
-            <a:r>
-              <a:t>מדליקים ON, והאוטומציה רצה לבד.</a:t>
-            </a:r>
-          </a:p>
-          <a:p>
-            <a:r>
-              <a:t>נתקעתם? כתבו "עזרה" בצ'אט. ובונוס למתקדמים: מודול AI שמנסח תשובה אישית לכל פנייה.</a:t>
+              <a:t>כל אוטומציה בנויה משני חלקים.</a:t>
+            </a:r>
+          </a:p>
+          <a:p>
+            <a:r>
+              <a:t>טריגר: משהו קורה. למשל, לקוח ממלא טופס.</a:t>
+            </a:r>
+          </a:p>
+          <a:p>
+            <a:r>
+              <a:t>ופעולה: משהו נעשה. Make לוקח את הפרטים, שולח ללקוח מייל תודה, ושומר שורה בגיליון.</a:t>
+            </a:r>
+          </a:p>
+          <a:p>
+            <a:r>
+              <a:t>במשפט: "כש... אז...".</a:t>
+            </a:r>
+          </a:p>
+          <a:p>
+            <a:r>
+              <a:t>באפליקציה פתחתי אתגר: כתבו במשפט אחד אוטומציה שהייתם רוצים. "כש[טריגר], אז [פעולה]". הכי שימושית מנצחת.</a:t>
             </a:r>
           </a:p>
           <a:p/>
           <a:p>
             <a:r>
-              <a:t>➡️ מעבר: ולפני שמשאירים את זה לרוץ, ארבעה כללים.</a:t>
+              <a:t>➡️ מעבר: ועכשיו בונים יחד.</a:t>
             </a:r>
           </a:p>
         </p:txBody>
@@ -2627,49 +2617,75 @@
           <a:lstStyle/>
           <a:p>
             <a:r>
-              <a:t>⏱ 3 דקות  |  🎯 שימוש אחראי באוטומציות ובסוכנים.</a:t>
+              <a:t>⏱ 20 דקות  |  🎯 שכל משתתף יפעיל אוטומציה חינמית אחת.</a:t>
             </a:r>
           </a:p>
           <a:p/>
           <a:p>
             <a:r>
+              <a:t>🧰 הכנה מראש: דוגמה מוכנה מראש ב-Make לגיבוי. טופס גוגל לדוגמה.</a:t>
+            </a:r>
+          </a:p>
+          <a:p/>
+          <a:p>
+            <a:r>
               <a:t>🗣 מה לומר:</a:t>
             </a:r>
           </a:p>
           <a:p>
             <a:r>
-              <a:t>ארבעה כללים.</a:t>
-            </a:r>
-          </a:p>
-          <a:p>
-            <a:r>
-              <a:t>אדם מאשר: טיוטה ולא שליחה, הצעה ולא תשלום.</a:t>
-            </a:r>
-          </a:p>
-          <a:p>
-            <a:r>
-              <a:t>הרשאות קטנות: מחברים רק את מה שצריך.</a:t>
-            </a:r>
-          </a:p>
-          <a:p>
-            <a:r>
-              <a:t>יומן פעולות: פעם בשבוע בודקים מה רץ ומה נכשל.</a:t>
-            </a:r>
-          </a:p>
-          <a:p>
-            <a:r>
-              <a:t>ובלי סודות: סיסמאות ומספרי אשראי לא נכנסים להנחיות.</a:t>
-            </a:r>
-          </a:p>
-          <a:p>
-            <a:r>
-              <a:t>וזוכרים את תיקון 13? פרטי לקוחות נשארים מוגנים, גם באוטומציה.</a:t>
+              <a:t>בונים יחד, צעד אחרי צעד. אני משתפת מסך ואתם אחריי.</a:t>
+            </a:r>
+          </a:p>
+          <a:p>
+            <a:r>
+              <a:t>אחת: בגוגל פורמס, טופס "צור קשר": שם, מייל, ובמה אפשר לעזור.</a:t>
+            </a:r>
+          </a:p>
+          <a:p>
+            <a:r>
+              <a:t>שתיים: ב-Make, Create scenario. הטריגר: Google Forms, Watch Responses. מחברים את החשבון.</a:t>
+            </a:r>
+          </a:p>
+          <a:p>
+            <a:r>
+              <a:t>(מדגימים כל שלב, ומחכים שרובם יגיעו)</a:t>
+            </a:r>
+          </a:p>
+          <a:p>
+            <a:r>
+              <a:t>שלוש: מוסיפים Gmail, Send an email. למי? למייל מהטופס. מה? "תודה שפנית! נחזור אליך תוך יום".</a:t>
+            </a:r>
+          </a:p>
+          <a:p>
+            <a:r>
+              <a:t>ארבע: מוסיפים Google Sheets, Add a row. כל ליד נשמר בגיליון.</a:t>
+            </a:r>
+          </a:p>
+          <a:p>
+            <a:r>
+              <a:t>חמש: Run once. ממלאים את הטופס בעצמכם... ותראו את המייל מגיע!</a:t>
+            </a:r>
+          </a:p>
+          <a:p>
+            <a:r>
+              <a:t>(רגע הוואו: בודקים את המייל בשידור חי)</a:t>
+            </a:r>
+          </a:p>
+          <a:p>
+            <a:r>
+              <a:t>מדליקים ON, והאוטומציה רצה לבד.</a:t>
+            </a:r>
+          </a:p>
+          <a:p>
+            <a:r>
+              <a:t>נתקעתם? כתבו "עזרה" בצ'אט. ובונוס למתקדמים: מודול AI שמנסח תשובה אישית לכל פנייה.</a:t>
             </a:r>
           </a:p>
           <a:p/>
           <a:p>
             <a:r>
-              <a:t>➡️ מעבר: ועכשיו, הרגע שחיכינו לו: יום הצגות.</a:t>
+              <a:t>➡️ מעבר: ולפני שמשאירים את זה לרוץ, ארבעה כללים.</a:t>
             </a:r>
           </a:p>
         </p:txBody>
@@ -2739,60 +2755,49 @@
           <a:lstStyle/>
           <a:p>
             <a:r>
-              <a:t>⏱ 20 דקות  |  🎯 משתתפים מציגים את העסק שבנו לאורך הקורס.</a:t>
+              <a:t>⏱ 3 דקות  |  🎯 שימוש אחראי באוטומציות ובסוכנים.</a:t>
             </a:r>
           </a:p>
           <a:p/>
           <a:p>
             <a:r>
-              <a:t>🏆 אפליקציית הקורס: פותחים הרשמה בלשונית "הגרלה", מגרילים מציגים, ואחר כך פותחים הצבעה.</a:t>
+              <a:t>🗣 מה לומר:</a:t>
+            </a:r>
+          </a:p>
+          <a:p>
+            <a:r>
+              <a:t>ארבעה כללים.</a:t>
+            </a:r>
+          </a:p>
+          <a:p>
+            <a:r>
+              <a:t>אדם מאשר: טיוטה ולא שליחה, הצעה ולא תשלום.</a:t>
+            </a:r>
+          </a:p>
+          <a:p>
+            <a:r>
+              <a:t>הרשאות קטנות: מחברים רק את מה שצריך.</a:t>
+            </a:r>
+          </a:p>
+          <a:p>
+            <a:r>
+              <a:t>יומן פעולות: פעם בשבוע בודקים מה רץ ומה נכשל.</a:t>
+            </a:r>
+          </a:p>
+          <a:p>
+            <a:r>
+              <a:t>ובלי סודות: סיסמאות ומספרי אשראי לא נכנסים להנחיות.</a:t>
+            </a:r>
+          </a:p>
+          <a:p>
+            <a:r>
+              <a:t>וזוכרים את תיקון 13? פרטי לקוחות נשארים מוגנים, גם באוטומציה.</a:t>
             </a:r>
           </a:p>
           <a:p/>
           <a:p>
             <a:r>
-              <a:t>🗣 מה לומר:</a:t>
-            </a:r>
-          </a:p>
-          <a:p>
-            <a:r>
-              <a:t>ארבעה מפגשים, עסק אחד. עכשיו מראים אותו.</a:t>
-            </a:r>
-          </a:p>
-          <a:p>
-            <a:r>
-              <a:t>נרשמים באפליקציה, בלשונית "הגרלה", ומדביקים קישור לאחד התוצרים.</a:t>
-            </a:r>
-          </a:p>
-          <a:p>
-            <a:r>
-              <a:t>(מחכים שתי דקות ומגרילים)</a:t>
-            </a:r>
-          </a:p>
-          <a:p>
-            <a:r>
-              <a:t>דקה לכל מציג: מה העסק, איך נראה המותג, ומה עובד אצלו לבד.</a:t>
-            </a:r>
-          </a:p>
-          <a:p>
-            <a:r>
-              <a:t>(מגרילים מציגים לפי הזמן, בערך 6 עד 8)</a:t>
-            </a:r>
-          </a:p>
-          <a:p>
-            <a:r>
-              <a:t>ועכשיו הצבעה: העסק הכי מרשים של הקורס.</a:t>
-            </a:r>
-          </a:p>
-          <a:p>
-            <a:r>
-              <a:t>(חושפים תוצאות)</a:t>
-            </a:r>
-          </a:p>
-          <a:p/>
-          <a:p>
-            <a:r>
-              <a:t>➡️ מעבר: וכל הכלים, במקום אחד.</a:t>
+              <a:t>➡️ מעבר: ועכשיו, הרגע שחיכינו לו: יום הצגות.</a:t>
             </a:r>
           </a:p>
         </p:txBody>
@@ -2862,34 +2867,60 @@
           <a:lstStyle/>
           <a:p>
             <a:r>
-              <a:t>⏱ 2 דקות  |  🎯 לתת את כל הקישורים להעתקה.</a:t>
+              <a:t>⏱ 20 דקות  |  🎯 משתתפים מציגים את העסק שבנו לאורך הקורס.</a:t>
             </a:r>
           </a:p>
           <a:p/>
           <a:p>
             <a:r>
+              <a:t>🏆 אפליקציית הקורס: פותחים הרשמה בלשונית "הגרלה", מגרילים מציגים, ואחר כך פותחים הצבעה.</a:t>
+            </a:r>
+          </a:p>
+          <a:p/>
+          <a:p>
+            <a:r>
               <a:t>🗣 מה לומר:</a:t>
             </a:r>
           </a:p>
           <a:p>
             <a:r>
-              <a:t>כל הכלים של היום, עם קישורים להעתקה. חלקם נותנים לכם קרדיטים חינם כשנרשמים דרכם.</a:t>
-            </a:r>
-          </a:p>
-          <a:p>
-            <a:r>
-              <a:t>הם גם בחוברת, ובארגז הכלים באפליקציה, שנשארת פתוחה גם אחרי הקורס.</a:t>
-            </a:r>
-          </a:p>
-          <a:p>
-            <a:r>
-              <a:t>(מדביקים את הקישורים בצ'אט)</a:t>
+              <a:t>ארבעה מפגשים, עסק אחד. עכשיו מראים אותו.</a:t>
+            </a:r>
+          </a:p>
+          <a:p>
+            <a:r>
+              <a:t>נרשמים באפליקציה, בלשונית "הגרלה", ומדביקים קישור לאחד התוצרים.</a:t>
+            </a:r>
+          </a:p>
+          <a:p>
+            <a:r>
+              <a:t>(מחכים שתי דקות ומגרילים)</a:t>
+            </a:r>
+          </a:p>
+          <a:p>
+            <a:r>
+              <a:t>דקה לכל מציג: מה העסק, איך נראה המותג, ומה עובד אצלו לבד.</a:t>
+            </a:r>
+          </a:p>
+          <a:p>
+            <a:r>
+              <a:t>(מגרילים מציגים לפי הזמן, בערך 6 עד 8)</a:t>
+            </a:r>
+          </a:p>
+          <a:p>
+            <a:r>
+              <a:t>ועכשיו הצבעה: העסק הכי מרשים של הקורס.</a:t>
+            </a:r>
+          </a:p>
+          <a:p>
+            <a:r>
+              <a:t>(חושפים תוצאות)</a:t>
             </a:r>
           </a:p>
           <a:p/>
           <a:p>
             <a:r>
-              <a:t>➡️ מעבר: בואו נסתכל רגע אחורה.</a:t>
+              <a:t>➡️ מעבר: וכל הכלים, במקום אחד.</a:t>
             </a:r>
           </a:p>
         </p:txBody>
@@ -2959,7 +2990,7 @@
           <a:lstStyle/>
           <a:p>
             <a:r>
-              <a:t>⏱ 2 דקות  |  🎯 לסכם את המסע: להכיר, לכתוב, לראות, להפעיל.</a:t>
+              <a:t>⏱ 2 דקות  |  🎯 לתת את כל הקישורים להעתקה.</a:t>
             </a:r>
           </a:p>
           <a:p/>
@@ -2970,38 +3001,23 @@
           </a:p>
           <a:p>
             <a:r>
-              <a:t>ארבעה מפגשים, ארבע שכבות.</a:t>
-            </a:r>
-          </a:p>
-          <a:p>
-            <a:r>
-              <a:t>להכיר: הכלים, המודלים, ואיך AI חושב.</a:t>
-            </a:r>
-          </a:p>
-          <a:p>
-            <a:r>
-              <a:t>לכתוב: הנחיות, מיילים ואפיון העסק.</a:t>
-            </a:r>
-          </a:p>
-          <a:p>
-            <a:r>
-              <a:t>לראות: מותג, אפליקציה, מצגת, קול ווידאו.</a:t>
-            </a:r>
-          </a:p>
-          <a:p>
-            <a:r>
-              <a:t>ולהפעיל: עוזר, אוטומציה וסוכנים.</a:t>
-            </a:r>
-          </a:p>
-          <a:p>
-            <a:r>
-              <a:t>וההמלצה שלי מכאן: כל שבוע, משימה אחת שעוברת ל-AI. בעוד חצי שנה, העסק שלכם ייראה אחרת.</a:t>
+              <a:t>כל הכלים של היום, עם קישורים להעתקה. חלקם נותנים לכם קרדיטים חינם כשנרשמים דרכם.</a:t>
+            </a:r>
+          </a:p>
+          <a:p>
+            <a:r>
+              <a:t>הם גם בחוברת, ובארגז הכלים באפליקציה, שנשארת פתוחה גם אחרי הקורס.</a:t>
+            </a:r>
+          </a:p>
+          <a:p>
+            <a:r>
+              <a:t>(מדביקים את הקישורים בצ'אט)</a:t>
             </a:r>
           </a:p>
           <a:p/>
           <a:p>
             <a:r>
-              <a:t>➡️ מעבר: ושלושה דברים אחרונים.</a:t>
+              <a:t>➡️ מעבר: בואו נסתכל רגע אחורה.</a:t>
             </a:r>
           </a:p>
         </p:txBody>
@@ -3027,6 +3043,118 @@
 </file>
 
 <file path=ppt/notesSlides/notesSlide54.xml><?xml version="1.0" encoding="utf-8"?>
+<p:notes xmlns:a="http://schemas.openxmlformats.org/drawingml/2006/main" xmlns:p="http://schemas.openxmlformats.org/presentationml/2006/main" xmlns:r="http://schemas.openxmlformats.org/officeDocument/2006/relationships">
+  <p:cSld>
+    <p:spTree>
+      <p:nvGrpSpPr>
+        <p:cNvPr id="1" name=""/>
+        <p:cNvGrpSpPr/>
+        <p:nvPr/>
+      </p:nvGrpSpPr>
+      <p:grpSpPr>
+        <a:xfrm>
+          <a:off x="0" y="0"/>
+          <a:ext cx="0" cy="0"/>
+          <a:chOff x="0" y="0"/>
+          <a:chExt cx="0" cy="0"/>
+        </a:xfrm>
+      </p:grpSpPr>
+      <p:sp>
+        <p:nvSpPr>
+          <p:cNvPr id="2" name="Slide Image Placeholder 1"/>
+          <p:cNvSpPr>
+            <a:spLocks noGrp="1"/>
+          </p:cNvSpPr>
+          <p:nvPr>
+            <p:ph type="sldImg" idx="2"/>
+          </p:nvPr>
+        </p:nvSpPr>
+        <p:spPr/>
+      </p:sp>
+      <p:sp>
+        <p:nvSpPr>
+          <p:cNvPr id="3" name="Notes Placeholder 2"/>
+          <p:cNvSpPr>
+            <a:spLocks noGrp="1"/>
+          </p:cNvSpPr>
+          <p:nvPr>
+            <p:ph type="body" idx="3" sz="quarter"/>
+          </p:nvPr>
+        </p:nvSpPr>
+        <p:spPr/>
+        <p:txBody>
+          <a:bodyPr/>
+          <a:lstStyle/>
+          <a:p>
+            <a:r>
+              <a:t>⏱ 2 דקות  |  🎯 לסכם את המסע: להכיר, לכתוב, לראות, להפעיל.</a:t>
+            </a:r>
+          </a:p>
+          <a:p/>
+          <a:p>
+            <a:r>
+              <a:t>🗣 מה לומר:</a:t>
+            </a:r>
+          </a:p>
+          <a:p>
+            <a:r>
+              <a:t>ארבעה מפגשים, ארבע שכבות.</a:t>
+            </a:r>
+          </a:p>
+          <a:p>
+            <a:r>
+              <a:t>להכיר: הכלים, המודלים, ואיך AI חושב.</a:t>
+            </a:r>
+          </a:p>
+          <a:p>
+            <a:r>
+              <a:t>לכתוב: הנחיות, מיילים ואפיון העסק.</a:t>
+            </a:r>
+          </a:p>
+          <a:p>
+            <a:r>
+              <a:t>לראות: מותג, אפליקציה, מצגת, קול ווידאו.</a:t>
+            </a:r>
+          </a:p>
+          <a:p>
+            <a:r>
+              <a:t>ולהפעיל: עוזר, אוטומציה וסוכנים.</a:t>
+            </a:r>
+          </a:p>
+          <a:p>
+            <a:r>
+              <a:t>וההמלצה שלי מכאן: כל שבוע, משימה אחת שעוברת ל-AI. בעוד חצי שנה, העסק שלכם ייראה אחרת.</a:t>
+            </a:r>
+          </a:p>
+          <a:p/>
+          <a:p>
+            <a:r>
+              <a:t>➡️ מעבר: ושלושה דברים אחרונים.</a:t>
+            </a:r>
+          </a:p>
+        </p:txBody>
+      </p:sp>
+      <p:sp>
+        <p:nvSpPr>
+          <p:cNvPr id="4" name="Slide Number Placeholder 3"/>
+          <p:cNvSpPr>
+            <a:spLocks noGrp="1"/>
+          </p:cNvSpPr>
+          <p:nvPr>
+            <p:ph type="sldNum" idx="5" sz="quarter"/>
+          </p:nvPr>
+        </p:nvSpPr>
+        <p:spPr/>
+      </p:sp>
+    </p:spTree>
+  </p:cSld>
+  <p:clrMapOvr>
+    <a:masterClrMapping/>
+  </p:clrMapOvr>
+</p:notes>
+</file>
+
+<file path=ppt/notesSlides/notesSlide55.xml><?xml version="1.0" encoding="utf-8"?>
 <p:notes xmlns:a="http://schemas.openxmlformats.org/drawingml/2006/main" xmlns:p="http://schemas.openxmlformats.org/presentationml/2006/main" xmlns:r="http://schemas.openxmlformats.org/officeDocument/2006/relationships">
   <p:cSld>
     <p:spTree>
@@ -13749,7 +13877,7 @@
                 <a:latin typeface="Arial"/>
                 <a:cs typeface="Arial"/>
               </a:rPr>
-              <a:t>🤖 הסוכנים כבר כאן</a:t>
+              <a:t>🔄 איך סוכן חושב מבפנים?</a:t>
             </a:r>
           </a:p>
         </p:txBody>
@@ -13790,7 +13918,7 @@
                 <a:latin typeface="Arial"/>
                 <a:cs typeface="Arial"/>
               </a:rPr>
-              <a:t>רק להכיר: כולם בתשלום או בהזמנה. לא צריך לפתוח חשבון</a:t>
+              <a:t>ההיגיון: לולאה אחת שחוזרת עד שהמשימה נגמרת</a:t>
             </a:r>
           </a:p>
         </p:txBody>
@@ -13803,352 +13931,12 @@
         </p:nvSpPr>
         <p:spPr>
           <a:xfrm>
-            <a:off x="9363455" y="1874519"/>
-            <a:ext cx="2139696" cy="502920"/>
+            <a:off x="7498079" y="1874519"/>
+            <a:ext cx="4023360" cy="1554480"/>
           </a:xfrm>
           <a:prstGeom prst="roundRect">
             <a:avLst>
-              <a:gd name="adj" fmla="val 15000"/>
-            </a:avLst>
-          </a:prstGeom>
-          <a:solidFill>
-            <a:srgbClr val="022349"/>
-          </a:solidFill>
-          <a:ln>
-            <a:noFill/>
-          </a:ln>
-          <a:effectLst/>
-        </p:spPr>
-        <p:style>
-          <a:lnRef idx="1">
-            <a:schemeClr val="accent1"/>
-          </a:lnRef>
-          <a:fillRef idx="3">
-            <a:schemeClr val="accent1"/>
-          </a:fillRef>
-          <a:effectRef idx="2">
-            <a:schemeClr val="accent1"/>
-          </a:effectRef>
-          <a:fontRef idx="minor">
-            <a:schemeClr val="lt1"/>
-          </a:fontRef>
-        </p:style>
-        <p:txBody>
-          <a:bodyPr rtlCol="0" anchor="ctr"/>
-          <a:lstStyle/>
-          <a:p/>
-        </p:txBody>
-      </p:sp>
-      <p:sp>
-        <p:nvSpPr>
-          <p:cNvPr id="5" name="TextBox 4"/>
-          <p:cNvSpPr txBox="1"/>
-          <p:nvPr/>
-        </p:nvSpPr>
-        <p:spPr>
-          <a:xfrm>
-            <a:off x="9427463" y="1874519"/>
-            <a:ext cx="2011679" cy="502920"/>
-          </a:xfrm>
-          <a:prstGeom prst="rect">
-            <a:avLst/>
-          </a:prstGeom>
-          <a:noFill/>
-        </p:spPr>
-        <p:txBody>
-          <a:bodyPr wrap="square" lIns="0" rIns="0" tIns="0" bIns="0" anchor="ctr" rtlCol="0">
-            <a:spAutoFit/>
-          </a:bodyPr>
-          <a:lstStyle/>
-          <a:p>
-            <a:pPr rtl="1" algn="ctr" marL="0" indent="0">
-              <a:lnSpc>
-                <a:spcPct val="108000"/>
-              </a:lnSpc>
-              <a:buNone/>
-            </a:pPr>
-            <a:r>
-              <a:rPr sz="1400" b="1" i="0" lang="he-IL">
-                <a:solidFill>
-                  <a:srgbClr val="F2F5FA"/>
-                </a:solidFill>
-                <a:latin typeface="Arial"/>
-                <a:cs typeface="Arial"/>
-              </a:rPr>
-              <a:t/>
-            </a:r>
-          </a:p>
-        </p:txBody>
-      </p:sp>
-      <p:sp>
-        <p:nvSpPr>
-          <p:cNvPr id="6" name="Rounded Rectangle 5"/>
-          <p:cNvSpPr/>
-          <p:nvPr/>
-        </p:nvSpPr>
-        <p:spPr>
-          <a:xfrm>
-            <a:off x="6483095" y="1874519"/>
-            <a:ext cx="2825496" cy="502920"/>
-          </a:xfrm>
-          <a:prstGeom prst="roundRect">
-            <a:avLst>
-              <a:gd name="adj" fmla="val 15000"/>
-            </a:avLst>
-          </a:prstGeom>
-          <a:solidFill>
-            <a:srgbClr val="022349"/>
-          </a:solidFill>
-          <a:ln>
-            <a:noFill/>
-          </a:ln>
-          <a:effectLst/>
-        </p:spPr>
-        <p:style>
-          <a:lnRef idx="1">
-            <a:schemeClr val="accent1"/>
-          </a:lnRef>
-          <a:fillRef idx="3">
-            <a:schemeClr val="accent1"/>
-          </a:fillRef>
-          <a:effectRef idx="2">
-            <a:schemeClr val="accent1"/>
-          </a:effectRef>
-          <a:fontRef idx="minor">
-            <a:schemeClr val="lt1"/>
-          </a:fontRef>
-        </p:style>
-        <p:txBody>
-          <a:bodyPr rtlCol="0" anchor="ctr"/>
-          <a:lstStyle/>
-          <a:p/>
-        </p:txBody>
-      </p:sp>
-      <p:sp>
-        <p:nvSpPr>
-          <p:cNvPr id="7" name="TextBox 6"/>
-          <p:cNvSpPr txBox="1"/>
-          <p:nvPr/>
-        </p:nvSpPr>
-        <p:spPr>
-          <a:xfrm>
-            <a:off x="6547103" y="1874519"/>
-            <a:ext cx="2697479" cy="502920"/>
-          </a:xfrm>
-          <a:prstGeom prst="rect">
-            <a:avLst/>
-          </a:prstGeom>
-          <a:noFill/>
-        </p:spPr>
-        <p:txBody>
-          <a:bodyPr wrap="square" lIns="0" rIns="0" tIns="0" bIns="0" anchor="ctr" rtlCol="0">
-            <a:spAutoFit/>
-          </a:bodyPr>
-          <a:lstStyle/>
-          <a:p>
-            <a:pPr rtl="1" algn="ctr" marL="0" indent="0">
-              <a:lnSpc>
-                <a:spcPct val="108000"/>
-              </a:lnSpc>
-              <a:buNone/>
-            </a:pPr>
-            <a:r>
-              <a:rPr sz="1400" b="1" i="0" lang="he-IL">
-                <a:solidFill>
-                  <a:srgbClr val="F2F5FA"/>
-                </a:solidFill>
-                <a:latin typeface="Arial"/>
-                <a:cs typeface="Arial"/>
-              </a:rPr>
-              <a:t>Dots (OpenAI)</a:t>
-            </a:r>
-          </a:p>
-        </p:txBody>
-      </p:sp>
-      <p:sp>
-        <p:nvSpPr>
-          <p:cNvPr id="8" name="Rounded Rectangle 7"/>
-          <p:cNvSpPr/>
-          <p:nvPr/>
-        </p:nvSpPr>
-        <p:spPr>
-          <a:xfrm>
-            <a:off x="3602735" y="1874519"/>
-            <a:ext cx="2825496" cy="502920"/>
-          </a:xfrm>
-          <a:prstGeom prst="roundRect">
-            <a:avLst>
-              <a:gd name="adj" fmla="val 15000"/>
-            </a:avLst>
-          </a:prstGeom>
-          <a:solidFill>
-            <a:srgbClr val="022349"/>
-          </a:solidFill>
-          <a:ln>
-            <a:noFill/>
-          </a:ln>
-          <a:effectLst/>
-        </p:spPr>
-        <p:style>
-          <a:lnRef idx="1">
-            <a:schemeClr val="accent1"/>
-          </a:lnRef>
-          <a:fillRef idx="3">
-            <a:schemeClr val="accent1"/>
-          </a:fillRef>
-          <a:effectRef idx="2">
-            <a:schemeClr val="accent1"/>
-          </a:effectRef>
-          <a:fontRef idx="minor">
-            <a:schemeClr val="lt1"/>
-          </a:fontRef>
-        </p:style>
-        <p:txBody>
-          <a:bodyPr rtlCol="0" anchor="ctr"/>
-          <a:lstStyle/>
-          <a:p/>
-        </p:txBody>
-      </p:sp>
-      <p:sp>
-        <p:nvSpPr>
-          <p:cNvPr id="9" name="TextBox 8"/>
-          <p:cNvSpPr txBox="1"/>
-          <p:nvPr/>
-        </p:nvSpPr>
-        <p:spPr>
-          <a:xfrm>
-            <a:off x="3666743" y="1874519"/>
-            <a:ext cx="2697479" cy="502920"/>
-          </a:xfrm>
-          <a:prstGeom prst="rect">
-            <a:avLst/>
-          </a:prstGeom>
-          <a:noFill/>
-        </p:spPr>
-        <p:txBody>
-          <a:bodyPr wrap="square" lIns="0" rIns="0" tIns="0" bIns="0" anchor="ctr" rtlCol="0">
-            <a:spAutoFit/>
-          </a:bodyPr>
-          <a:lstStyle/>
-          <a:p>
-            <a:pPr rtl="1" algn="ctr" marL="0" indent="0">
-              <a:lnSpc>
-                <a:spcPct val="108000"/>
-              </a:lnSpc>
-              <a:buNone/>
-            </a:pPr>
-            <a:r>
-              <a:rPr sz="1400" b="1" i="0" lang="he-IL">
-                <a:solidFill>
-                  <a:srgbClr val="F2F5FA"/>
-                </a:solidFill>
-                <a:latin typeface="Arial"/>
-                <a:cs typeface="Arial"/>
-              </a:rPr>
-              <a:t>Grok Bot (xAI)</a:t>
-            </a:r>
-          </a:p>
-        </p:txBody>
-      </p:sp>
-      <p:sp>
-        <p:nvSpPr>
-          <p:cNvPr id="10" name="Rounded Rectangle 9"/>
-          <p:cNvSpPr/>
-          <p:nvPr/>
-        </p:nvSpPr>
-        <p:spPr>
-          <a:xfrm>
-            <a:off x="685799" y="1874519"/>
-            <a:ext cx="2862072" cy="502920"/>
-          </a:xfrm>
-          <a:prstGeom prst="roundRect">
-            <a:avLst>
-              <a:gd name="adj" fmla="val 15000"/>
-            </a:avLst>
-          </a:prstGeom>
-          <a:solidFill>
-            <a:srgbClr val="022349"/>
-          </a:solidFill>
-          <a:ln>
-            <a:noFill/>
-          </a:ln>
-          <a:effectLst/>
-        </p:spPr>
-        <p:style>
-          <a:lnRef idx="1">
-            <a:schemeClr val="accent1"/>
-          </a:lnRef>
-          <a:fillRef idx="3">
-            <a:schemeClr val="accent1"/>
-          </a:fillRef>
-          <a:effectRef idx="2">
-            <a:schemeClr val="accent1"/>
-          </a:effectRef>
-          <a:fontRef idx="minor">
-            <a:schemeClr val="lt1"/>
-          </a:fontRef>
-        </p:style>
-        <p:txBody>
-          <a:bodyPr rtlCol="0" anchor="ctr"/>
-          <a:lstStyle/>
-          <a:p/>
-        </p:txBody>
-      </p:sp>
-      <p:sp>
-        <p:nvSpPr>
-          <p:cNvPr id="11" name="TextBox 10"/>
-          <p:cNvSpPr txBox="1"/>
-          <p:nvPr/>
-        </p:nvSpPr>
-        <p:spPr>
-          <a:xfrm>
-            <a:off x="749807" y="1874519"/>
-            <a:ext cx="2734056" cy="502920"/>
-          </a:xfrm>
-          <a:prstGeom prst="rect">
-            <a:avLst/>
-          </a:prstGeom>
-          <a:noFill/>
-        </p:spPr>
-        <p:txBody>
-          <a:bodyPr wrap="square" lIns="0" rIns="0" tIns="0" bIns="0" anchor="ctr" rtlCol="0">
-            <a:spAutoFit/>
-          </a:bodyPr>
-          <a:lstStyle/>
-          <a:p>
-            <a:pPr rtl="1" algn="ctr" marL="0" indent="0">
-              <a:lnSpc>
-                <a:spcPct val="108000"/>
-              </a:lnSpc>
-              <a:buNone/>
-            </a:pPr>
-            <a:r>
-              <a:rPr sz="1400" b="1" i="0" lang="he-IL">
-                <a:solidFill>
-                  <a:srgbClr val="F2F5FA"/>
-                </a:solidFill>
-                <a:latin typeface="Arial"/>
-                <a:cs typeface="Arial"/>
-              </a:rPr>
-              <a:t>Instinct</a:t>
-            </a:r>
-          </a:p>
-        </p:txBody>
-      </p:sp>
-      <p:sp>
-        <p:nvSpPr>
-          <p:cNvPr id="12" name="Rounded Rectangle 11"/>
-          <p:cNvSpPr/>
-          <p:nvPr/>
-        </p:nvSpPr>
-        <p:spPr>
-          <a:xfrm>
-            <a:off x="9363455" y="2450591"/>
-            <a:ext cx="2139696" cy="731520"/>
-          </a:xfrm>
-          <a:prstGeom prst="roundRect">
-            <a:avLst>
-              <a:gd name="adj" fmla="val 12000"/>
+              <a:gd name="adj" fmla="val 3000"/>
             </a:avLst>
           </a:prstGeom>
           <a:solidFill>
@@ -14183,22 +13971,83 @@
       </p:sp>
       <p:sp>
         <p:nvSpPr>
-          <p:cNvPr id="13" name="TextBox 12"/>
-          <p:cNvSpPr txBox="1"/>
-          <p:nvPr/>
-        </p:nvSpPr>
-        <p:spPr>
-          <a:xfrm>
-            <a:off x="9427463" y="2450591"/>
-            <a:ext cx="2011679" cy="731520"/>
-          </a:xfrm>
-          <a:prstGeom prst="rect">
-            <a:avLst/>
-          </a:prstGeom>
-          <a:noFill/>
-        </p:spPr>
-        <p:txBody>
-          <a:bodyPr wrap="square" lIns="0" rIns="0" tIns="0" bIns="0" anchor="ctr" rtlCol="0">
+          <p:cNvPr id="5" name="Oval 4"/>
+          <p:cNvSpPr/>
+          <p:nvPr/>
+        </p:nvSpPr>
+        <p:spPr>
+          <a:xfrm>
+            <a:off x="10744200" y="2103120"/>
+            <a:ext cx="594360" cy="594360"/>
+          </a:xfrm>
+          <a:prstGeom prst="ellipse">
+            <a:avLst/>
+          </a:prstGeom>
+          <a:solidFill>
+            <a:srgbClr val="022349"/>
+          </a:solidFill>
+          <a:ln w="19050">
+            <a:solidFill>
+              <a:srgbClr val="487CFF"/>
+            </a:solidFill>
+          </a:ln>
+          <a:effectLst/>
+        </p:spPr>
+        <p:style>
+          <a:lnRef idx="1">
+            <a:schemeClr val="accent1"/>
+          </a:lnRef>
+          <a:fillRef idx="3">
+            <a:schemeClr val="accent1"/>
+          </a:fillRef>
+          <a:effectRef idx="2">
+            <a:schemeClr val="accent1"/>
+          </a:effectRef>
+          <a:fontRef idx="minor">
+            <a:schemeClr val="lt1"/>
+          </a:fontRef>
+        </p:style>
+        <p:txBody>
+          <a:bodyPr rtlCol="0" anchor="ctr" lIns="0" rIns="0" tIns="0" bIns="0"/>
+          <a:lstStyle/>
+          <a:p>
+            <a:pPr rtl="1" algn="ctr" marL="0" indent="0">
+              <a:lnSpc>
+                <a:spcPct val="108000"/>
+              </a:lnSpc>
+              <a:buNone/>
+            </a:pPr>
+            <a:r>
+              <a:rPr sz="1800" b="1" i="0" lang="he-IL">
+                <a:solidFill>
+                  <a:srgbClr val="F2F5FA"/>
+                </a:solidFill>
+                <a:latin typeface="Arial"/>
+                <a:cs typeface="Arial"/>
+              </a:rPr>
+              <a:t>🎯</a:t>
+            </a:r>
+          </a:p>
+        </p:txBody>
+      </p:sp>
+      <p:sp>
+        <p:nvSpPr>
+          <p:cNvPr id="6" name="TextBox 5"/>
+          <p:cNvSpPr txBox="1"/>
+          <p:nvPr/>
+        </p:nvSpPr>
+        <p:spPr>
+          <a:xfrm>
+            <a:off x="7680959" y="2103120"/>
+            <a:ext cx="3017520" cy="411480"/>
+          </a:xfrm>
+          <a:prstGeom prst="rect">
+            <a:avLst/>
+          </a:prstGeom>
+          <a:noFill/>
+        </p:spPr>
+        <p:txBody>
+          <a:bodyPr wrap="square" lIns="0" rIns="0" tIns="0" bIns="0" anchor="t" rtlCol="0">
             <a:spAutoFit/>
           </a:bodyPr>
           <a:lstStyle/>
@@ -14210,32 +14059,262 @@
               <a:buNone/>
             </a:pPr>
             <a:r>
-              <a:rPr sz="1300" b="1" i="0" lang="he-IL">
-                <a:solidFill>
-                  <a:srgbClr val="F2F5FA"/>
-                </a:solidFill>
-                <a:latin typeface="Arial"/>
-                <a:cs typeface="Arial"/>
-              </a:rPr>
-              <a:t>מה זה</a:t>
-            </a:r>
-          </a:p>
-        </p:txBody>
-      </p:sp>
-      <p:sp>
-        <p:nvSpPr>
-          <p:cNvPr id="14" name="Rounded Rectangle 13"/>
+              <a:rPr sz="1800" b="1" i="0" lang="he-IL">
+                <a:solidFill>
+                  <a:srgbClr val="EBEDF0"/>
+                </a:solidFill>
+                <a:latin typeface="Arial"/>
+                <a:cs typeface="Arial"/>
+              </a:rPr>
+              <a:t>מטרה</a:t>
+            </a:r>
+          </a:p>
+        </p:txBody>
+      </p:sp>
+      <p:sp>
+        <p:nvSpPr>
+          <p:cNvPr id="7" name="TextBox 6"/>
+          <p:cNvSpPr txBox="1"/>
+          <p:nvPr/>
+        </p:nvSpPr>
+        <p:spPr>
+          <a:xfrm>
+            <a:off x="7680959" y="2606039"/>
+            <a:ext cx="3017520" cy="731520"/>
+          </a:xfrm>
+          <a:prstGeom prst="rect">
+            <a:avLst/>
+          </a:prstGeom>
+          <a:noFill/>
+        </p:spPr>
+        <p:txBody>
+          <a:bodyPr wrap="square" lIns="0" rIns="0" tIns="0" bIns="0" anchor="t" rtlCol="0">
+            <a:spAutoFit/>
+          </a:bodyPr>
+          <a:lstStyle/>
+          <a:p>
+            <a:pPr rtl="1" algn="r" marL="0" indent="0">
+              <a:lnSpc>
+                <a:spcPct val="108000"/>
+              </a:lnSpc>
+              <a:buNone/>
+            </a:pPr>
+            <a:r>
+              <a:rPr sz="1350" b="0" i="0" lang="he-IL">
+                <a:solidFill>
+                  <a:srgbClr val="A9B4C6"/>
+                </a:solidFill>
+                <a:latin typeface="Arial"/>
+                <a:cs typeface="Arial"/>
+              </a:rPr>
+              <a:t>"תזמין לי טכנאי ליום שלישי"</a:t>
+            </a:r>
+          </a:p>
+        </p:txBody>
+      </p:sp>
+      <p:sp>
+        <p:nvSpPr>
+          <p:cNvPr id="8" name="Rounded Rectangle 7"/>
           <p:cNvSpPr/>
           <p:nvPr/>
         </p:nvSpPr>
         <p:spPr>
           <a:xfrm>
-            <a:off x="6483095" y="2450591"/>
-            <a:ext cx="2825496" cy="731520"/>
+            <a:off x="7498079" y="3749039"/>
+            <a:ext cx="4023360" cy="1554480"/>
           </a:xfrm>
           <a:prstGeom prst="roundRect">
             <a:avLst>
-              <a:gd name="adj" fmla="val 12000"/>
+              <a:gd name="adj" fmla="val 3000"/>
+            </a:avLst>
+          </a:prstGeom>
+          <a:solidFill>
+            <a:srgbClr val="022349"/>
+          </a:solidFill>
+          <a:ln w="19050">
+            <a:solidFill>
+              <a:srgbClr val="487CFF"/>
+            </a:solidFill>
+          </a:ln>
+          <a:effectLst/>
+        </p:spPr>
+        <p:style>
+          <a:lnRef idx="1">
+            <a:schemeClr val="accent1"/>
+          </a:lnRef>
+          <a:fillRef idx="3">
+            <a:schemeClr val="accent1"/>
+          </a:fillRef>
+          <a:effectRef idx="2">
+            <a:schemeClr val="accent1"/>
+          </a:effectRef>
+          <a:fontRef idx="minor">
+            <a:schemeClr val="lt1"/>
+          </a:fontRef>
+        </p:style>
+        <p:txBody>
+          <a:bodyPr rtlCol="0" anchor="ctr"/>
+          <a:lstStyle/>
+          <a:p/>
+        </p:txBody>
+      </p:sp>
+      <p:sp>
+        <p:nvSpPr>
+          <p:cNvPr id="9" name="Oval 8"/>
+          <p:cNvSpPr/>
+          <p:nvPr/>
+        </p:nvSpPr>
+        <p:spPr>
+          <a:xfrm>
+            <a:off x="10744200" y="3977639"/>
+            <a:ext cx="594360" cy="594360"/>
+          </a:xfrm>
+          <a:prstGeom prst="ellipse">
+            <a:avLst/>
+          </a:prstGeom>
+          <a:solidFill>
+            <a:srgbClr val="022349"/>
+          </a:solidFill>
+          <a:ln w="19050">
+            <a:solidFill>
+              <a:srgbClr val="487CFF"/>
+            </a:solidFill>
+          </a:ln>
+          <a:effectLst/>
+        </p:spPr>
+        <p:style>
+          <a:lnRef idx="1">
+            <a:schemeClr val="accent1"/>
+          </a:lnRef>
+          <a:fillRef idx="3">
+            <a:schemeClr val="accent1"/>
+          </a:fillRef>
+          <a:effectRef idx="2">
+            <a:schemeClr val="accent1"/>
+          </a:effectRef>
+          <a:fontRef idx="minor">
+            <a:schemeClr val="lt1"/>
+          </a:fontRef>
+        </p:style>
+        <p:txBody>
+          <a:bodyPr rtlCol="0" anchor="ctr" lIns="0" rIns="0" tIns="0" bIns="0"/>
+          <a:lstStyle/>
+          <a:p>
+            <a:pPr rtl="1" algn="ctr" marL="0" indent="0">
+              <a:lnSpc>
+                <a:spcPct val="108000"/>
+              </a:lnSpc>
+              <a:buNone/>
+            </a:pPr>
+            <a:r>
+              <a:rPr sz="1800" b="1" i="0" lang="he-IL">
+                <a:solidFill>
+                  <a:srgbClr val="F2F5FA"/>
+                </a:solidFill>
+                <a:latin typeface="Arial"/>
+                <a:cs typeface="Arial"/>
+              </a:rPr>
+              <a:t>🧠</a:t>
+            </a:r>
+          </a:p>
+        </p:txBody>
+      </p:sp>
+      <p:sp>
+        <p:nvSpPr>
+          <p:cNvPr id="10" name="TextBox 9"/>
+          <p:cNvSpPr txBox="1"/>
+          <p:nvPr/>
+        </p:nvSpPr>
+        <p:spPr>
+          <a:xfrm>
+            <a:off x="7680959" y="3977639"/>
+            <a:ext cx="3017520" cy="411480"/>
+          </a:xfrm>
+          <a:prstGeom prst="rect">
+            <a:avLst/>
+          </a:prstGeom>
+          <a:noFill/>
+        </p:spPr>
+        <p:txBody>
+          <a:bodyPr wrap="square" lIns="0" rIns="0" tIns="0" bIns="0" anchor="t" rtlCol="0">
+            <a:spAutoFit/>
+          </a:bodyPr>
+          <a:lstStyle/>
+          <a:p>
+            <a:pPr rtl="1" algn="r" marL="0" indent="0">
+              <a:lnSpc>
+                <a:spcPct val="108000"/>
+              </a:lnSpc>
+              <a:buNone/>
+            </a:pPr>
+            <a:r>
+              <a:rPr sz="1800" b="1" i="0" lang="he-IL">
+                <a:solidFill>
+                  <a:srgbClr val="EBEDF0"/>
+                </a:solidFill>
+                <a:latin typeface="Arial"/>
+                <a:cs typeface="Arial"/>
+              </a:rPr>
+              <a:t>חושב ומתכנן</a:t>
+            </a:r>
+          </a:p>
+        </p:txBody>
+      </p:sp>
+      <p:sp>
+        <p:nvSpPr>
+          <p:cNvPr id="11" name="TextBox 10"/>
+          <p:cNvSpPr txBox="1"/>
+          <p:nvPr/>
+        </p:nvSpPr>
+        <p:spPr>
+          <a:xfrm>
+            <a:off x="7680959" y="4480559"/>
+            <a:ext cx="3017520" cy="731520"/>
+          </a:xfrm>
+          <a:prstGeom prst="rect">
+            <a:avLst/>
+          </a:prstGeom>
+          <a:noFill/>
+        </p:spPr>
+        <p:txBody>
+          <a:bodyPr wrap="square" lIns="0" rIns="0" tIns="0" bIns="0" anchor="t" rtlCol="0">
+            <a:spAutoFit/>
+          </a:bodyPr>
+          <a:lstStyle/>
+          <a:p>
+            <a:pPr rtl="1" algn="r" marL="0" indent="0">
+              <a:lnSpc>
+                <a:spcPct val="108000"/>
+              </a:lnSpc>
+              <a:buNone/>
+            </a:pPr>
+            <a:r>
+              <a:rPr sz="1350" b="0" i="0" lang="he-IL">
+                <a:solidFill>
+                  <a:srgbClr val="A9B4C6"/>
+                </a:solidFill>
+                <a:latin typeface="Arial"/>
+                <a:cs typeface="Arial"/>
+              </a:rPr>
+              <a:t>מה הצעד הבא? איזה כלי צריך?</a:t>
+            </a:r>
+          </a:p>
+        </p:txBody>
+      </p:sp>
+      <p:sp>
+        <p:nvSpPr>
+          <p:cNvPr id="12" name="Rounded Rectangle 11"/>
+          <p:cNvSpPr/>
+          <p:nvPr/>
+        </p:nvSpPr>
+        <p:spPr>
+          <a:xfrm>
+            <a:off x="2743200" y="3749039"/>
+            <a:ext cx="4023360" cy="1554480"/>
+          </a:xfrm>
+          <a:prstGeom prst="roundRect">
+            <a:avLst>
+              <a:gd name="adj" fmla="val 3000"/>
             </a:avLst>
           </a:prstGeom>
           <a:solidFill>
@@ -14270,41 +14349,143 @@
       </p:sp>
       <p:sp>
         <p:nvSpPr>
+          <p:cNvPr id="13" name="Oval 12"/>
+          <p:cNvSpPr/>
+          <p:nvPr/>
+        </p:nvSpPr>
+        <p:spPr>
+          <a:xfrm>
+            <a:off x="5989320" y="3977639"/>
+            <a:ext cx="594360" cy="594360"/>
+          </a:xfrm>
+          <a:prstGeom prst="ellipse">
+            <a:avLst/>
+          </a:prstGeom>
+          <a:solidFill>
+            <a:srgbClr val="022349"/>
+          </a:solidFill>
+          <a:ln w="19050">
+            <a:solidFill>
+              <a:srgbClr val="487CFF"/>
+            </a:solidFill>
+          </a:ln>
+          <a:effectLst/>
+        </p:spPr>
+        <p:style>
+          <a:lnRef idx="1">
+            <a:schemeClr val="accent1"/>
+          </a:lnRef>
+          <a:fillRef idx="3">
+            <a:schemeClr val="accent1"/>
+          </a:fillRef>
+          <a:effectRef idx="2">
+            <a:schemeClr val="accent1"/>
+          </a:effectRef>
+          <a:fontRef idx="minor">
+            <a:schemeClr val="lt1"/>
+          </a:fontRef>
+        </p:style>
+        <p:txBody>
+          <a:bodyPr rtlCol="0" anchor="ctr" lIns="0" rIns="0" tIns="0" bIns="0"/>
+          <a:lstStyle/>
+          <a:p>
+            <a:pPr rtl="1" algn="ctr" marL="0" indent="0">
+              <a:lnSpc>
+                <a:spcPct val="108000"/>
+              </a:lnSpc>
+              <a:buNone/>
+            </a:pPr>
+            <a:r>
+              <a:rPr sz="1800" b="1" i="0" lang="he-IL">
+                <a:solidFill>
+                  <a:srgbClr val="F2F5FA"/>
+                </a:solidFill>
+                <a:latin typeface="Arial"/>
+                <a:cs typeface="Arial"/>
+              </a:rPr>
+              <a:t>🛠️</a:t>
+            </a:r>
+          </a:p>
+        </p:txBody>
+      </p:sp>
+      <p:sp>
+        <p:nvSpPr>
+          <p:cNvPr id="14" name="TextBox 13"/>
+          <p:cNvSpPr txBox="1"/>
+          <p:nvPr/>
+        </p:nvSpPr>
+        <p:spPr>
+          <a:xfrm>
+            <a:off x="2926080" y="3977639"/>
+            <a:ext cx="3017520" cy="411480"/>
+          </a:xfrm>
+          <a:prstGeom prst="rect">
+            <a:avLst/>
+          </a:prstGeom>
+          <a:noFill/>
+        </p:spPr>
+        <p:txBody>
+          <a:bodyPr wrap="square" lIns="0" rIns="0" tIns="0" bIns="0" anchor="t" rtlCol="0">
+            <a:spAutoFit/>
+          </a:bodyPr>
+          <a:lstStyle/>
+          <a:p>
+            <a:pPr rtl="1" algn="r" marL="0" indent="0">
+              <a:lnSpc>
+                <a:spcPct val="108000"/>
+              </a:lnSpc>
+              <a:buNone/>
+            </a:pPr>
+            <a:r>
+              <a:rPr sz="1800" b="1" i="0" lang="he-IL">
+                <a:solidFill>
+                  <a:srgbClr val="EBEDF0"/>
+                </a:solidFill>
+                <a:latin typeface="Arial"/>
+                <a:cs typeface="Arial"/>
+              </a:rPr>
+              <a:t>פועל</a:t>
+            </a:r>
+          </a:p>
+        </p:txBody>
+      </p:sp>
+      <p:sp>
+        <p:nvSpPr>
           <p:cNvPr id="15" name="TextBox 14"/>
           <p:cNvSpPr txBox="1"/>
           <p:nvPr/>
         </p:nvSpPr>
         <p:spPr>
           <a:xfrm>
-            <a:off x="6547103" y="2450591"/>
-            <a:ext cx="2697479" cy="731520"/>
-          </a:xfrm>
-          <a:prstGeom prst="rect">
-            <a:avLst/>
-          </a:prstGeom>
-          <a:noFill/>
-        </p:spPr>
-        <p:txBody>
-          <a:bodyPr wrap="square" lIns="0" rIns="0" tIns="0" bIns="0" anchor="ctr" rtlCol="0">
-            <a:spAutoFit/>
-          </a:bodyPr>
-          <a:lstStyle/>
-          <a:p>
-            <a:pPr rtl="1" algn="ctr" marL="0" indent="0">
-              <a:lnSpc>
-                <a:spcPct val="108000"/>
-              </a:lnSpc>
-              <a:buNone/>
-            </a:pPr>
-            <a:r>
-              <a:rPr sz="1300" b="0" i="0" lang="he-IL">
-                <a:solidFill>
-                  <a:srgbClr val="EBEDF0"/>
-                </a:solidFill>
-                <a:latin typeface="Arial"/>
-                <a:cs typeface="Arial"/>
-              </a:rPr>
-              <a:t>עוזר עם מחשב משלו בענן</a:t>
+            <a:off x="2926080" y="4480559"/>
+            <a:ext cx="3017520" cy="731520"/>
+          </a:xfrm>
+          <a:prstGeom prst="rect">
+            <a:avLst/>
+          </a:prstGeom>
+          <a:noFill/>
+        </p:spPr>
+        <p:txBody>
+          <a:bodyPr wrap="square" lIns="0" rIns="0" tIns="0" bIns="0" anchor="t" rtlCol="0">
+            <a:spAutoFit/>
+          </a:bodyPr>
+          <a:lstStyle/>
+          <a:p>
+            <a:pPr rtl="1" algn="r" marL="0" indent="0">
+              <a:lnSpc>
+                <a:spcPct val="108000"/>
+              </a:lnSpc>
+              <a:buNone/>
+            </a:pPr>
+            <a:r>
+              <a:rPr sz="1350" b="0" i="0" lang="he-IL">
+                <a:solidFill>
+                  <a:srgbClr val="A9B4C6"/>
+                </a:solidFill>
+                <a:latin typeface="Arial"/>
+                <a:cs typeface="Arial"/>
+              </a:rPr>
+              <a:t>משתמש בכלי: חיפוש, מייל, יומן, טלפון</a:t>
             </a:r>
           </a:p>
         </p:txBody>
@@ -14317,12 +14498,12 @@
         </p:nvSpPr>
         <p:spPr>
           <a:xfrm>
-            <a:off x="3602735" y="2450591"/>
-            <a:ext cx="2825496" cy="731520"/>
+            <a:off x="2743200" y="1874519"/>
+            <a:ext cx="4023360" cy="1554480"/>
           </a:xfrm>
           <a:prstGeom prst="roundRect">
             <a:avLst>
-              <a:gd name="adj" fmla="val 12000"/>
+              <a:gd name="adj" fmla="val 3000"/>
             </a:avLst>
           </a:prstGeom>
           <a:solidFill>
@@ -14357,14 +14538,365 @@
       </p:sp>
       <p:sp>
         <p:nvSpPr>
-          <p:cNvPr id="17" name="TextBox 16"/>
-          <p:cNvSpPr txBox="1"/>
-          <p:nvPr/>
-        </p:nvSpPr>
-        <p:spPr>
-          <a:xfrm>
-            <a:off x="3666743" y="2450591"/>
-            <a:ext cx="2697479" cy="731520"/>
+          <p:cNvPr id="17" name="Oval 16"/>
+          <p:cNvSpPr/>
+          <p:nvPr/>
+        </p:nvSpPr>
+        <p:spPr>
+          <a:xfrm>
+            <a:off x="5989320" y="2103120"/>
+            <a:ext cx="594360" cy="594360"/>
+          </a:xfrm>
+          <a:prstGeom prst="ellipse">
+            <a:avLst/>
+          </a:prstGeom>
+          <a:solidFill>
+            <a:srgbClr val="022349"/>
+          </a:solidFill>
+          <a:ln w="19050">
+            <a:solidFill>
+              <a:srgbClr val="487CFF"/>
+            </a:solidFill>
+          </a:ln>
+          <a:effectLst/>
+        </p:spPr>
+        <p:style>
+          <a:lnRef idx="1">
+            <a:schemeClr val="accent1"/>
+          </a:lnRef>
+          <a:fillRef idx="3">
+            <a:schemeClr val="accent1"/>
+          </a:fillRef>
+          <a:effectRef idx="2">
+            <a:schemeClr val="accent1"/>
+          </a:effectRef>
+          <a:fontRef idx="minor">
+            <a:schemeClr val="lt1"/>
+          </a:fontRef>
+        </p:style>
+        <p:txBody>
+          <a:bodyPr rtlCol="0" anchor="ctr" lIns="0" rIns="0" tIns="0" bIns="0"/>
+          <a:lstStyle/>
+          <a:p>
+            <a:pPr rtl="1" algn="ctr" marL="0" indent="0">
+              <a:lnSpc>
+                <a:spcPct val="108000"/>
+              </a:lnSpc>
+              <a:buNone/>
+            </a:pPr>
+            <a:r>
+              <a:rPr sz="1800" b="1" i="0" lang="he-IL">
+                <a:solidFill>
+                  <a:srgbClr val="F2F5FA"/>
+                </a:solidFill>
+                <a:latin typeface="Arial"/>
+                <a:cs typeface="Arial"/>
+              </a:rPr>
+              <a:t>👀</a:t>
+            </a:r>
+          </a:p>
+        </p:txBody>
+      </p:sp>
+      <p:sp>
+        <p:nvSpPr>
+          <p:cNvPr id="18" name="TextBox 17"/>
+          <p:cNvSpPr txBox="1"/>
+          <p:nvPr/>
+        </p:nvSpPr>
+        <p:spPr>
+          <a:xfrm>
+            <a:off x="2926080" y="2103120"/>
+            <a:ext cx="3017520" cy="411480"/>
+          </a:xfrm>
+          <a:prstGeom prst="rect">
+            <a:avLst/>
+          </a:prstGeom>
+          <a:noFill/>
+        </p:spPr>
+        <p:txBody>
+          <a:bodyPr wrap="square" lIns="0" rIns="0" tIns="0" bIns="0" anchor="t" rtlCol="0">
+            <a:spAutoFit/>
+          </a:bodyPr>
+          <a:lstStyle/>
+          <a:p>
+            <a:pPr rtl="1" algn="r" marL="0" indent="0">
+              <a:lnSpc>
+                <a:spcPct val="108000"/>
+              </a:lnSpc>
+              <a:buNone/>
+            </a:pPr>
+            <a:r>
+              <a:rPr sz="1800" b="1" i="0" lang="he-IL">
+                <a:solidFill>
+                  <a:srgbClr val="EBEDF0"/>
+                </a:solidFill>
+                <a:latin typeface="Arial"/>
+                <a:cs typeface="Arial"/>
+              </a:rPr>
+              <a:t>בודק את התוצאה</a:t>
+            </a:r>
+          </a:p>
+        </p:txBody>
+      </p:sp>
+      <p:sp>
+        <p:nvSpPr>
+          <p:cNvPr id="19" name="TextBox 18"/>
+          <p:cNvSpPr txBox="1"/>
+          <p:nvPr/>
+        </p:nvSpPr>
+        <p:spPr>
+          <a:xfrm>
+            <a:off x="2926080" y="2606039"/>
+            <a:ext cx="3017520" cy="731520"/>
+          </a:xfrm>
+          <a:prstGeom prst="rect">
+            <a:avLst/>
+          </a:prstGeom>
+          <a:noFill/>
+        </p:spPr>
+        <p:txBody>
+          <a:bodyPr wrap="square" lIns="0" rIns="0" tIns="0" bIns="0" anchor="t" rtlCol="0">
+            <a:spAutoFit/>
+          </a:bodyPr>
+          <a:lstStyle/>
+          <a:p>
+            <a:pPr rtl="1" algn="r" marL="0" indent="0">
+              <a:lnSpc>
+                <a:spcPct val="108000"/>
+              </a:lnSpc>
+              <a:buNone/>
+            </a:pPr>
+            <a:r>
+              <a:rPr sz="1350" b="0" i="0" lang="he-IL">
+                <a:solidFill>
+                  <a:srgbClr val="A9B4C6"/>
+                </a:solidFill>
+                <a:latin typeface="Arial"/>
+                <a:cs typeface="Arial"/>
+              </a:rPr>
+              <a:t>הצליח? אם לא, חוזר לתכנון</a:t>
+            </a:r>
+          </a:p>
+        </p:txBody>
+      </p:sp>
+      <p:sp>
+        <p:nvSpPr>
+          <p:cNvPr id="20" name="TextBox 19"/>
+          <p:cNvSpPr txBox="1"/>
+          <p:nvPr/>
+        </p:nvSpPr>
+        <p:spPr>
+          <a:xfrm>
+            <a:off x="9052560" y="3401568"/>
+            <a:ext cx="914400" cy="365760"/>
+          </a:xfrm>
+          <a:prstGeom prst="rect">
+            <a:avLst/>
+          </a:prstGeom>
+          <a:noFill/>
+        </p:spPr>
+        <p:txBody>
+          <a:bodyPr wrap="square" lIns="0" rIns="0" tIns="0" bIns="0" anchor="t" rtlCol="0">
+            <a:spAutoFit/>
+          </a:bodyPr>
+          <a:lstStyle/>
+          <a:p>
+            <a:pPr rtl="1" algn="ctr" marL="0" indent="0">
+              <a:lnSpc>
+                <a:spcPct val="108000"/>
+              </a:lnSpc>
+              <a:buNone/>
+            </a:pPr>
+            <a:r>
+              <a:rPr sz="2600" b="1" i="0" lang="he-IL">
+                <a:solidFill>
+                  <a:srgbClr val="6296FF"/>
+                </a:solidFill>
+                <a:latin typeface="Arial"/>
+                <a:cs typeface="Arial"/>
+              </a:rPr>
+              <a:t>↓</a:t>
+            </a:r>
+          </a:p>
+        </p:txBody>
+      </p:sp>
+      <p:sp>
+        <p:nvSpPr>
+          <p:cNvPr id="21" name="TextBox 20"/>
+          <p:cNvSpPr txBox="1"/>
+          <p:nvPr/>
+        </p:nvSpPr>
+        <p:spPr>
+          <a:xfrm>
+            <a:off x="6812280" y="4206240"/>
+            <a:ext cx="640080" cy="457200"/>
+          </a:xfrm>
+          <a:prstGeom prst="rect">
+            <a:avLst/>
+          </a:prstGeom>
+          <a:noFill/>
+        </p:spPr>
+        <p:txBody>
+          <a:bodyPr wrap="square" lIns="0" rIns="0" tIns="0" bIns="0" anchor="t" rtlCol="0">
+            <a:spAutoFit/>
+          </a:bodyPr>
+          <a:lstStyle/>
+          <a:p>
+            <a:pPr rtl="1" algn="ctr" marL="0" indent="0">
+              <a:lnSpc>
+                <a:spcPct val="108000"/>
+              </a:lnSpc>
+              <a:buNone/>
+            </a:pPr>
+            <a:r>
+              <a:rPr sz="2600" b="1" i="0" lang="he-IL">
+                <a:solidFill>
+                  <a:srgbClr val="6296FF"/>
+                </a:solidFill>
+                <a:latin typeface="Arial"/>
+                <a:cs typeface="Arial"/>
+              </a:rPr>
+              <a:t>←</a:t>
+            </a:r>
+          </a:p>
+        </p:txBody>
+      </p:sp>
+      <p:sp>
+        <p:nvSpPr>
+          <p:cNvPr id="22" name="TextBox 21"/>
+          <p:cNvSpPr txBox="1"/>
+          <p:nvPr/>
+        </p:nvSpPr>
+        <p:spPr>
+          <a:xfrm>
+            <a:off x="4297680" y="3401568"/>
+            <a:ext cx="914400" cy="365760"/>
+          </a:xfrm>
+          <a:prstGeom prst="rect">
+            <a:avLst/>
+          </a:prstGeom>
+          <a:noFill/>
+        </p:spPr>
+        <p:txBody>
+          <a:bodyPr wrap="square" lIns="0" rIns="0" tIns="0" bIns="0" anchor="t" rtlCol="0">
+            <a:spAutoFit/>
+          </a:bodyPr>
+          <a:lstStyle/>
+          <a:p>
+            <a:pPr rtl="1" algn="ctr" marL="0" indent="0">
+              <a:lnSpc>
+                <a:spcPct val="108000"/>
+              </a:lnSpc>
+              <a:buNone/>
+            </a:pPr>
+            <a:r>
+              <a:rPr sz="2600" b="1" i="0" lang="he-IL">
+                <a:solidFill>
+                  <a:srgbClr val="6296FF"/>
+                </a:solidFill>
+                <a:latin typeface="Arial"/>
+                <a:cs typeface="Arial"/>
+              </a:rPr>
+              <a:t>↑</a:t>
+            </a:r>
+          </a:p>
+        </p:txBody>
+      </p:sp>
+      <p:sp>
+        <p:nvSpPr>
+          <p:cNvPr id="23" name="TextBox 22"/>
+          <p:cNvSpPr txBox="1"/>
+          <p:nvPr/>
+        </p:nvSpPr>
+        <p:spPr>
+          <a:xfrm>
+            <a:off x="6812280" y="2331720"/>
+            <a:ext cx="640080" cy="457200"/>
+          </a:xfrm>
+          <a:prstGeom prst="rect">
+            <a:avLst/>
+          </a:prstGeom>
+          <a:noFill/>
+        </p:spPr>
+        <p:txBody>
+          <a:bodyPr wrap="square" lIns="0" rIns="0" tIns="0" bIns="0" anchor="t" rtlCol="0">
+            <a:spAutoFit/>
+          </a:bodyPr>
+          <a:lstStyle/>
+          <a:p>
+            <a:pPr rtl="1" algn="ctr" marL="0" indent="0">
+              <a:lnSpc>
+                <a:spcPct val="108000"/>
+              </a:lnSpc>
+              <a:buNone/>
+            </a:pPr>
+            <a:r>
+              <a:rPr sz="2600" b="1" i="0" lang="he-IL">
+                <a:solidFill>
+                  <a:srgbClr val="6296FF"/>
+                </a:solidFill>
+                <a:latin typeface="Arial"/>
+                <a:cs typeface="Arial"/>
+              </a:rPr>
+              <a:t>→</a:t>
+            </a:r>
+          </a:p>
+        </p:txBody>
+      </p:sp>
+      <p:sp>
+        <p:nvSpPr>
+          <p:cNvPr id="24" name="Rounded Rectangle 23"/>
+          <p:cNvSpPr/>
+          <p:nvPr/>
+        </p:nvSpPr>
+        <p:spPr>
+          <a:xfrm>
+            <a:off x="658368" y="5577840"/>
+            <a:ext cx="10872216" cy="594360"/>
+          </a:xfrm>
+          <a:prstGeom prst="roundRect">
+            <a:avLst>
+              <a:gd name="adj" fmla="val 3000"/>
+            </a:avLst>
+          </a:prstGeom>
+          <a:solidFill>
+            <a:srgbClr val="183A13"/>
+          </a:solidFill>
+          <a:ln>
+            <a:noFill/>
+          </a:ln>
+          <a:effectLst/>
+        </p:spPr>
+        <p:style>
+          <a:lnRef idx="1">
+            <a:schemeClr val="accent1"/>
+          </a:lnRef>
+          <a:fillRef idx="3">
+            <a:schemeClr val="accent1"/>
+          </a:fillRef>
+          <a:effectRef idx="2">
+            <a:schemeClr val="accent1"/>
+          </a:effectRef>
+          <a:fontRef idx="minor">
+            <a:schemeClr val="lt1"/>
+          </a:fontRef>
+        </p:style>
+        <p:txBody>
+          <a:bodyPr rtlCol="0" anchor="ctr"/>
+          <a:lstStyle/>
+          <a:p/>
+        </p:txBody>
+      </p:sp>
+      <p:sp>
+        <p:nvSpPr>
+          <p:cNvPr id="25" name="TextBox 24"/>
+          <p:cNvSpPr txBox="1"/>
+          <p:nvPr/>
+        </p:nvSpPr>
+        <p:spPr>
+          <a:xfrm>
+            <a:off x="886968" y="5577840"/>
+            <a:ext cx="10415016" cy="594360"/>
           </a:xfrm>
           <a:prstGeom prst="rect">
             <a:avLst/>
@@ -14377,6 +14909,227 @@
           </a:bodyPr>
           <a:lstStyle/>
           <a:p>
+            <a:pPr rtl="1" algn="r" marL="0" indent="0">
+              <a:lnSpc>
+                <a:spcPct val="108000"/>
+              </a:lnSpc>
+              <a:buNone/>
+            </a:pPr>
+            <a:r>
+              <a:rPr sz="1450" b="0" i="0" lang="he-IL">
+                <a:solidFill>
+                  <a:srgbClr val="EBEDF0"/>
+                </a:solidFill>
+                <a:latin typeface="Arial"/>
+                <a:cs typeface="Arial"/>
+              </a:rPr>
+              <a:t>💡  צ'אט עושה סיבוב אחד. סוכן מסתובב בלולאה עד שהמטרה הושגה. זה כל ההבדל.</a:t>
+            </a:r>
+          </a:p>
+        </p:txBody>
+      </p:sp>
+      <p:sp>
+        <p:nvSpPr>
+          <p:cNvPr id="26" name="TextBox 25"/>
+          <p:cNvSpPr txBox="1"/>
+          <p:nvPr/>
+        </p:nvSpPr>
+        <p:spPr>
+          <a:xfrm>
+            <a:off x="6675120" y="6473952"/>
+            <a:ext cx="4846320" cy="292608"/>
+          </a:xfrm>
+          <a:prstGeom prst="rect">
+            <a:avLst/>
+          </a:prstGeom>
+          <a:noFill/>
+        </p:spPr>
+        <p:txBody>
+          <a:bodyPr wrap="none" lIns="0" rIns="0" tIns="0" bIns="0">
+            <a:spAutoFit/>
+          </a:bodyPr>
+          <a:lstStyle/>
+          <a:p>
+            <a:pPr algn="r" rtl="1"/>
+            <a:r>
+              <a:rPr sz="1000">
+                <a:solidFill>
+                  <a:srgbClr val="8A96AA"/>
+                </a:solidFill>
+                <a:latin typeface="Arial"/>
+                <a:cs typeface="Arial"/>
+              </a:rPr>
+              <a:t>© נערך על ידי AI Finance</a:t>
+            </a:r>
+          </a:p>
+        </p:txBody>
+      </p:sp>
+    </p:spTree>
+  </p:cSld>
+  <p:clrMapOvr>
+    <a:masterClrMapping/>
+  </p:clrMapOvr>
+</p:sld>
+</file>
+
+<file path=ppt/slides/slide2012.xml><?xml version="1.0" encoding="utf-8"?>
+<p:sld xmlns:a="http://schemas.openxmlformats.org/drawingml/2006/main" xmlns:p="http://schemas.openxmlformats.org/presentationml/2006/main" xmlns:r="http://schemas.openxmlformats.org/officeDocument/2006/relationships">
+  <p:cSld>
+    <p:spTree>
+      <p:nvGrpSpPr>
+        <p:cNvPr id="1" name=""/>
+        <p:cNvGrpSpPr/>
+        <p:nvPr/>
+      </p:nvGrpSpPr>
+      <p:grpSpPr/>
+      <p:sp>
+        <p:nvSpPr>
+          <p:cNvPr id="2" name="Title"/>
+          <p:cNvSpPr txBox="1"/>
+          <p:nvPr/>
+        </p:nvSpPr>
+        <p:spPr>
+          <a:xfrm>
+            <a:off x="658368" y="502920"/>
+            <a:ext cx="10872216" cy="640080"/>
+          </a:xfrm>
+          <a:prstGeom prst="rect">
+            <a:avLst/>
+          </a:prstGeom>
+          <a:noFill/>
+        </p:spPr>
+        <p:txBody>
+          <a:bodyPr wrap="square" lIns="0" rIns="0" tIns="0" bIns="0" anchor="t" rtlCol="0">
+            <a:spAutoFit/>
+          </a:bodyPr>
+          <a:lstStyle/>
+          <a:p>
+            <a:pPr rtl="1" algn="r" marL="0" indent="0">
+              <a:lnSpc>
+                <a:spcPct val="108000"/>
+              </a:lnSpc>
+              <a:buNone/>
+            </a:pPr>
+            <a:r>
+              <a:rPr sz="3700" b="1" i="0" lang="he-IL">
+                <a:solidFill>
+                  <a:srgbClr val="F2F5FA"/>
+                </a:solidFill>
+                <a:latin typeface="Arial"/>
+                <a:cs typeface="Arial"/>
+              </a:rPr>
+              <a:t>🤖 הסוכנים כבר כאן</a:t>
+            </a:r>
+          </a:p>
+        </p:txBody>
+      </p:sp>
+      <p:sp>
+        <p:nvSpPr>
+          <p:cNvPr id="3" name="TextBox 2"/>
+          <p:cNvSpPr txBox="1"/>
+          <p:nvPr/>
+        </p:nvSpPr>
+        <p:spPr>
+          <a:xfrm>
+            <a:off x="658368" y="1280160"/>
+            <a:ext cx="10872216" cy="365760"/>
+          </a:xfrm>
+          <a:prstGeom prst="rect">
+            <a:avLst/>
+          </a:prstGeom>
+          <a:noFill/>
+        </p:spPr>
+        <p:txBody>
+          <a:bodyPr wrap="square" lIns="0" rIns="0" tIns="0" bIns="0" anchor="t" rtlCol="0">
+            <a:spAutoFit/>
+          </a:bodyPr>
+          <a:lstStyle/>
+          <a:p>
+            <a:pPr rtl="1" algn="r" marL="0" indent="0">
+              <a:lnSpc>
+                <a:spcPct val="108000"/>
+              </a:lnSpc>
+              <a:buNone/>
+            </a:pPr>
+            <a:r>
+              <a:rPr sz="1450" b="0" i="0" lang="he-IL">
+                <a:solidFill>
+                  <a:srgbClr val="FAC496"/>
+                </a:solidFill>
+                <a:latin typeface="Arial"/>
+                <a:cs typeface="Arial"/>
+              </a:rPr>
+              <a:t>רק להכיר: כולם בתשלום או בהזמנה. לא צריך לפתוח חשבון</a:t>
+            </a:r>
+          </a:p>
+        </p:txBody>
+      </p:sp>
+      <p:sp>
+        <p:nvSpPr>
+          <p:cNvPr id="4" name="Rounded Rectangle 3"/>
+          <p:cNvSpPr/>
+          <p:nvPr/>
+        </p:nvSpPr>
+        <p:spPr>
+          <a:xfrm>
+            <a:off x="9363455" y="1874519"/>
+            <a:ext cx="2139696" cy="502920"/>
+          </a:xfrm>
+          <a:prstGeom prst="roundRect">
+            <a:avLst>
+              <a:gd name="adj" fmla="val 15000"/>
+            </a:avLst>
+          </a:prstGeom>
+          <a:solidFill>
+            <a:srgbClr val="022349"/>
+          </a:solidFill>
+          <a:ln>
+            <a:noFill/>
+          </a:ln>
+          <a:effectLst/>
+        </p:spPr>
+        <p:style>
+          <a:lnRef idx="1">
+            <a:schemeClr val="accent1"/>
+          </a:lnRef>
+          <a:fillRef idx="3">
+            <a:schemeClr val="accent1"/>
+          </a:fillRef>
+          <a:effectRef idx="2">
+            <a:schemeClr val="accent1"/>
+          </a:effectRef>
+          <a:fontRef idx="minor">
+            <a:schemeClr val="lt1"/>
+          </a:fontRef>
+        </p:style>
+        <p:txBody>
+          <a:bodyPr rtlCol="0" anchor="ctr"/>
+          <a:lstStyle/>
+          <a:p/>
+        </p:txBody>
+      </p:sp>
+      <p:sp>
+        <p:nvSpPr>
+          <p:cNvPr id="5" name="TextBox 4"/>
+          <p:cNvSpPr txBox="1"/>
+          <p:nvPr/>
+        </p:nvSpPr>
+        <p:spPr>
+          <a:xfrm>
+            <a:off x="9427463" y="1874519"/>
+            <a:ext cx="2011679" cy="502920"/>
+          </a:xfrm>
+          <a:prstGeom prst="rect">
+            <a:avLst/>
+          </a:prstGeom>
+          <a:noFill/>
+        </p:spPr>
+        <p:txBody>
+          <a:bodyPr wrap="square" lIns="0" rIns="0" tIns="0" bIns="0" anchor="ctr" rtlCol="0">
+            <a:spAutoFit/>
+          </a:bodyPr>
+          <a:lstStyle/>
+          <a:p>
             <a:pPr rtl="1" algn="ctr" marL="0" indent="0">
               <a:lnSpc>
                 <a:spcPct val="108000"/>
@@ -14384,28 +15137,283 @@
               <a:buNone/>
             </a:pPr>
             <a:r>
-              <a:rPr sz="1300" b="0" i="0" lang="he-IL">
-                <a:solidFill>
-                  <a:srgbClr val="EBEDF0"/>
-                </a:solidFill>
-                <a:latin typeface="Arial"/>
-                <a:cs typeface="Arial"/>
-              </a:rPr>
-              <a:t>סוכן שלומד משימה מהקלטת מסך</a:t>
-            </a:r>
-          </a:p>
-        </p:txBody>
-      </p:sp>
-      <p:sp>
-        <p:nvSpPr>
-          <p:cNvPr id="18" name="Rounded Rectangle 17"/>
+              <a:rPr sz="1400" b="1" i="0" lang="he-IL">
+                <a:solidFill>
+                  <a:srgbClr val="F2F5FA"/>
+                </a:solidFill>
+                <a:latin typeface="Arial"/>
+                <a:cs typeface="Arial"/>
+              </a:rPr>
+              <a:t/>
+            </a:r>
+          </a:p>
+        </p:txBody>
+      </p:sp>
+      <p:sp>
+        <p:nvSpPr>
+          <p:cNvPr id="6" name="Rounded Rectangle 5"/>
           <p:cNvSpPr/>
           <p:nvPr/>
         </p:nvSpPr>
         <p:spPr>
           <a:xfrm>
-            <a:off x="685799" y="2450591"/>
-            <a:ext cx="2862072" cy="731520"/>
+            <a:off x="6483095" y="1874519"/>
+            <a:ext cx="2825496" cy="502920"/>
+          </a:xfrm>
+          <a:prstGeom prst="roundRect">
+            <a:avLst>
+              <a:gd name="adj" fmla="val 15000"/>
+            </a:avLst>
+          </a:prstGeom>
+          <a:solidFill>
+            <a:srgbClr val="022349"/>
+          </a:solidFill>
+          <a:ln>
+            <a:noFill/>
+          </a:ln>
+          <a:effectLst/>
+        </p:spPr>
+        <p:style>
+          <a:lnRef idx="1">
+            <a:schemeClr val="accent1"/>
+          </a:lnRef>
+          <a:fillRef idx="3">
+            <a:schemeClr val="accent1"/>
+          </a:fillRef>
+          <a:effectRef idx="2">
+            <a:schemeClr val="accent1"/>
+          </a:effectRef>
+          <a:fontRef idx="minor">
+            <a:schemeClr val="lt1"/>
+          </a:fontRef>
+        </p:style>
+        <p:txBody>
+          <a:bodyPr rtlCol="0" anchor="ctr"/>
+          <a:lstStyle/>
+          <a:p/>
+        </p:txBody>
+      </p:sp>
+      <p:sp>
+        <p:nvSpPr>
+          <p:cNvPr id="7" name="TextBox 6"/>
+          <p:cNvSpPr txBox="1"/>
+          <p:nvPr/>
+        </p:nvSpPr>
+        <p:spPr>
+          <a:xfrm>
+            <a:off x="6547103" y="1874519"/>
+            <a:ext cx="2697479" cy="502920"/>
+          </a:xfrm>
+          <a:prstGeom prst="rect">
+            <a:avLst/>
+          </a:prstGeom>
+          <a:noFill/>
+        </p:spPr>
+        <p:txBody>
+          <a:bodyPr wrap="square" lIns="0" rIns="0" tIns="0" bIns="0" anchor="ctr" rtlCol="0">
+            <a:spAutoFit/>
+          </a:bodyPr>
+          <a:lstStyle/>
+          <a:p>
+            <a:pPr rtl="1" algn="ctr" marL="0" indent="0">
+              <a:lnSpc>
+                <a:spcPct val="108000"/>
+              </a:lnSpc>
+              <a:buNone/>
+            </a:pPr>
+            <a:r>
+              <a:rPr sz="1400" b="1" i="0" lang="he-IL">
+                <a:solidFill>
+                  <a:srgbClr val="F2F5FA"/>
+                </a:solidFill>
+                <a:latin typeface="Arial"/>
+                <a:cs typeface="Arial"/>
+              </a:rPr>
+              <a:t>Dots (OpenAI)</a:t>
+            </a:r>
+          </a:p>
+        </p:txBody>
+      </p:sp>
+      <p:sp>
+        <p:nvSpPr>
+          <p:cNvPr id="8" name="Rounded Rectangle 7"/>
+          <p:cNvSpPr/>
+          <p:nvPr/>
+        </p:nvSpPr>
+        <p:spPr>
+          <a:xfrm>
+            <a:off x="3602735" y="1874519"/>
+            <a:ext cx="2825496" cy="502920"/>
+          </a:xfrm>
+          <a:prstGeom prst="roundRect">
+            <a:avLst>
+              <a:gd name="adj" fmla="val 15000"/>
+            </a:avLst>
+          </a:prstGeom>
+          <a:solidFill>
+            <a:srgbClr val="022349"/>
+          </a:solidFill>
+          <a:ln>
+            <a:noFill/>
+          </a:ln>
+          <a:effectLst/>
+        </p:spPr>
+        <p:style>
+          <a:lnRef idx="1">
+            <a:schemeClr val="accent1"/>
+          </a:lnRef>
+          <a:fillRef idx="3">
+            <a:schemeClr val="accent1"/>
+          </a:fillRef>
+          <a:effectRef idx="2">
+            <a:schemeClr val="accent1"/>
+          </a:effectRef>
+          <a:fontRef idx="minor">
+            <a:schemeClr val="lt1"/>
+          </a:fontRef>
+        </p:style>
+        <p:txBody>
+          <a:bodyPr rtlCol="0" anchor="ctr"/>
+          <a:lstStyle/>
+          <a:p/>
+        </p:txBody>
+      </p:sp>
+      <p:sp>
+        <p:nvSpPr>
+          <p:cNvPr id="9" name="TextBox 8"/>
+          <p:cNvSpPr txBox="1"/>
+          <p:nvPr/>
+        </p:nvSpPr>
+        <p:spPr>
+          <a:xfrm>
+            <a:off x="3666743" y="1874519"/>
+            <a:ext cx="2697479" cy="502920"/>
+          </a:xfrm>
+          <a:prstGeom prst="rect">
+            <a:avLst/>
+          </a:prstGeom>
+          <a:noFill/>
+        </p:spPr>
+        <p:txBody>
+          <a:bodyPr wrap="square" lIns="0" rIns="0" tIns="0" bIns="0" anchor="ctr" rtlCol="0">
+            <a:spAutoFit/>
+          </a:bodyPr>
+          <a:lstStyle/>
+          <a:p>
+            <a:pPr rtl="1" algn="ctr" marL="0" indent="0">
+              <a:lnSpc>
+                <a:spcPct val="108000"/>
+              </a:lnSpc>
+              <a:buNone/>
+            </a:pPr>
+            <a:r>
+              <a:rPr sz="1400" b="1" i="0" lang="he-IL">
+                <a:solidFill>
+                  <a:srgbClr val="F2F5FA"/>
+                </a:solidFill>
+                <a:latin typeface="Arial"/>
+                <a:cs typeface="Arial"/>
+              </a:rPr>
+              <a:t>Grok Bot (xAI)</a:t>
+            </a:r>
+          </a:p>
+        </p:txBody>
+      </p:sp>
+      <p:sp>
+        <p:nvSpPr>
+          <p:cNvPr id="10" name="Rounded Rectangle 9"/>
+          <p:cNvSpPr/>
+          <p:nvPr/>
+        </p:nvSpPr>
+        <p:spPr>
+          <a:xfrm>
+            <a:off x="685799" y="1874519"/>
+            <a:ext cx="2862072" cy="502920"/>
+          </a:xfrm>
+          <a:prstGeom prst="roundRect">
+            <a:avLst>
+              <a:gd name="adj" fmla="val 15000"/>
+            </a:avLst>
+          </a:prstGeom>
+          <a:solidFill>
+            <a:srgbClr val="022349"/>
+          </a:solidFill>
+          <a:ln>
+            <a:noFill/>
+          </a:ln>
+          <a:effectLst/>
+        </p:spPr>
+        <p:style>
+          <a:lnRef idx="1">
+            <a:schemeClr val="accent1"/>
+          </a:lnRef>
+          <a:fillRef idx="3">
+            <a:schemeClr val="accent1"/>
+          </a:fillRef>
+          <a:effectRef idx="2">
+            <a:schemeClr val="accent1"/>
+          </a:effectRef>
+          <a:fontRef idx="minor">
+            <a:schemeClr val="lt1"/>
+          </a:fontRef>
+        </p:style>
+        <p:txBody>
+          <a:bodyPr rtlCol="0" anchor="ctr"/>
+          <a:lstStyle/>
+          <a:p/>
+        </p:txBody>
+      </p:sp>
+      <p:sp>
+        <p:nvSpPr>
+          <p:cNvPr id="11" name="TextBox 10"/>
+          <p:cNvSpPr txBox="1"/>
+          <p:nvPr/>
+        </p:nvSpPr>
+        <p:spPr>
+          <a:xfrm>
+            <a:off x="749807" y="1874519"/>
+            <a:ext cx="2734056" cy="502920"/>
+          </a:xfrm>
+          <a:prstGeom prst="rect">
+            <a:avLst/>
+          </a:prstGeom>
+          <a:noFill/>
+        </p:spPr>
+        <p:txBody>
+          <a:bodyPr wrap="square" lIns="0" rIns="0" tIns="0" bIns="0" anchor="ctr" rtlCol="0">
+            <a:spAutoFit/>
+          </a:bodyPr>
+          <a:lstStyle/>
+          <a:p>
+            <a:pPr rtl="1" algn="ctr" marL="0" indent="0">
+              <a:lnSpc>
+                <a:spcPct val="108000"/>
+              </a:lnSpc>
+              <a:buNone/>
+            </a:pPr>
+            <a:r>
+              <a:rPr sz="1400" b="1" i="0" lang="he-IL">
+                <a:solidFill>
+                  <a:srgbClr val="F2F5FA"/>
+                </a:solidFill>
+                <a:latin typeface="Arial"/>
+                <a:cs typeface="Arial"/>
+              </a:rPr>
+              <a:t>Instinct</a:t>
+            </a:r>
+          </a:p>
+        </p:txBody>
+      </p:sp>
+      <p:sp>
+        <p:nvSpPr>
+          <p:cNvPr id="12" name="Rounded Rectangle 11"/>
+          <p:cNvSpPr/>
+          <p:nvPr/>
+        </p:nvSpPr>
+        <p:spPr>
+          <a:xfrm>
+            <a:off x="9363455" y="2450591"/>
+            <a:ext cx="2139696" cy="731520"/>
           </a:xfrm>
           <a:prstGeom prst="roundRect">
             <a:avLst>
@@ -14444,14 +15452,14 @@
       </p:sp>
       <p:sp>
         <p:nvSpPr>
-          <p:cNvPr id="19" name="TextBox 18"/>
-          <p:cNvSpPr txBox="1"/>
-          <p:nvPr/>
-        </p:nvSpPr>
-        <p:spPr>
-          <a:xfrm>
-            <a:off x="749807" y="2450591"/>
-            <a:ext cx="2734056" cy="731520"/>
+          <p:cNvPr id="13" name="TextBox 12"/>
+          <p:cNvSpPr txBox="1"/>
+          <p:nvPr/>
+        </p:nvSpPr>
+        <p:spPr>
+          <a:xfrm>
+            <a:off x="9427463" y="2450591"/>
+            <a:ext cx="2011679" cy="731520"/>
           </a:xfrm>
           <a:prstGeom prst="rect">
             <a:avLst/>
@@ -14464,35 +15472,35 @@
           </a:bodyPr>
           <a:lstStyle/>
           <a:p>
-            <a:pPr rtl="1" algn="ctr" marL="0" indent="0">
-              <a:lnSpc>
-                <a:spcPct val="108000"/>
-              </a:lnSpc>
-              <a:buNone/>
-            </a:pPr>
-            <a:r>
-              <a:rPr sz="1300" b="0" i="0" lang="he-IL">
-                <a:solidFill>
-                  <a:srgbClr val="EBEDF0"/>
-                </a:solidFill>
-                <a:latin typeface="Arial"/>
-                <a:cs typeface="Arial"/>
-              </a:rPr>
-              <a:t>עוזר אישי שמתקשר ושולח הודעות</a:t>
-            </a:r>
-          </a:p>
-        </p:txBody>
-      </p:sp>
-      <p:sp>
-        <p:nvSpPr>
-          <p:cNvPr id="20" name="Rounded Rectangle 19"/>
+            <a:pPr rtl="1" algn="r" marL="0" indent="0">
+              <a:lnSpc>
+                <a:spcPct val="108000"/>
+              </a:lnSpc>
+              <a:buNone/>
+            </a:pPr>
+            <a:r>
+              <a:rPr sz="1300" b="1" i="0" lang="he-IL">
+                <a:solidFill>
+                  <a:srgbClr val="F2F5FA"/>
+                </a:solidFill>
+                <a:latin typeface="Arial"/>
+                <a:cs typeface="Arial"/>
+              </a:rPr>
+              <a:t>מה זה</a:t>
+            </a:r>
+          </a:p>
+        </p:txBody>
+      </p:sp>
+      <p:sp>
+        <p:nvSpPr>
+          <p:cNvPr id="14" name="Rounded Rectangle 13"/>
           <p:cNvSpPr/>
           <p:nvPr/>
         </p:nvSpPr>
         <p:spPr>
           <a:xfrm>
-            <a:off x="9363455" y="3236976"/>
-            <a:ext cx="2139696" cy="731520"/>
+            <a:off x="6483095" y="2450591"/>
+            <a:ext cx="2825496" cy="731520"/>
           </a:xfrm>
           <a:prstGeom prst="roundRect">
             <a:avLst>
@@ -14531,14 +15539,14 @@
       </p:sp>
       <p:sp>
         <p:nvSpPr>
-          <p:cNvPr id="21" name="TextBox 20"/>
-          <p:cNvSpPr txBox="1"/>
-          <p:nvPr/>
-        </p:nvSpPr>
-        <p:spPr>
-          <a:xfrm>
-            <a:off x="9427463" y="3236976"/>
-            <a:ext cx="2011679" cy="731520"/>
+          <p:cNvPr id="15" name="TextBox 14"/>
+          <p:cNvSpPr txBox="1"/>
+          <p:nvPr/>
+        </p:nvSpPr>
+        <p:spPr>
+          <a:xfrm>
+            <a:off x="6547103" y="2450591"/>
+            <a:ext cx="2697479" cy="731520"/>
           </a:xfrm>
           <a:prstGeom prst="rect">
             <a:avLst/>
@@ -14551,34 +15559,34 @@
           </a:bodyPr>
           <a:lstStyle/>
           <a:p>
-            <a:pPr rtl="1" algn="r" marL="0" indent="0">
-              <a:lnSpc>
-                <a:spcPct val="108000"/>
-              </a:lnSpc>
-              <a:buNone/>
-            </a:pPr>
-            <a:r>
-              <a:rPr sz="1300" b="1" i="0" lang="he-IL">
-                <a:solidFill>
-                  <a:srgbClr val="F2F5FA"/>
-                </a:solidFill>
-                <a:latin typeface="Arial"/>
-                <a:cs typeface="Arial"/>
-              </a:rPr>
-              <a:t>דוגמה</a:t>
-            </a:r>
-          </a:p>
-        </p:txBody>
-      </p:sp>
-      <p:sp>
-        <p:nvSpPr>
-          <p:cNvPr id="22" name="Rounded Rectangle 21"/>
+            <a:pPr rtl="1" algn="ctr" marL="0" indent="0">
+              <a:lnSpc>
+                <a:spcPct val="108000"/>
+              </a:lnSpc>
+              <a:buNone/>
+            </a:pPr>
+            <a:r>
+              <a:rPr sz="1300" b="0" i="0" lang="he-IL">
+                <a:solidFill>
+                  <a:srgbClr val="EBEDF0"/>
+                </a:solidFill>
+                <a:latin typeface="Arial"/>
+                <a:cs typeface="Arial"/>
+              </a:rPr>
+              <a:t>עוזר עם מחשב משלו בענן</a:t>
+            </a:r>
+          </a:p>
+        </p:txBody>
+      </p:sp>
+      <p:sp>
+        <p:nvSpPr>
+          <p:cNvPr id="16" name="Rounded Rectangle 15"/>
           <p:cNvSpPr/>
           <p:nvPr/>
         </p:nvSpPr>
         <p:spPr>
           <a:xfrm>
-            <a:off x="6483095" y="3236976"/>
+            <a:off x="3602735" y="2450591"/>
             <a:ext cx="2825496" cy="731520"/>
           </a:xfrm>
           <a:prstGeom prst="roundRect">
@@ -14618,13 +15626,13 @@
       </p:sp>
       <p:sp>
         <p:nvSpPr>
-          <p:cNvPr id="23" name="TextBox 22"/>
-          <p:cNvSpPr txBox="1"/>
-          <p:nvPr/>
-        </p:nvSpPr>
-        <p:spPr>
-          <a:xfrm>
-            <a:off x="6547103" y="3236976"/>
+          <p:cNvPr id="17" name="TextBox 16"/>
+          <p:cNvSpPr txBox="1"/>
+          <p:nvPr/>
+        </p:nvSpPr>
+        <p:spPr>
+          <a:xfrm>
+            <a:off x="3666743" y="2450591"/>
             <a:ext cx="2697479" cy="731520"/>
           </a:xfrm>
           <a:prstGeom prst="rect">
@@ -14652,21 +15660,21 @@
                 <a:latin typeface="Arial"/>
                 <a:cs typeface="Arial"/>
               </a:rPr>
-              <a:t>"עקוב אחרי הלידים ותזכיר לי"</a:t>
-            </a:r>
-          </a:p>
-        </p:txBody>
-      </p:sp>
-      <p:sp>
-        <p:nvSpPr>
-          <p:cNvPr id="24" name="Rounded Rectangle 23"/>
+              <a:t>סוכן שלומד משימה מהקלטת מסך</a:t>
+            </a:r>
+          </a:p>
+        </p:txBody>
+      </p:sp>
+      <p:sp>
+        <p:nvSpPr>
+          <p:cNvPr id="18" name="Rounded Rectangle 17"/>
           <p:cNvSpPr/>
           <p:nvPr/>
         </p:nvSpPr>
         <p:spPr>
           <a:xfrm>
-            <a:off x="3602735" y="3236976"/>
-            <a:ext cx="2825496" cy="731520"/>
+            <a:off x="685799" y="2450591"/>
+            <a:ext cx="2862072" cy="731520"/>
           </a:xfrm>
           <a:prstGeom prst="roundRect">
             <a:avLst>
@@ -14705,14 +15713,14 @@
       </p:sp>
       <p:sp>
         <p:nvSpPr>
-          <p:cNvPr id="25" name="TextBox 24"/>
-          <p:cNvSpPr txBox="1"/>
-          <p:nvPr/>
-        </p:nvSpPr>
-        <p:spPr>
-          <a:xfrm>
-            <a:off x="3666743" y="3236976"/>
-            <a:ext cx="2697479" cy="731520"/>
+          <p:cNvPr id="19" name="TextBox 18"/>
+          <p:cNvSpPr txBox="1"/>
+          <p:nvPr/>
+        </p:nvSpPr>
+        <p:spPr>
+          <a:xfrm>
+            <a:off x="749807" y="2450591"/>
+            <a:ext cx="2734056" cy="731520"/>
           </a:xfrm>
           <a:prstGeom prst="rect">
             <a:avLst/>
@@ -14739,21 +15747,21 @@
                 <a:latin typeface="Arial"/>
                 <a:cs typeface="Arial"/>
               </a:rPr>
-              <a:t>"עדכן את ה-CRM כמו שהראיתי"</a:t>
-            </a:r>
-          </a:p>
-        </p:txBody>
-      </p:sp>
-      <p:sp>
-        <p:nvSpPr>
-          <p:cNvPr id="26" name="Rounded Rectangle 25"/>
+              <a:t>עוזר אישי שמתקשר ושולח הודעות</a:t>
+            </a:r>
+          </a:p>
+        </p:txBody>
+      </p:sp>
+      <p:sp>
+        <p:nvSpPr>
+          <p:cNvPr id="20" name="Rounded Rectangle 19"/>
           <p:cNvSpPr/>
           <p:nvPr/>
         </p:nvSpPr>
         <p:spPr>
           <a:xfrm>
-            <a:off x="685799" y="3236976"/>
-            <a:ext cx="2862072" cy="731520"/>
+            <a:off x="9363455" y="3236976"/>
+            <a:ext cx="2139696" cy="731520"/>
           </a:xfrm>
           <a:prstGeom prst="roundRect">
             <a:avLst>
@@ -14792,14 +15800,14 @@
       </p:sp>
       <p:sp>
         <p:nvSpPr>
-          <p:cNvPr id="27" name="TextBox 26"/>
-          <p:cNvSpPr txBox="1"/>
-          <p:nvPr/>
-        </p:nvSpPr>
-        <p:spPr>
-          <a:xfrm>
-            <a:off x="749807" y="3236976"/>
-            <a:ext cx="2734056" cy="731520"/>
+          <p:cNvPr id="21" name="TextBox 20"/>
+          <p:cNvSpPr txBox="1"/>
+          <p:nvPr/>
+        </p:nvSpPr>
+        <p:spPr>
+          <a:xfrm>
+            <a:off x="9427463" y="3236976"/>
+            <a:ext cx="2011679" cy="731520"/>
           </a:xfrm>
           <a:prstGeom prst="rect">
             <a:avLst/>
@@ -14812,35 +15820,35 @@
           </a:bodyPr>
           <a:lstStyle/>
           <a:p>
-            <a:pPr rtl="1" algn="ctr" marL="0" indent="0">
-              <a:lnSpc>
-                <a:spcPct val="108000"/>
-              </a:lnSpc>
-              <a:buNone/>
-            </a:pPr>
-            <a:r>
-              <a:rPr sz="1300" b="0" i="0" lang="he-IL">
-                <a:solidFill>
-                  <a:srgbClr val="EBEDF0"/>
-                </a:solidFill>
-                <a:latin typeface="Arial"/>
-                <a:cs typeface="Arial"/>
-              </a:rPr>
-              <a:t>"תזמין טכנאי ליום שלישי"</a:t>
-            </a:r>
-          </a:p>
-        </p:txBody>
-      </p:sp>
-      <p:sp>
-        <p:nvSpPr>
-          <p:cNvPr id="28" name="Rounded Rectangle 27"/>
+            <a:pPr rtl="1" algn="r" marL="0" indent="0">
+              <a:lnSpc>
+                <a:spcPct val="108000"/>
+              </a:lnSpc>
+              <a:buNone/>
+            </a:pPr>
+            <a:r>
+              <a:rPr sz="1300" b="1" i="0" lang="he-IL">
+                <a:solidFill>
+                  <a:srgbClr val="F2F5FA"/>
+                </a:solidFill>
+                <a:latin typeface="Arial"/>
+                <a:cs typeface="Arial"/>
+              </a:rPr>
+              <a:t>דוגמה</a:t>
+            </a:r>
+          </a:p>
+        </p:txBody>
+      </p:sp>
+      <p:sp>
+        <p:nvSpPr>
+          <p:cNvPr id="22" name="Rounded Rectangle 21"/>
           <p:cNvSpPr/>
           <p:nvPr/>
         </p:nvSpPr>
         <p:spPr>
           <a:xfrm>
-            <a:off x="9363455" y="4023360"/>
-            <a:ext cx="2139696" cy="731520"/>
+            <a:off x="6483095" y="3236976"/>
+            <a:ext cx="2825496" cy="731520"/>
           </a:xfrm>
           <a:prstGeom prst="roundRect">
             <a:avLst>
@@ -14879,14 +15887,14 @@
       </p:sp>
       <p:sp>
         <p:nvSpPr>
-          <p:cNvPr id="29" name="TextBox 28"/>
-          <p:cNvSpPr txBox="1"/>
-          <p:nvPr/>
-        </p:nvSpPr>
-        <p:spPr>
-          <a:xfrm>
-            <a:off x="9427463" y="4023360"/>
-            <a:ext cx="2011679" cy="731520"/>
+          <p:cNvPr id="23" name="TextBox 22"/>
+          <p:cNvSpPr txBox="1"/>
+          <p:nvPr/>
+        </p:nvSpPr>
+        <p:spPr>
+          <a:xfrm>
+            <a:off x="6547103" y="3236976"/>
+            <a:ext cx="2697479" cy="731520"/>
           </a:xfrm>
           <a:prstGeom prst="rect">
             <a:avLst/>
@@ -14899,34 +15907,34 @@
           </a:bodyPr>
           <a:lstStyle/>
           <a:p>
-            <a:pPr rtl="1" algn="r" marL="0" indent="0">
-              <a:lnSpc>
-                <a:spcPct val="108000"/>
-              </a:lnSpc>
-              <a:buNone/>
-            </a:pPr>
-            <a:r>
-              <a:rPr sz="1300" b="1" i="0" lang="he-IL">
-                <a:solidFill>
-                  <a:srgbClr val="F2F5FA"/>
-                </a:solidFill>
-                <a:latin typeface="Arial"/>
-                <a:cs typeface="Arial"/>
-              </a:rPr>
-              <a:t>איך מקבלים</a:t>
-            </a:r>
-          </a:p>
-        </p:txBody>
-      </p:sp>
-      <p:sp>
-        <p:nvSpPr>
-          <p:cNvPr id="30" name="Rounded Rectangle 29"/>
+            <a:pPr rtl="1" algn="ctr" marL="0" indent="0">
+              <a:lnSpc>
+                <a:spcPct val="108000"/>
+              </a:lnSpc>
+              <a:buNone/>
+            </a:pPr>
+            <a:r>
+              <a:rPr sz="1300" b="0" i="0" lang="he-IL">
+                <a:solidFill>
+                  <a:srgbClr val="EBEDF0"/>
+                </a:solidFill>
+                <a:latin typeface="Arial"/>
+                <a:cs typeface="Arial"/>
+              </a:rPr>
+              <a:t>"עקוב אחרי הלידים ותזכיר לי"</a:t>
+            </a:r>
+          </a:p>
+        </p:txBody>
+      </p:sp>
+      <p:sp>
+        <p:nvSpPr>
+          <p:cNvPr id="24" name="Rounded Rectangle 23"/>
           <p:cNvSpPr/>
           <p:nvPr/>
         </p:nvSpPr>
         <p:spPr>
           <a:xfrm>
-            <a:off x="6483095" y="4023360"/>
+            <a:off x="3602735" y="3236976"/>
             <a:ext cx="2825496" cy="731520"/>
           </a:xfrm>
           <a:prstGeom prst="roundRect">
@@ -14966,13 +15974,13 @@
       </p:sp>
       <p:sp>
         <p:nvSpPr>
-          <p:cNvPr id="31" name="TextBox 30"/>
-          <p:cNvSpPr txBox="1"/>
-          <p:nvPr/>
-        </p:nvSpPr>
-        <p:spPr>
-          <a:xfrm>
-            <a:off x="6547103" y="4023360"/>
+          <p:cNvPr id="25" name="TextBox 24"/>
+          <p:cNvSpPr txBox="1"/>
+          <p:nvPr/>
+        </p:nvSpPr>
+        <p:spPr>
+          <a:xfrm>
+            <a:off x="3666743" y="3236976"/>
             <a:ext cx="2697479" cy="731520"/>
           </a:xfrm>
           <a:prstGeom prst="rect">
@@ -15000,21 +16008,21 @@
                 <a:latin typeface="Arial"/>
                 <a:cs typeface="Arial"/>
               </a:rPr>
-              <a:t>ChatGPT Pro</a:t>
-            </a:r>
-          </a:p>
-        </p:txBody>
-      </p:sp>
-      <p:sp>
-        <p:nvSpPr>
-          <p:cNvPr id="32" name="Rounded Rectangle 31"/>
+              <a:t>"עדכן את ה-CRM כמו שהראיתי"</a:t>
+            </a:r>
+          </a:p>
+        </p:txBody>
+      </p:sp>
+      <p:sp>
+        <p:nvSpPr>
+          <p:cNvPr id="26" name="Rounded Rectangle 25"/>
           <p:cNvSpPr/>
           <p:nvPr/>
         </p:nvSpPr>
         <p:spPr>
           <a:xfrm>
-            <a:off x="3602735" y="4023360"/>
-            <a:ext cx="2825496" cy="731520"/>
+            <a:off x="685799" y="3236976"/>
+            <a:ext cx="2862072" cy="731520"/>
           </a:xfrm>
           <a:prstGeom prst="roundRect">
             <a:avLst>
@@ -15053,14 +16061,14 @@
       </p:sp>
       <p:sp>
         <p:nvSpPr>
-          <p:cNvPr id="33" name="TextBox 32"/>
-          <p:cNvSpPr txBox="1"/>
-          <p:nvPr/>
-        </p:nvSpPr>
-        <p:spPr>
-          <a:xfrm>
-            <a:off x="3666743" y="4023360"/>
-            <a:ext cx="2697479" cy="731520"/>
+          <p:cNvPr id="27" name="TextBox 26"/>
+          <p:cNvSpPr txBox="1"/>
+          <p:nvPr/>
+        </p:nvSpPr>
+        <p:spPr>
+          <a:xfrm>
+            <a:off x="749807" y="3236976"/>
+            <a:ext cx="2734056" cy="731520"/>
           </a:xfrm>
           <a:prstGeom prst="rect">
             <a:avLst/>
@@ -15087,21 +16095,21 @@
                 <a:latin typeface="Arial"/>
                 <a:cs typeface="Arial"/>
               </a:rPr>
-              <a:t>SuperGrok Heavy</a:t>
-            </a:r>
-          </a:p>
-        </p:txBody>
-      </p:sp>
-      <p:sp>
-        <p:nvSpPr>
-          <p:cNvPr id="34" name="Rounded Rectangle 33"/>
+              <a:t>"תזמין טכנאי ליום שלישי"</a:t>
+            </a:r>
+          </a:p>
+        </p:txBody>
+      </p:sp>
+      <p:sp>
+        <p:nvSpPr>
+          <p:cNvPr id="28" name="Rounded Rectangle 27"/>
           <p:cNvSpPr/>
           <p:nvPr/>
         </p:nvSpPr>
         <p:spPr>
           <a:xfrm>
-            <a:off x="685799" y="4023360"/>
-            <a:ext cx="2862072" cy="731520"/>
+            <a:off x="9363455" y="4023360"/>
+            <a:ext cx="2139696" cy="731520"/>
           </a:xfrm>
           <a:prstGeom prst="roundRect">
             <a:avLst>
@@ -15140,6 +16148,267 @@
       </p:sp>
       <p:sp>
         <p:nvSpPr>
+          <p:cNvPr id="29" name="TextBox 28"/>
+          <p:cNvSpPr txBox="1"/>
+          <p:nvPr/>
+        </p:nvSpPr>
+        <p:spPr>
+          <a:xfrm>
+            <a:off x="9427463" y="4023360"/>
+            <a:ext cx="2011679" cy="731520"/>
+          </a:xfrm>
+          <a:prstGeom prst="rect">
+            <a:avLst/>
+          </a:prstGeom>
+          <a:noFill/>
+        </p:spPr>
+        <p:txBody>
+          <a:bodyPr wrap="square" lIns="0" rIns="0" tIns="0" bIns="0" anchor="ctr" rtlCol="0">
+            <a:spAutoFit/>
+          </a:bodyPr>
+          <a:lstStyle/>
+          <a:p>
+            <a:pPr rtl="1" algn="r" marL="0" indent="0">
+              <a:lnSpc>
+                <a:spcPct val="108000"/>
+              </a:lnSpc>
+              <a:buNone/>
+            </a:pPr>
+            <a:r>
+              <a:rPr sz="1300" b="1" i="0" lang="he-IL">
+                <a:solidFill>
+                  <a:srgbClr val="F2F5FA"/>
+                </a:solidFill>
+                <a:latin typeface="Arial"/>
+                <a:cs typeface="Arial"/>
+              </a:rPr>
+              <a:t>איך מקבלים</a:t>
+            </a:r>
+          </a:p>
+        </p:txBody>
+      </p:sp>
+      <p:sp>
+        <p:nvSpPr>
+          <p:cNvPr id="30" name="Rounded Rectangle 29"/>
+          <p:cNvSpPr/>
+          <p:nvPr/>
+        </p:nvSpPr>
+        <p:spPr>
+          <a:xfrm>
+            <a:off x="6483095" y="4023360"/>
+            <a:ext cx="2825496" cy="731520"/>
+          </a:xfrm>
+          <a:prstGeom prst="roundRect">
+            <a:avLst>
+              <a:gd name="adj" fmla="val 12000"/>
+            </a:avLst>
+          </a:prstGeom>
+          <a:solidFill>
+            <a:srgbClr val="101620"/>
+          </a:solidFill>
+          <a:ln w="19050">
+            <a:solidFill>
+              <a:srgbClr val="002A80"/>
+            </a:solidFill>
+          </a:ln>
+          <a:effectLst/>
+        </p:spPr>
+        <p:style>
+          <a:lnRef idx="1">
+            <a:schemeClr val="accent1"/>
+          </a:lnRef>
+          <a:fillRef idx="3">
+            <a:schemeClr val="accent1"/>
+          </a:fillRef>
+          <a:effectRef idx="2">
+            <a:schemeClr val="accent1"/>
+          </a:effectRef>
+          <a:fontRef idx="minor">
+            <a:schemeClr val="lt1"/>
+          </a:fontRef>
+        </p:style>
+        <p:txBody>
+          <a:bodyPr rtlCol="0" anchor="ctr"/>
+          <a:lstStyle/>
+          <a:p/>
+        </p:txBody>
+      </p:sp>
+      <p:sp>
+        <p:nvSpPr>
+          <p:cNvPr id="31" name="TextBox 30"/>
+          <p:cNvSpPr txBox="1"/>
+          <p:nvPr/>
+        </p:nvSpPr>
+        <p:spPr>
+          <a:xfrm>
+            <a:off x="6547103" y="4023360"/>
+            <a:ext cx="2697479" cy="731520"/>
+          </a:xfrm>
+          <a:prstGeom prst="rect">
+            <a:avLst/>
+          </a:prstGeom>
+          <a:noFill/>
+        </p:spPr>
+        <p:txBody>
+          <a:bodyPr wrap="square" lIns="0" rIns="0" tIns="0" bIns="0" anchor="ctr" rtlCol="0">
+            <a:spAutoFit/>
+          </a:bodyPr>
+          <a:lstStyle/>
+          <a:p>
+            <a:pPr rtl="1" algn="ctr" marL="0" indent="0">
+              <a:lnSpc>
+                <a:spcPct val="108000"/>
+              </a:lnSpc>
+              <a:buNone/>
+            </a:pPr>
+            <a:r>
+              <a:rPr sz="1300" b="0" i="0" lang="he-IL">
+                <a:solidFill>
+                  <a:srgbClr val="EBEDF0"/>
+                </a:solidFill>
+                <a:latin typeface="Arial"/>
+                <a:cs typeface="Arial"/>
+              </a:rPr>
+              <a:t>ChatGPT Pro</a:t>
+            </a:r>
+          </a:p>
+        </p:txBody>
+      </p:sp>
+      <p:sp>
+        <p:nvSpPr>
+          <p:cNvPr id="32" name="Rounded Rectangle 31"/>
+          <p:cNvSpPr/>
+          <p:nvPr/>
+        </p:nvSpPr>
+        <p:spPr>
+          <a:xfrm>
+            <a:off x="3602735" y="4023360"/>
+            <a:ext cx="2825496" cy="731520"/>
+          </a:xfrm>
+          <a:prstGeom prst="roundRect">
+            <a:avLst>
+              <a:gd name="adj" fmla="val 12000"/>
+            </a:avLst>
+          </a:prstGeom>
+          <a:solidFill>
+            <a:srgbClr val="101620"/>
+          </a:solidFill>
+          <a:ln w="19050">
+            <a:solidFill>
+              <a:srgbClr val="002A80"/>
+            </a:solidFill>
+          </a:ln>
+          <a:effectLst/>
+        </p:spPr>
+        <p:style>
+          <a:lnRef idx="1">
+            <a:schemeClr val="accent1"/>
+          </a:lnRef>
+          <a:fillRef idx="3">
+            <a:schemeClr val="accent1"/>
+          </a:fillRef>
+          <a:effectRef idx="2">
+            <a:schemeClr val="accent1"/>
+          </a:effectRef>
+          <a:fontRef idx="minor">
+            <a:schemeClr val="lt1"/>
+          </a:fontRef>
+        </p:style>
+        <p:txBody>
+          <a:bodyPr rtlCol="0" anchor="ctr"/>
+          <a:lstStyle/>
+          <a:p/>
+        </p:txBody>
+      </p:sp>
+      <p:sp>
+        <p:nvSpPr>
+          <p:cNvPr id="33" name="TextBox 32"/>
+          <p:cNvSpPr txBox="1"/>
+          <p:nvPr/>
+        </p:nvSpPr>
+        <p:spPr>
+          <a:xfrm>
+            <a:off x="3666743" y="4023360"/>
+            <a:ext cx="2697479" cy="731520"/>
+          </a:xfrm>
+          <a:prstGeom prst="rect">
+            <a:avLst/>
+          </a:prstGeom>
+          <a:noFill/>
+        </p:spPr>
+        <p:txBody>
+          <a:bodyPr wrap="square" lIns="0" rIns="0" tIns="0" bIns="0" anchor="ctr" rtlCol="0">
+            <a:spAutoFit/>
+          </a:bodyPr>
+          <a:lstStyle/>
+          <a:p>
+            <a:pPr rtl="1" algn="ctr" marL="0" indent="0">
+              <a:lnSpc>
+                <a:spcPct val="108000"/>
+              </a:lnSpc>
+              <a:buNone/>
+            </a:pPr>
+            <a:r>
+              <a:rPr sz="1300" b="0" i="0" lang="he-IL">
+                <a:solidFill>
+                  <a:srgbClr val="EBEDF0"/>
+                </a:solidFill>
+                <a:latin typeface="Arial"/>
+                <a:cs typeface="Arial"/>
+              </a:rPr>
+              <a:t>SuperGrok Heavy</a:t>
+            </a:r>
+          </a:p>
+        </p:txBody>
+      </p:sp>
+      <p:sp>
+        <p:nvSpPr>
+          <p:cNvPr id="34" name="Rounded Rectangle 33"/>
+          <p:cNvSpPr/>
+          <p:nvPr/>
+        </p:nvSpPr>
+        <p:spPr>
+          <a:xfrm>
+            <a:off x="685799" y="4023360"/>
+            <a:ext cx="2862072" cy="731520"/>
+          </a:xfrm>
+          <a:prstGeom prst="roundRect">
+            <a:avLst>
+              <a:gd name="adj" fmla="val 12000"/>
+            </a:avLst>
+          </a:prstGeom>
+          <a:solidFill>
+            <a:srgbClr val="101620"/>
+          </a:solidFill>
+          <a:ln w="19050">
+            <a:solidFill>
+              <a:srgbClr val="002A80"/>
+            </a:solidFill>
+          </a:ln>
+          <a:effectLst/>
+        </p:spPr>
+        <p:style>
+          <a:lnRef idx="1">
+            <a:schemeClr val="accent1"/>
+          </a:lnRef>
+          <a:fillRef idx="3">
+            <a:schemeClr val="accent1"/>
+          </a:fillRef>
+          <a:effectRef idx="2">
+            <a:schemeClr val="accent1"/>
+          </a:effectRef>
+          <a:fontRef idx="minor">
+            <a:schemeClr val="lt1"/>
+          </a:fontRef>
+        </p:style>
+        <p:txBody>
+          <a:bodyPr rtlCol="0" anchor="ctr"/>
+          <a:lstStyle/>
+          <a:p/>
+        </p:txBody>
+      </p:sp>
+      <p:sp>
+        <p:nvSpPr>
           <p:cNvPr id="35" name="TextBox 34"/>
           <p:cNvSpPr txBox="1"/>
           <p:nvPr/>
@@ -15393,7 +16662,7 @@
 </p:sld>
 </file>
 
-<file path=ppt/slides/slide2012.xml><?xml version="1.0" encoding="utf-8"?>
+<file path=ppt/slides/slide2013.xml><?xml version="1.0" encoding="utf-8"?>
 <p:sld xmlns:a="http://schemas.openxmlformats.org/drawingml/2006/main" xmlns:p="http://schemas.openxmlformats.org/presentationml/2006/main" xmlns:r="http://schemas.openxmlformats.org/officeDocument/2006/relationships">
   <p:cSld>
     <p:spTree>
@@ -16293,7 +17562,7 @@
 </p:sld>
 </file>
 
-<file path=ppt/slides/slide2013.xml><?xml version="1.0" encoding="utf-8"?>
+<file path=ppt/slides/slide2014.xml><?xml version="1.0" encoding="utf-8"?>
 <p:sld xmlns:a="http://schemas.openxmlformats.org/drawingml/2006/main" xmlns:p="http://schemas.openxmlformats.org/presentationml/2006/main" xmlns:r="http://schemas.openxmlformats.org/officeDocument/2006/relationships">
   <p:cSld>
     <p:spTree>
@@ -17222,7 +18491,7 @@
 </p:sld>
 </file>
 
-<file path=ppt/slides/slide2014.xml><?xml version="1.0" encoding="utf-8"?>
+<file path=ppt/slides/slide2015.xml><?xml version="1.0" encoding="utf-8"?>
 <p:sld xmlns:a="http://schemas.openxmlformats.org/drawingml/2006/main" xmlns:p="http://schemas.openxmlformats.org/presentationml/2006/main" xmlns:r="http://schemas.openxmlformats.org/officeDocument/2006/relationships">
   <p:cSld>
     <p:spTree>
@@ -17498,7 +18767,7 @@
 </p:sld>
 </file>
 
-<file path=ppt/slides/slide2015.xml><?xml version="1.0" encoding="utf-8"?>
+<file path=ppt/slides/slide2016.xml><?xml version="1.0" encoding="utf-8"?>
 <p:sld xmlns:a="http://schemas.openxmlformats.org/drawingml/2006/main" xmlns:p="http://schemas.openxmlformats.org/presentationml/2006/main" xmlns:r="http://schemas.openxmlformats.org/officeDocument/2006/relationships">
   <p:cSld>
     <p:spTree>
@@ -17774,999 +19043,6 @@
 </p:sld>
 </file>
 
-<file path=ppt/slides/slide2016.xml><?xml version="1.0" encoding="utf-8"?>
-<p:sld xmlns:a="http://schemas.openxmlformats.org/drawingml/2006/main" xmlns:p="http://schemas.openxmlformats.org/presentationml/2006/main" xmlns:r="http://schemas.openxmlformats.org/officeDocument/2006/relationships">
-  <p:cSld>
-    <p:spTree>
-      <p:nvGrpSpPr>
-        <p:cNvPr id="1" name=""/>
-        <p:cNvGrpSpPr/>
-        <p:nvPr/>
-      </p:nvGrpSpPr>
-      <p:grpSpPr/>
-      <p:sp>
-        <p:nvSpPr>
-          <p:cNvPr id="2" name="Title"/>
-          <p:cNvSpPr txBox="1"/>
-          <p:nvPr/>
-        </p:nvSpPr>
-        <p:spPr>
-          <a:xfrm>
-            <a:off x="658368" y="502920"/>
-            <a:ext cx="10872216" cy="640080"/>
-          </a:xfrm>
-          <a:prstGeom prst="rect">
-            <a:avLst/>
-          </a:prstGeom>
-          <a:noFill/>
-        </p:spPr>
-        <p:txBody>
-          <a:bodyPr wrap="square" lIns="0" rIns="0" tIns="0" bIns="0" anchor="t" rtlCol="0">
-            <a:spAutoFit/>
-          </a:bodyPr>
-          <a:lstStyle/>
-          <a:p>
-            <a:pPr rtl="1" algn="r" marL="0" indent="0">
-              <a:lnSpc>
-                <a:spcPct val="108000"/>
-              </a:lnSpc>
-              <a:buNone/>
-            </a:pPr>
-            <a:r>
-              <a:rPr sz="3700" b="1" i="0" lang="he-IL">
-                <a:solidFill>
-                  <a:srgbClr val="F2F5FA"/>
-                </a:solidFill>
-                <a:latin typeface="Arial"/>
-                <a:cs typeface="Arial"/>
-              </a:rPr>
-              <a:t>⚙️ איך Make חושב</a:t>
-            </a:r>
-          </a:p>
-        </p:txBody>
-      </p:sp>
-      <p:sp>
-        <p:nvSpPr>
-          <p:cNvPr id="3" name="TextBox 2"/>
-          <p:cNvSpPr txBox="1"/>
-          <p:nvPr/>
-        </p:nvSpPr>
-        <p:spPr>
-          <a:xfrm>
-            <a:off x="658368" y="1280160"/>
-            <a:ext cx="10872216" cy="365760"/>
-          </a:xfrm>
-          <a:prstGeom prst="rect">
-            <a:avLst/>
-          </a:prstGeom>
-          <a:noFill/>
-        </p:spPr>
-        <p:txBody>
-          <a:bodyPr wrap="square" lIns="0" rIns="0" tIns="0" bIns="0" anchor="t" rtlCol="0">
-            <a:spAutoFit/>
-          </a:bodyPr>
-          <a:lstStyle/>
-          <a:p>
-            <a:pPr rtl="1" algn="r" marL="0" indent="0">
-              <a:lnSpc>
-                <a:spcPct val="108000"/>
-              </a:lnSpc>
-              <a:buNone/>
-            </a:pPr>
-            <a:r>
-              <a:rPr sz="1450" b="0" i="0" lang="he-IL">
-                <a:solidFill>
-                  <a:srgbClr val="FAC496"/>
-                </a:solidFill>
-                <a:latin typeface="Arial"/>
-                <a:cs typeface="Arial"/>
-              </a:rPr>
-              <a:t>כל אוטומציה היא טריגר ואחריו פעולות</a:t>
-            </a:r>
-          </a:p>
-        </p:txBody>
-      </p:sp>
-      <p:sp>
-        <p:nvSpPr>
-          <p:cNvPr id="4" name="Rounded Rectangle 3"/>
-          <p:cNvSpPr/>
-          <p:nvPr/>
-        </p:nvSpPr>
-        <p:spPr>
-          <a:xfrm>
-            <a:off x="8156448" y="1920240"/>
-            <a:ext cx="3383280" cy="3017520"/>
-          </a:xfrm>
-          <a:prstGeom prst="roundRect">
-            <a:avLst>
-              <a:gd name="adj" fmla="val 3000"/>
-            </a:avLst>
-          </a:prstGeom>
-          <a:solidFill>
-            <a:srgbClr val="101620"/>
-          </a:solidFill>
-          <a:ln w="19050">
-            <a:solidFill>
-              <a:srgbClr val="002A80"/>
-            </a:solidFill>
-          </a:ln>
-          <a:effectLst/>
-        </p:spPr>
-        <p:style>
-          <a:lnRef idx="1">
-            <a:schemeClr val="accent1"/>
-          </a:lnRef>
-          <a:fillRef idx="3">
-            <a:schemeClr val="accent1"/>
-          </a:fillRef>
-          <a:effectRef idx="2">
-            <a:schemeClr val="accent1"/>
-          </a:effectRef>
-          <a:fontRef idx="minor">
-            <a:schemeClr val="lt1"/>
-          </a:fontRef>
-        </p:style>
-        <p:txBody>
-          <a:bodyPr rtlCol="0" anchor="ctr"/>
-          <a:lstStyle/>
-          <a:p/>
-        </p:txBody>
-      </p:sp>
-      <p:sp>
-        <p:nvSpPr>
-          <p:cNvPr id="5" name="Oval 4"/>
-          <p:cNvSpPr/>
-          <p:nvPr/>
-        </p:nvSpPr>
-        <p:spPr>
-          <a:xfrm>
-            <a:off x="9436608" y="2103120"/>
-            <a:ext cx="822960" cy="822960"/>
-          </a:xfrm>
-          <a:prstGeom prst="ellipse">
-            <a:avLst/>
-          </a:prstGeom>
-          <a:solidFill>
-            <a:srgbClr val="022349"/>
-          </a:solidFill>
-          <a:ln w="19050">
-            <a:solidFill>
-              <a:srgbClr val="487CFF"/>
-            </a:solidFill>
-          </a:ln>
-          <a:effectLst/>
-        </p:spPr>
-        <p:style>
-          <a:lnRef idx="1">
-            <a:schemeClr val="accent1"/>
-          </a:lnRef>
-          <a:fillRef idx="3">
-            <a:schemeClr val="accent1"/>
-          </a:fillRef>
-          <a:effectRef idx="2">
-            <a:schemeClr val="accent1"/>
-          </a:effectRef>
-          <a:fontRef idx="minor">
-            <a:schemeClr val="lt1"/>
-          </a:fontRef>
-        </p:style>
-        <p:txBody>
-          <a:bodyPr rtlCol="0" anchor="ctr" lIns="0" rIns="0" tIns="0" bIns="0"/>
-          <a:lstStyle/>
-          <a:p>
-            <a:pPr rtl="1" algn="ctr" marL="0" indent="0">
-              <a:lnSpc>
-                <a:spcPct val="108000"/>
-              </a:lnSpc>
-              <a:buNone/>
-            </a:pPr>
-            <a:r>
-              <a:rPr sz="2600" b="1" i="0" lang="he-IL">
-                <a:solidFill>
-                  <a:srgbClr val="F2F5FA"/>
-                </a:solidFill>
-                <a:latin typeface="Arial"/>
-                <a:cs typeface="Arial"/>
-              </a:rPr>
-              <a:t>⚡</a:t>
-            </a:r>
-          </a:p>
-        </p:txBody>
-      </p:sp>
-      <p:sp>
-        <p:nvSpPr>
-          <p:cNvPr id="6" name="TextBox 5"/>
-          <p:cNvSpPr txBox="1"/>
-          <p:nvPr/>
-        </p:nvSpPr>
-        <p:spPr>
-          <a:xfrm>
-            <a:off x="8357616" y="3063240"/>
-            <a:ext cx="2980944" cy="365760"/>
-          </a:xfrm>
-          <a:prstGeom prst="rect">
-            <a:avLst/>
-          </a:prstGeom>
-          <a:noFill/>
-        </p:spPr>
-        <p:txBody>
-          <a:bodyPr wrap="square" lIns="0" rIns="0" tIns="0" bIns="0" anchor="t" rtlCol="0">
-            <a:spAutoFit/>
-          </a:bodyPr>
-          <a:lstStyle/>
-          <a:p>
-            <a:pPr rtl="1" algn="ctr" marL="0" indent="0">
-              <a:lnSpc>
-                <a:spcPct val="108000"/>
-              </a:lnSpc>
-              <a:buNone/>
-            </a:pPr>
-            <a:r>
-              <a:rPr sz="1900" b="1" i="0" lang="he-IL">
-                <a:solidFill>
-                  <a:srgbClr val="EBEDF0"/>
-                </a:solidFill>
-                <a:latin typeface="Arial"/>
-                <a:cs typeface="Arial"/>
-              </a:rPr>
-              <a:t>טריגר</a:t>
-            </a:r>
-          </a:p>
-        </p:txBody>
-      </p:sp>
-      <p:sp>
-        <p:nvSpPr>
-          <p:cNvPr id="7" name="TextBox 6"/>
-          <p:cNvSpPr txBox="1"/>
-          <p:nvPr/>
-        </p:nvSpPr>
-        <p:spPr>
-          <a:xfrm>
-            <a:off x="8430768" y="3520440"/>
-            <a:ext cx="2834640" cy="365760"/>
-          </a:xfrm>
-          <a:prstGeom prst="rect">
-            <a:avLst/>
-          </a:prstGeom>
-          <a:noFill/>
-        </p:spPr>
-        <p:txBody>
-          <a:bodyPr wrap="square" lIns="0" rIns="0" tIns="0" bIns="0" anchor="t" rtlCol="0">
-            <a:spAutoFit/>
-          </a:bodyPr>
-          <a:lstStyle/>
-          <a:p>
-            <a:pPr rtl="1" algn="ctr" marL="0" indent="0">
-              <a:lnSpc>
-                <a:spcPct val="108000"/>
-              </a:lnSpc>
-              <a:buNone/>
-            </a:pPr>
-            <a:r>
-              <a:rPr sz="1400" b="0" i="0" lang="he-IL">
-                <a:solidFill>
-                  <a:srgbClr val="A9B4C6"/>
-                </a:solidFill>
-                <a:latin typeface="Arial"/>
-                <a:cs typeface="Arial"/>
-              </a:rPr>
-              <a:t>משהו קורה</a:t>
-            </a:r>
-          </a:p>
-        </p:txBody>
-      </p:sp>
-      <p:sp>
-        <p:nvSpPr>
-          <p:cNvPr id="8" name="TextBox 7"/>
-          <p:cNvSpPr txBox="1"/>
-          <p:nvPr/>
-        </p:nvSpPr>
-        <p:spPr>
-          <a:xfrm>
-            <a:off x="8430768" y="4023360"/>
-            <a:ext cx="2834640" cy="731520"/>
-          </a:xfrm>
-          <a:prstGeom prst="rect">
-            <a:avLst/>
-          </a:prstGeom>
-          <a:noFill/>
-        </p:spPr>
-        <p:txBody>
-          <a:bodyPr wrap="square" lIns="0" rIns="0" tIns="0" bIns="0" anchor="t" rtlCol="0">
-            <a:spAutoFit/>
-          </a:bodyPr>
-          <a:lstStyle/>
-          <a:p>
-            <a:pPr rtl="1" algn="ctr" marL="0" indent="0">
-              <a:lnSpc>
-                <a:spcPct val="108000"/>
-              </a:lnSpc>
-              <a:buNone/>
-            </a:pPr>
-            <a:r>
-              <a:rPr sz="1450" b="0" i="0" lang="he-IL">
-                <a:solidFill>
-                  <a:srgbClr val="F2F5FA"/>
-                </a:solidFill>
-                <a:latin typeface="Arial"/>
-                <a:cs typeface="Arial"/>
-              </a:rPr>
-              <a:t>לקוח ממלא טופס</a:t>
-            </a:r>
-          </a:p>
-        </p:txBody>
-      </p:sp>
-      <p:sp>
-        <p:nvSpPr>
-          <p:cNvPr id="9" name="TextBox 8"/>
-          <p:cNvSpPr txBox="1"/>
-          <p:nvPr/>
-        </p:nvSpPr>
-        <p:spPr>
-          <a:xfrm>
-            <a:off x="7772400" y="3108960"/>
-            <a:ext cx="365760" cy="457200"/>
-          </a:xfrm>
-          <a:prstGeom prst="rect">
-            <a:avLst/>
-          </a:prstGeom>
-          <a:noFill/>
-        </p:spPr>
-        <p:txBody>
-          <a:bodyPr wrap="square" lIns="0" rIns="0" tIns="0" bIns="0" anchor="t" rtlCol="0">
-            <a:spAutoFit/>
-          </a:bodyPr>
-          <a:lstStyle/>
-          <a:p>
-            <a:pPr rtl="1" algn="ctr" marL="0" indent="0">
-              <a:lnSpc>
-                <a:spcPct val="108000"/>
-              </a:lnSpc>
-              <a:buNone/>
-            </a:pPr>
-            <a:r>
-              <a:rPr sz="2600" b="1" i="0" lang="he-IL">
-                <a:solidFill>
-                  <a:srgbClr val="6296FF"/>
-                </a:solidFill>
-                <a:latin typeface="Arial"/>
-                <a:cs typeface="Arial"/>
-              </a:rPr>
-              <a:t>←</a:t>
-            </a:r>
-          </a:p>
-        </p:txBody>
-      </p:sp>
-      <p:sp>
-        <p:nvSpPr>
-          <p:cNvPr id="10" name="Rounded Rectangle 9"/>
-          <p:cNvSpPr/>
-          <p:nvPr/>
-        </p:nvSpPr>
-        <p:spPr>
-          <a:xfrm>
-            <a:off x="4407408" y="1920240"/>
-            <a:ext cx="3383280" cy="3017520"/>
-          </a:xfrm>
-          <a:prstGeom prst="roundRect">
-            <a:avLst>
-              <a:gd name="adj" fmla="val 3000"/>
-            </a:avLst>
-          </a:prstGeom>
-          <a:solidFill>
-            <a:srgbClr val="022349"/>
-          </a:solidFill>
-          <a:ln w="19050">
-            <a:solidFill>
-              <a:srgbClr val="487CFF"/>
-            </a:solidFill>
-          </a:ln>
-          <a:effectLst/>
-        </p:spPr>
-        <p:style>
-          <a:lnRef idx="1">
-            <a:schemeClr val="accent1"/>
-          </a:lnRef>
-          <a:fillRef idx="3">
-            <a:schemeClr val="accent1"/>
-          </a:fillRef>
-          <a:effectRef idx="2">
-            <a:schemeClr val="accent1"/>
-          </a:effectRef>
-          <a:fontRef idx="minor">
-            <a:schemeClr val="lt1"/>
-          </a:fontRef>
-        </p:style>
-        <p:txBody>
-          <a:bodyPr rtlCol="0" anchor="ctr"/>
-          <a:lstStyle/>
-          <a:p/>
-        </p:txBody>
-      </p:sp>
-      <p:sp>
-        <p:nvSpPr>
-          <p:cNvPr id="11" name="Oval 10"/>
-          <p:cNvSpPr/>
-          <p:nvPr/>
-        </p:nvSpPr>
-        <p:spPr>
-          <a:xfrm>
-            <a:off x="5687568" y="2103120"/>
-            <a:ext cx="822960" cy="822960"/>
-          </a:xfrm>
-          <a:prstGeom prst="ellipse">
-            <a:avLst/>
-          </a:prstGeom>
-          <a:solidFill>
-            <a:srgbClr val="022349"/>
-          </a:solidFill>
-          <a:ln w="19050">
-            <a:solidFill>
-              <a:srgbClr val="487CFF"/>
-            </a:solidFill>
-          </a:ln>
-          <a:effectLst/>
-        </p:spPr>
-        <p:style>
-          <a:lnRef idx="1">
-            <a:schemeClr val="accent1"/>
-          </a:lnRef>
-          <a:fillRef idx="3">
-            <a:schemeClr val="accent1"/>
-          </a:fillRef>
-          <a:effectRef idx="2">
-            <a:schemeClr val="accent1"/>
-          </a:effectRef>
-          <a:fontRef idx="minor">
-            <a:schemeClr val="lt1"/>
-          </a:fontRef>
-        </p:style>
-        <p:txBody>
-          <a:bodyPr rtlCol="0" anchor="ctr" lIns="0" rIns="0" tIns="0" bIns="0"/>
-          <a:lstStyle/>
-          <a:p>
-            <a:pPr rtl="1" algn="ctr" marL="0" indent="0">
-              <a:lnSpc>
-                <a:spcPct val="108000"/>
-              </a:lnSpc>
-              <a:buNone/>
-            </a:pPr>
-            <a:r>
-              <a:rPr sz="2600" b="1" i="0" lang="he-IL">
-                <a:solidFill>
-                  <a:srgbClr val="F2F5FA"/>
-                </a:solidFill>
-                <a:latin typeface="Arial"/>
-                <a:cs typeface="Arial"/>
-              </a:rPr>
-              <a:t>⚙️</a:t>
-            </a:r>
-          </a:p>
-        </p:txBody>
-      </p:sp>
-      <p:sp>
-        <p:nvSpPr>
-          <p:cNvPr id="12" name="TextBox 11"/>
-          <p:cNvSpPr txBox="1"/>
-          <p:nvPr/>
-        </p:nvSpPr>
-        <p:spPr>
-          <a:xfrm>
-            <a:off x="4608576" y="3063240"/>
-            <a:ext cx="2980944" cy="365760"/>
-          </a:xfrm>
-          <a:prstGeom prst="rect">
-            <a:avLst/>
-          </a:prstGeom>
-          <a:noFill/>
-        </p:spPr>
-        <p:txBody>
-          <a:bodyPr wrap="square" lIns="0" rIns="0" tIns="0" bIns="0" anchor="t" rtlCol="0">
-            <a:spAutoFit/>
-          </a:bodyPr>
-          <a:lstStyle/>
-          <a:p>
-            <a:pPr rtl="1" algn="ctr" marL="0" indent="0">
-              <a:lnSpc>
-                <a:spcPct val="108000"/>
-              </a:lnSpc>
-              <a:buNone/>
-            </a:pPr>
-            <a:r>
-              <a:rPr sz="1900" b="1" i="0" lang="he-IL">
-                <a:solidFill>
-                  <a:srgbClr val="EBEDF0"/>
-                </a:solidFill>
-                <a:latin typeface="Arial"/>
-                <a:cs typeface="Arial"/>
-              </a:rPr>
-              <a:t>Make</a:t>
-            </a:r>
-          </a:p>
-        </p:txBody>
-      </p:sp>
-      <p:sp>
-        <p:nvSpPr>
-          <p:cNvPr id="13" name="TextBox 12"/>
-          <p:cNvSpPr txBox="1"/>
-          <p:nvPr/>
-        </p:nvSpPr>
-        <p:spPr>
-          <a:xfrm>
-            <a:off x="4681728" y="3520440"/>
-            <a:ext cx="2834640" cy="365760"/>
-          </a:xfrm>
-          <a:prstGeom prst="rect">
-            <a:avLst/>
-          </a:prstGeom>
-          <a:noFill/>
-        </p:spPr>
-        <p:txBody>
-          <a:bodyPr wrap="square" lIns="0" rIns="0" tIns="0" bIns="0" anchor="t" rtlCol="0">
-            <a:spAutoFit/>
-          </a:bodyPr>
-          <a:lstStyle/>
-          <a:p>
-            <a:pPr rtl="1" algn="ctr" marL="0" indent="0">
-              <a:lnSpc>
-                <a:spcPct val="108000"/>
-              </a:lnSpc>
-              <a:buNone/>
-            </a:pPr>
-            <a:r>
-              <a:rPr sz="1400" b="0" i="0" lang="he-IL">
-                <a:solidFill>
-                  <a:srgbClr val="A9B4C6"/>
-                </a:solidFill>
-                <a:latin typeface="Arial"/>
-                <a:cs typeface="Arial"/>
-              </a:rPr>
-              <a:t>מעביר הלאה</a:t>
-            </a:r>
-          </a:p>
-        </p:txBody>
-      </p:sp>
-      <p:sp>
-        <p:nvSpPr>
-          <p:cNvPr id="14" name="TextBox 13"/>
-          <p:cNvSpPr txBox="1"/>
-          <p:nvPr/>
-        </p:nvSpPr>
-        <p:spPr>
-          <a:xfrm>
-            <a:off x="4681728" y="4023360"/>
-            <a:ext cx="2834640" cy="731520"/>
-          </a:xfrm>
-          <a:prstGeom prst="rect">
-            <a:avLst/>
-          </a:prstGeom>
-          <a:noFill/>
-        </p:spPr>
-        <p:txBody>
-          <a:bodyPr wrap="square" lIns="0" rIns="0" tIns="0" bIns="0" anchor="t" rtlCol="0">
-            <a:spAutoFit/>
-          </a:bodyPr>
-          <a:lstStyle/>
-          <a:p>
-            <a:pPr rtl="1" algn="ctr" marL="0" indent="0">
-              <a:lnSpc>
-                <a:spcPct val="108000"/>
-              </a:lnSpc>
-              <a:buNone/>
-            </a:pPr>
-            <a:r>
-              <a:rPr sz="1450" b="0" i="0" lang="he-IL">
-                <a:solidFill>
-                  <a:srgbClr val="F2F5FA"/>
-                </a:solidFill>
-                <a:latin typeface="Arial"/>
-                <a:cs typeface="Arial"/>
-              </a:rPr>
-              <a:t>לוקח את הפרטים</a:t>
-            </a:r>
-          </a:p>
-        </p:txBody>
-      </p:sp>
-      <p:sp>
-        <p:nvSpPr>
-          <p:cNvPr id="15" name="TextBox 14"/>
-          <p:cNvSpPr txBox="1"/>
-          <p:nvPr/>
-        </p:nvSpPr>
-        <p:spPr>
-          <a:xfrm>
-            <a:off x="4023360" y="3108960"/>
-            <a:ext cx="365760" cy="457200"/>
-          </a:xfrm>
-          <a:prstGeom prst="rect">
-            <a:avLst/>
-          </a:prstGeom>
-          <a:noFill/>
-        </p:spPr>
-        <p:txBody>
-          <a:bodyPr wrap="square" lIns="0" rIns="0" tIns="0" bIns="0" anchor="t" rtlCol="0">
-            <a:spAutoFit/>
-          </a:bodyPr>
-          <a:lstStyle/>
-          <a:p>
-            <a:pPr rtl="1" algn="ctr" marL="0" indent="0">
-              <a:lnSpc>
-                <a:spcPct val="108000"/>
-              </a:lnSpc>
-              <a:buNone/>
-            </a:pPr>
-            <a:r>
-              <a:rPr sz="2600" b="1" i="0" lang="he-IL">
-                <a:solidFill>
-                  <a:srgbClr val="6296FF"/>
-                </a:solidFill>
-                <a:latin typeface="Arial"/>
-                <a:cs typeface="Arial"/>
-              </a:rPr>
-              <a:t>←</a:t>
-            </a:r>
-          </a:p>
-        </p:txBody>
-      </p:sp>
-      <p:sp>
-        <p:nvSpPr>
-          <p:cNvPr id="16" name="Rounded Rectangle 15"/>
-          <p:cNvSpPr/>
-          <p:nvPr/>
-        </p:nvSpPr>
-        <p:spPr>
-          <a:xfrm>
-            <a:off x="658368" y="1920240"/>
-            <a:ext cx="3383280" cy="3017520"/>
-          </a:xfrm>
-          <a:prstGeom prst="roundRect">
-            <a:avLst>
-              <a:gd name="adj" fmla="val 3000"/>
-            </a:avLst>
-          </a:prstGeom>
-          <a:solidFill>
-            <a:srgbClr val="101620"/>
-          </a:solidFill>
-          <a:ln w="19050">
-            <a:solidFill>
-              <a:srgbClr val="002A80"/>
-            </a:solidFill>
-          </a:ln>
-          <a:effectLst/>
-        </p:spPr>
-        <p:style>
-          <a:lnRef idx="1">
-            <a:schemeClr val="accent1"/>
-          </a:lnRef>
-          <a:fillRef idx="3">
-            <a:schemeClr val="accent1"/>
-          </a:fillRef>
-          <a:effectRef idx="2">
-            <a:schemeClr val="accent1"/>
-          </a:effectRef>
-          <a:fontRef idx="minor">
-            <a:schemeClr val="lt1"/>
-          </a:fontRef>
-        </p:style>
-        <p:txBody>
-          <a:bodyPr rtlCol="0" anchor="ctr"/>
-          <a:lstStyle/>
-          <a:p/>
-        </p:txBody>
-      </p:sp>
-      <p:sp>
-        <p:nvSpPr>
-          <p:cNvPr id="17" name="Oval 16"/>
-          <p:cNvSpPr/>
-          <p:nvPr/>
-        </p:nvSpPr>
-        <p:spPr>
-          <a:xfrm>
-            <a:off x="1938528" y="2103120"/>
-            <a:ext cx="822960" cy="822960"/>
-          </a:xfrm>
-          <a:prstGeom prst="ellipse">
-            <a:avLst/>
-          </a:prstGeom>
-          <a:solidFill>
-            <a:srgbClr val="022349"/>
-          </a:solidFill>
-          <a:ln w="19050">
-            <a:solidFill>
-              <a:srgbClr val="487CFF"/>
-            </a:solidFill>
-          </a:ln>
-          <a:effectLst/>
-        </p:spPr>
-        <p:style>
-          <a:lnRef idx="1">
-            <a:schemeClr val="accent1"/>
-          </a:lnRef>
-          <a:fillRef idx="3">
-            <a:schemeClr val="accent1"/>
-          </a:fillRef>
-          <a:effectRef idx="2">
-            <a:schemeClr val="accent1"/>
-          </a:effectRef>
-          <a:fontRef idx="minor">
-            <a:schemeClr val="lt1"/>
-          </a:fontRef>
-        </p:style>
-        <p:txBody>
-          <a:bodyPr rtlCol="0" anchor="ctr" lIns="0" rIns="0" tIns="0" bIns="0"/>
-          <a:lstStyle/>
-          <a:p>
-            <a:pPr rtl="1" algn="ctr" marL="0" indent="0">
-              <a:lnSpc>
-                <a:spcPct val="108000"/>
-              </a:lnSpc>
-              <a:buNone/>
-            </a:pPr>
-            <a:r>
-              <a:rPr sz="2600" b="1" i="0" lang="he-IL">
-                <a:solidFill>
-                  <a:srgbClr val="F2F5FA"/>
-                </a:solidFill>
-                <a:latin typeface="Arial"/>
-                <a:cs typeface="Arial"/>
-              </a:rPr>
-              <a:t>✅</a:t>
-            </a:r>
-          </a:p>
-        </p:txBody>
-      </p:sp>
-      <p:sp>
-        <p:nvSpPr>
-          <p:cNvPr id="18" name="TextBox 17"/>
-          <p:cNvSpPr txBox="1"/>
-          <p:nvPr/>
-        </p:nvSpPr>
-        <p:spPr>
-          <a:xfrm>
-            <a:off x="859536" y="3063240"/>
-            <a:ext cx="2980944" cy="365760"/>
-          </a:xfrm>
-          <a:prstGeom prst="rect">
-            <a:avLst/>
-          </a:prstGeom>
-          <a:noFill/>
-        </p:spPr>
-        <p:txBody>
-          <a:bodyPr wrap="square" lIns="0" rIns="0" tIns="0" bIns="0" anchor="t" rtlCol="0">
-            <a:spAutoFit/>
-          </a:bodyPr>
-          <a:lstStyle/>
-          <a:p>
-            <a:pPr rtl="1" algn="ctr" marL="0" indent="0">
-              <a:lnSpc>
-                <a:spcPct val="108000"/>
-              </a:lnSpc>
-              <a:buNone/>
-            </a:pPr>
-            <a:r>
-              <a:rPr sz="1900" b="1" i="0" lang="he-IL">
-                <a:solidFill>
-                  <a:srgbClr val="EBEDF0"/>
-                </a:solidFill>
-                <a:latin typeface="Arial"/>
-                <a:cs typeface="Arial"/>
-              </a:rPr>
-              <a:t>פעולה</a:t>
-            </a:r>
-          </a:p>
-        </p:txBody>
-      </p:sp>
-      <p:sp>
-        <p:nvSpPr>
-          <p:cNvPr id="19" name="TextBox 18"/>
-          <p:cNvSpPr txBox="1"/>
-          <p:nvPr/>
-        </p:nvSpPr>
-        <p:spPr>
-          <a:xfrm>
-            <a:off x="932688" y="3520440"/>
-            <a:ext cx="2834640" cy="365760"/>
-          </a:xfrm>
-          <a:prstGeom prst="rect">
-            <a:avLst/>
-          </a:prstGeom>
-          <a:noFill/>
-        </p:spPr>
-        <p:txBody>
-          <a:bodyPr wrap="square" lIns="0" rIns="0" tIns="0" bIns="0" anchor="t" rtlCol="0">
-            <a:spAutoFit/>
-          </a:bodyPr>
-          <a:lstStyle/>
-          <a:p>
-            <a:pPr rtl="1" algn="ctr" marL="0" indent="0">
-              <a:lnSpc>
-                <a:spcPct val="108000"/>
-              </a:lnSpc>
-              <a:buNone/>
-            </a:pPr>
-            <a:r>
-              <a:rPr sz="1400" b="0" i="0" lang="he-IL">
-                <a:solidFill>
-                  <a:srgbClr val="A9B4C6"/>
-                </a:solidFill>
-                <a:latin typeface="Arial"/>
-                <a:cs typeface="Arial"/>
-              </a:rPr>
-              <a:t>משהו נעשה</a:t>
-            </a:r>
-          </a:p>
-        </p:txBody>
-      </p:sp>
-      <p:sp>
-        <p:nvSpPr>
-          <p:cNvPr id="20" name="TextBox 19"/>
-          <p:cNvSpPr txBox="1"/>
-          <p:nvPr/>
-        </p:nvSpPr>
-        <p:spPr>
-          <a:xfrm>
-            <a:off x="932688" y="4023360"/>
-            <a:ext cx="2834640" cy="731520"/>
-          </a:xfrm>
-          <a:prstGeom prst="rect">
-            <a:avLst/>
-          </a:prstGeom>
-          <a:noFill/>
-        </p:spPr>
-        <p:txBody>
-          <a:bodyPr wrap="square" lIns="0" rIns="0" tIns="0" bIns="0" anchor="t" rtlCol="0">
-            <a:spAutoFit/>
-          </a:bodyPr>
-          <a:lstStyle/>
-          <a:p>
-            <a:pPr rtl="1" algn="ctr" marL="0" indent="0">
-              <a:lnSpc>
-                <a:spcPct val="108000"/>
-              </a:lnSpc>
-              <a:buNone/>
-            </a:pPr>
-            <a:r>
-              <a:rPr sz="1450" b="0" i="0" lang="he-IL">
-                <a:solidFill>
-                  <a:srgbClr val="F2F5FA"/>
-                </a:solidFill>
-                <a:latin typeface="Arial"/>
-                <a:cs typeface="Arial"/>
-              </a:rPr>
-              <a:t>מייל תודה + שורה בגיליון</a:t>
-            </a:r>
-          </a:p>
-        </p:txBody>
-      </p:sp>
-      <p:sp>
-        <p:nvSpPr>
-          <p:cNvPr id="21" name="Rounded Rectangle 20"/>
-          <p:cNvSpPr/>
-          <p:nvPr/>
-        </p:nvSpPr>
-        <p:spPr>
-          <a:xfrm>
-            <a:off x="658368" y="5212080"/>
-            <a:ext cx="10872216" cy="822960"/>
-          </a:xfrm>
-          <a:prstGeom prst="roundRect">
-            <a:avLst>
-              <a:gd name="adj" fmla="val 3000"/>
-            </a:avLst>
-          </a:prstGeom>
-          <a:solidFill>
-            <a:srgbClr val="183A13"/>
-          </a:solidFill>
-          <a:ln>
-            <a:noFill/>
-          </a:ln>
-          <a:effectLst/>
-        </p:spPr>
-        <p:style>
-          <a:lnRef idx="1">
-            <a:schemeClr val="accent1"/>
-          </a:lnRef>
-          <a:fillRef idx="3">
-            <a:schemeClr val="accent1"/>
-          </a:fillRef>
-          <a:effectRef idx="2">
-            <a:schemeClr val="accent1"/>
-          </a:effectRef>
-          <a:fontRef idx="minor">
-            <a:schemeClr val="lt1"/>
-          </a:fontRef>
-        </p:style>
-        <p:txBody>
-          <a:bodyPr rtlCol="0" anchor="ctr"/>
-          <a:lstStyle/>
-          <a:p/>
-        </p:txBody>
-      </p:sp>
-      <p:sp>
-        <p:nvSpPr>
-          <p:cNvPr id="22" name="TextBox 21"/>
-          <p:cNvSpPr txBox="1"/>
-          <p:nvPr/>
-        </p:nvSpPr>
-        <p:spPr>
-          <a:xfrm>
-            <a:off x="886968" y="5212080"/>
-            <a:ext cx="10415016" cy="822960"/>
-          </a:xfrm>
-          <a:prstGeom prst="rect">
-            <a:avLst/>
-          </a:prstGeom>
-          <a:noFill/>
-        </p:spPr>
-        <p:txBody>
-          <a:bodyPr wrap="square" lIns="0" rIns="0" tIns="0" bIns="0" anchor="ctr" rtlCol="0">
-            <a:spAutoFit/>
-          </a:bodyPr>
-          <a:lstStyle/>
-          <a:p>
-            <a:pPr rtl="1" algn="r" marL="0" indent="0">
-              <a:lnSpc>
-                <a:spcPct val="108000"/>
-              </a:lnSpc>
-              <a:buNone/>
-            </a:pPr>
-            <a:r>
-              <a:rPr sz="1450" b="0" i="0" lang="he-IL">
-                <a:solidFill>
-                  <a:srgbClr val="EBEDF0"/>
-                </a:solidFill>
-                <a:latin typeface="Arial"/>
-                <a:cs typeface="Arial"/>
-              </a:rPr>
-              <a:t>🏆  אתגר באפליקציה: "אוטומציה ראשונה". כתבו במשפט אחד: כש[טריגר], אז [פעולה]. הכי שימושית מנצחת.</a:t>
-            </a:r>
-          </a:p>
-        </p:txBody>
-      </p:sp>
-      <p:sp>
-        <p:nvSpPr>
-          <p:cNvPr id="23" name="TextBox 22"/>
-          <p:cNvSpPr txBox="1"/>
-          <p:nvPr/>
-        </p:nvSpPr>
-        <p:spPr>
-          <a:xfrm>
-            <a:off x="6675120" y="6473952"/>
-            <a:ext cx="4846320" cy="292608"/>
-          </a:xfrm>
-          <a:prstGeom prst="rect">
-            <a:avLst/>
-          </a:prstGeom>
-          <a:noFill/>
-        </p:spPr>
-        <p:txBody>
-          <a:bodyPr wrap="none" lIns="0" rIns="0" tIns="0" bIns="0">
-            <a:spAutoFit/>
-          </a:bodyPr>
-          <a:lstStyle/>
-          <a:p>
-            <a:pPr algn="r" rtl="1"/>
-            <a:r>
-              <a:rPr sz="1000">
-                <a:solidFill>
-                  <a:srgbClr val="8A96AA"/>
-                </a:solidFill>
-                <a:latin typeface="Arial"/>
-                <a:cs typeface="Arial"/>
-              </a:rPr>
-              <a:t>© נערך על ידי AI Finance</a:t>
-            </a:r>
-          </a:p>
-        </p:txBody>
-      </p:sp>
-    </p:spTree>
-  </p:cSld>
-  <p:clrMapOvr>
-    <a:masterClrMapping/>
-  </p:clrMapOvr>
-</p:sld>
-</file>
-
 <file path=ppt/slides/slide2017.xml><?xml version="1.0" encoding="utf-8"?>
 <p:sld xmlns:a="http://schemas.openxmlformats.org/drawingml/2006/main" xmlns:p="http://schemas.openxmlformats.org/presentationml/2006/main" xmlns:r="http://schemas.openxmlformats.org/officeDocument/2006/relationships">
   <p:cSld>
@@ -18813,7 +19089,7 @@
                 <a:latin typeface="Arial"/>
                 <a:cs typeface="Arial"/>
               </a:rPr>
-              <a:t>🛠️ בונים יחד: טופס לידים שעונה לבד</a:t>
+              <a:t>⚙️ איך Make חושב</a:t>
             </a:r>
           </a:p>
         </p:txBody>
@@ -18854,7 +19130,7 @@
                 <a:latin typeface="Arial"/>
                 <a:cs typeface="Arial"/>
               </a:rPr>
-              <a:t>20 דקות, חינם, בלי קוד</a:t>
+              <a:t>כל אוטומציה היא טריגר ואחריו פעולות</a:t>
             </a:r>
           </a:p>
         </p:txBody>
@@ -18867,13 +19143,57 @@
         </p:nvSpPr>
         <p:spPr>
           <a:xfrm>
-            <a:off x="11027664" y="1828800"/>
-            <a:ext cx="457200" cy="457200"/>
+            <a:off x="8156448" y="1920240"/>
+            <a:ext cx="3383280" cy="3017520"/>
           </a:xfrm>
           <a:prstGeom prst="roundRect">
             <a:avLst>
-              <a:gd name="adj" fmla="val 20000"/>
+              <a:gd name="adj" fmla="val 3000"/>
             </a:avLst>
+          </a:prstGeom>
+          <a:solidFill>
+            <a:srgbClr val="101620"/>
+          </a:solidFill>
+          <a:ln w="19050">
+            <a:solidFill>
+              <a:srgbClr val="002A80"/>
+            </a:solidFill>
+          </a:ln>
+          <a:effectLst/>
+        </p:spPr>
+        <p:style>
+          <a:lnRef idx="1">
+            <a:schemeClr val="accent1"/>
+          </a:lnRef>
+          <a:fillRef idx="3">
+            <a:schemeClr val="accent1"/>
+          </a:fillRef>
+          <a:effectRef idx="2">
+            <a:schemeClr val="accent1"/>
+          </a:effectRef>
+          <a:fontRef idx="minor">
+            <a:schemeClr val="lt1"/>
+          </a:fontRef>
+        </p:style>
+        <p:txBody>
+          <a:bodyPr rtlCol="0" anchor="ctr"/>
+          <a:lstStyle/>
+          <a:p/>
+        </p:txBody>
+      </p:sp>
+      <p:sp>
+        <p:nvSpPr>
+          <p:cNvPr id="5" name="Oval 4"/>
+          <p:cNvSpPr/>
+          <p:nvPr/>
+        </p:nvSpPr>
+        <p:spPr>
+          <a:xfrm>
+            <a:off x="9436608" y="2103120"/>
+            <a:ext cx="822960" cy="822960"/>
+          </a:xfrm>
+          <a:prstGeom prst="ellipse">
+            <a:avLst/>
           </a:prstGeom>
           <a:solidFill>
             <a:srgbClr val="022349"/>
@@ -18910,28 +19230,28 @@
               <a:buNone/>
             </a:pPr>
             <a:r>
-              <a:rPr sz="1500" b="1" i="0" lang="he-IL">
+              <a:rPr sz="2600" b="1" i="0" lang="he-IL">
                 <a:solidFill>
                   <a:srgbClr val="F2F5FA"/>
                 </a:solidFill>
                 <a:latin typeface="Arial"/>
                 <a:cs typeface="Arial"/>
               </a:rPr>
-              <a:t>1</a:t>
-            </a:r>
-          </a:p>
-        </p:txBody>
-      </p:sp>
-      <p:sp>
-        <p:nvSpPr>
-          <p:cNvPr id="5" name="TextBox 4"/>
-          <p:cNvSpPr txBox="1"/>
-          <p:nvPr/>
-        </p:nvSpPr>
-        <p:spPr>
-          <a:xfrm>
-            <a:off x="6309360" y="1856231"/>
-            <a:ext cx="4572000" cy="365760"/>
+              <a:t>⚡</a:t>
+            </a:r>
+          </a:p>
+        </p:txBody>
+      </p:sp>
+      <p:sp>
+        <p:nvSpPr>
+          <p:cNvPr id="6" name="TextBox 5"/>
+          <p:cNvSpPr txBox="1"/>
+          <p:nvPr/>
+        </p:nvSpPr>
+        <p:spPr>
+          <a:xfrm>
+            <a:off x="8357616" y="3063240"/>
+            <a:ext cx="2980944" cy="365760"/>
           </a:xfrm>
           <a:prstGeom prst="rect">
             <a:avLst/>
@@ -18944,35 +19264,35 @@
           </a:bodyPr>
           <a:lstStyle/>
           <a:p>
-            <a:pPr rtl="1" algn="r" marL="0" indent="0">
-              <a:lnSpc>
-                <a:spcPct val="108000"/>
-              </a:lnSpc>
-              <a:buNone/>
-            </a:pPr>
-            <a:r>
-              <a:rPr sz="1700" b="1" i="0" lang="he-IL">
+            <a:pPr rtl="1" algn="ctr" marL="0" indent="0">
+              <a:lnSpc>
+                <a:spcPct val="108000"/>
+              </a:lnSpc>
+              <a:buNone/>
+            </a:pPr>
+            <a:r>
+              <a:rPr sz="1900" b="1" i="0" lang="he-IL">
                 <a:solidFill>
                   <a:srgbClr val="EBEDF0"/>
                 </a:solidFill>
                 <a:latin typeface="Arial"/>
                 <a:cs typeface="Arial"/>
               </a:rPr>
-              <a:t>Google Forms: טופס "צור קשר"</a:t>
-            </a:r>
-          </a:p>
-        </p:txBody>
-      </p:sp>
-      <p:sp>
-        <p:nvSpPr>
-          <p:cNvPr id="6" name="TextBox 5"/>
-          <p:cNvSpPr txBox="1"/>
-          <p:nvPr/>
-        </p:nvSpPr>
-        <p:spPr>
-          <a:xfrm>
-            <a:off x="6309360" y="2249424"/>
-            <a:ext cx="4572000" cy="548640"/>
+              <a:t>טריגר</a:t>
+            </a:r>
+          </a:p>
+        </p:txBody>
+      </p:sp>
+      <p:sp>
+        <p:nvSpPr>
+          <p:cNvPr id="7" name="TextBox 6"/>
+          <p:cNvSpPr txBox="1"/>
+          <p:nvPr/>
+        </p:nvSpPr>
+        <p:spPr>
+          <a:xfrm>
+            <a:off x="8430768" y="3520440"/>
+            <a:ext cx="2834640" cy="365760"/>
           </a:xfrm>
           <a:prstGeom prst="rect">
             <a:avLst/>
@@ -18985,39 +19305,121 @@
           </a:bodyPr>
           <a:lstStyle/>
           <a:p>
-            <a:pPr rtl="1" algn="r" marL="0" indent="0">
-              <a:lnSpc>
-                <a:spcPct val="108000"/>
-              </a:lnSpc>
-              <a:buNone/>
-            </a:pPr>
-            <a:r>
-              <a:rPr sz="1350" b="0" i="0" lang="he-IL">
+            <a:pPr rtl="1" algn="ctr" marL="0" indent="0">
+              <a:lnSpc>
+                <a:spcPct val="108000"/>
+              </a:lnSpc>
+              <a:buNone/>
+            </a:pPr>
+            <a:r>
+              <a:rPr sz="1400" b="0" i="0" lang="he-IL">
                 <a:solidFill>
                   <a:srgbClr val="A9B4C6"/>
                 </a:solidFill>
                 <a:latin typeface="Arial"/>
                 <a:cs typeface="Arial"/>
               </a:rPr>
-              <a:t>שם, מייל, במה אפשר לעזור</a:t>
-            </a:r>
-          </a:p>
-        </p:txBody>
-      </p:sp>
-      <p:sp>
-        <p:nvSpPr>
-          <p:cNvPr id="7" name="Rounded Rectangle 6"/>
+              <a:t>משהו קורה</a:t>
+            </a:r>
+          </a:p>
+        </p:txBody>
+      </p:sp>
+      <p:sp>
+        <p:nvSpPr>
+          <p:cNvPr id="8" name="TextBox 7"/>
+          <p:cNvSpPr txBox="1"/>
+          <p:nvPr/>
+        </p:nvSpPr>
+        <p:spPr>
+          <a:xfrm>
+            <a:off x="8430768" y="4023360"/>
+            <a:ext cx="2834640" cy="731520"/>
+          </a:xfrm>
+          <a:prstGeom prst="rect">
+            <a:avLst/>
+          </a:prstGeom>
+          <a:noFill/>
+        </p:spPr>
+        <p:txBody>
+          <a:bodyPr wrap="square" lIns="0" rIns="0" tIns="0" bIns="0" anchor="t" rtlCol="0">
+            <a:spAutoFit/>
+          </a:bodyPr>
+          <a:lstStyle/>
+          <a:p>
+            <a:pPr rtl="1" algn="ctr" marL="0" indent="0">
+              <a:lnSpc>
+                <a:spcPct val="108000"/>
+              </a:lnSpc>
+              <a:buNone/>
+            </a:pPr>
+            <a:r>
+              <a:rPr sz="1450" b="0" i="0" lang="he-IL">
+                <a:solidFill>
+                  <a:srgbClr val="F2F5FA"/>
+                </a:solidFill>
+                <a:latin typeface="Arial"/>
+                <a:cs typeface="Arial"/>
+              </a:rPr>
+              <a:t>לקוח ממלא טופס</a:t>
+            </a:r>
+          </a:p>
+        </p:txBody>
+      </p:sp>
+      <p:sp>
+        <p:nvSpPr>
+          <p:cNvPr id="9" name="TextBox 8"/>
+          <p:cNvSpPr txBox="1"/>
+          <p:nvPr/>
+        </p:nvSpPr>
+        <p:spPr>
+          <a:xfrm>
+            <a:off x="7772400" y="3108960"/>
+            <a:ext cx="365760" cy="457200"/>
+          </a:xfrm>
+          <a:prstGeom prst="rect">
+            <a:avLst/>
+          </a:prstGeom>
+          <a:noFill/>
+        </p:spPr>
+        <p:txBody>
+          <a:bodyPr wrap="square" lIns="0" rIns="0" tIns="0" bIns="0" anchor="t" rtlCol="0">
+            <a:spAutoFit/>
+          </a:bodyPr>
+          <a:lstStyle/>
+          <a:p>
+            <a:pPr rtl="1" algn="ctr" marL="0" indent="0">
+              <a:lnSpc>
+                <a:spcPct val="108000"/>
+              </a:lnSpc>
+              <a:buNone/>
+            </a:pPr>
+            <a:r>
+              <a:rPr sz="2600" b="1" i="0" lang="he-IL">
+                <a:solidFill>
+                  <a:srgbClr val="6296FF"/>
+                </a:solidFill>
+                <a:latin typeface="Arial"/>
+                <a:cs typeface="Arial"/>
+              </a:rPr>
+              <a:t>←</a:t>
+            </a:r>
+          </a:p>
+        </p:txBody>
+      </p:sp>
+      <p:sp>
+        <p:nvSpPr>
+          <p:cNvPr id="10" name="Rounded Rectangle 9"/>
           <p:cNvSpPr/>
           <p:nvPr/>
         </p:nvSpPr>
         <p:spPr>
           <a:xfrm>
-            <a:off x="11027664" y="2523744"/>
-            <a:ext cx="457200" cy="457200"/>
+            <a:off x="4407408" y="1920240"/>
+            <a:ext cx="3383280" cy="3017520"/>
           </a:xfrm>
           <a:prstGeom prst="roundRect">
             <a:avLst>
-              <a:gd name="adj" fmla="val 20000"/>
+              <a:gd name="adj" fmla="val 3000"/>
             </a:avLst>
           </a:prstGeom>
           <a:solidFill>
@@ -19045,125 +19447,24 @@
           </a:fontRef>
         </p:style>
         <p:txBody>
-          <a:bodyPr rtlCol="0" anchor="ctr" lIns="0" rIns="0" tIns="0" bIns="0"/>
-          <a:lstStyle/>
-          <a:p>
-            <a:pPr rtl="1" algn="ctr" marL="0" indent="0">
-              <a:lnSpc>
-                <a:spcPct val="108000"/>
-              </a:lnSpc>
-              <a:buNone/>
-            </a:pPr>
-            <a:r>
-              <a:rPr sz="1500" b="1" i="0" lang="he-IL">
-                <a:solidFill>
-                  <a:srgbClr val="F2F5FA"/>
-                </a:solidFill>
-                <a:latin typeface="Arial"/>
-                <a:cs typeface="Arial"/>
-              </a:rPr>
-              <a:t>2</a:t>
-            </a:r>
-          </a:p>
-        </p:txBody>
-      </p:sp>
-      <p:sp>
-        <p:nvSpPr>
-          <p:cNvPr id="8" name="TextBox 7"/>
-          <p:cNvSpPr txBox="1"/>
-          <p:nvPr/>
-        </p:nvSpPr>
-        <p:spPr>
-          <a:xfrm>
-            <a:off x="6309360" y="2551175"/>
-            <a:ext cx="4572000" cy="365760"/>
-          </a:xfrm>
-          <a:prstGeom prst="rect">
-            <a:avLst/>
-          </a:prstGeom>
-          <a:noFill/>
-        </p:spPr>
-        <p:txBody>
-          <a:bodyPr wrap="square" lIns="0" rIns="0" tIns="0" bIns="0" anchor="t" rtlCol="0">
-            <a:spAutoFit/>
-          </a:bodyPr>
-          <a:lstStyle/>
-          <a:p>
-            <a:pPr rtl="1" algn="r" marL="0" indent="0">
-              <a:lnSpc>
-                <a:spcPct val="108000"/>
-              </a:lnSpc>
-              <a:buNone/>
-            </a:pPr>
-            <a:r>
-              <a:rPr sz="1700" b="1" i="0" lang="he-IL">
-                <a:solidFill>
-                  <a:srgbClr val="EBEDF0"/>
-                </a:solidFill>
-                <a:latin typeface="Arial"/>
-                <a:cs typeface="Arial"/>
-              </a:rPr>
-              <a:t>Make: Create scenario</a:t>
-            </a:r>
-          </a:p>
-        </p:txBody>
-      </p:sp>
-      <p:sp>
-        <p:nvSpPr>
-          <p:cNvPr id="9" name="TextBox 8"/>
-          <p:cNvSpPr txBox="1"/>
-          <p:nvPr/>
-        </p:nvSpPr>
-        <p:spPr>
-          <a:xfrm>
-            <a:off x="6309360" y="2944368"/>
-            <a:ext cx="4572000" cy="548640"/>
-          </a:xfrm>
-          <a:prstGeom prst="rect">
-            <a:avLst/>
-          </a:prstGeom>
-          <a:noFill/>
-        </p:spPr>
-        <p:txBody>
-          <a:bodyPr wrap="square" lIns="0" rIns="0" tIns="0" bIns="0" anchor="t" rtlCol="0">
-            <a:spAutoFit/>
-          </a:bodyPr>
-          <a:lstStyle/>
-          <a:p>
-            <a:pPr rtl="1" algn="r" marL="0" indent="0">
-              <a:lnSpc>
-                <a:spcPct val="108000"/>
-              </a:lnSpc>
-              <a:buNone/>
-            </a:pPr>
-            <a:r>
-              <a:rPr sz="1350" b="0" i="0" lang="he-IL">
-                <a:solidFill>
-                  <a:srgbClr val="A9B4C6"/>
-                </a:solidFill>
-                <a:latin typeface="Arial"/>
-                <a:cs typeface="Arial"/>
-              </a:rPr>
-              <a:t>טריגר: Google Forms &gt; Watch Responses</a:t>
-            </a:r>
-          </a:p>
-        </p:txBody>
-      </p:sp>
-      <p:sp>
-        <p:nvSpPr>
-          <p:cNvPr id="10" name="Rounded Rectangle 9"/>
+          <a:bodyPr rtlCol="0" anchor="ctr"/>
+          <a:lstStyle/>
+          <a:p/>
+        </p:txBody>
+      </p:sp>
+      <p:sp>
+        <p:nvSpPr>
+          <p:cNvPr id="11" name="Oval 10"/>
           <p:cNvSpPr/>
           <p:nvPr/>
         </p:nvSpPr>
         <p:spPr>
           <a:xfrm>
-            <a:off x="11027664" y="3218688"/>
-            <a:ext cx="457200" cy="457200"/>
-          </a:xfrm>
-          <a:prstGeom prst="roundRect">
-            <a:avLst>
-              <a:gd name="adj" fmla="val 20000"/>
-            </a:avLst>
+            <a:off x="5687568" y="2103120"/>
+            <a:ext cx="822960" cy="822960"/>
+          </a:xfrm>
+          <a:prstGeom prst="ellipse">
+            <a:avLst/>
           </a:prstGeom>
           <a:solidFill>
             <a:srgbClr val="022349"/>
@@ -19200,28 +19501,28 @@
               <a:buNone/>
             </a:pPr>
             <a:r>
-              <a:rPr sz="1500" b="1" i="0" lang="he-IL">
+              <a:rPr sz="2600" b="1" i="0" lang="he-IL">
                 <a:solidFill>
                   <a:srgbClr val="F2F5FA"/>
                 </a:solidFill>
                 <a:latin typeface="Arial"/>
                 <a:cs typeface="Arial"/>
               </a:rPr>
-              <a:t>3</a:t>
-            </a:r>
-          </a:p>
-        </p:txBody>
-      </p:sp>
-      <p:sp>
-        <p:nvSpPr>
-          <p:cNvPr id="11" name="TextBox 10"/>
-          <p:cNvSpPr txBox="1"/>
-          <p:nvPr/>
-        </p:nvSpPr>
-        <p:spPr>
-          <a:xfrm>
-            <a:off x="6309360" y="3246120"/>
-            <a:ext cx="4572000" cy="365760"/>
+              <a:t>⚙️</a:t>
+            </a:r>
+          </a:p>
+        </p:txBody>
+      </p:sp>
+      <p:sp>
+        <p:nvSpPr>
+          <p:cNvPr id="12" name="TextBox 11"/>
+          <p:cNvSpPr txBox="1"/>
+          <p:nvPr/>
+        </p:nvSpPr>
+        <p:spPr>
+          <a:xfrm>
+            <a:off x="4608576" y="3063240"/>
+            <a:ext cx="2980944" cy="365760"/>
           </a:xfrm>
           <a:prstGeom prst="rect">
             <a:avLst/>
@@ -19234,35 +19535,35 @@
           </a:bodyPr>
           <a:lstStyle/>
           <a:p>
-            <a:pPr rtl="1" algn="r" marL="0" indent="0">
-              <a:lnSpc>
-                <a:spcPct val="108000"/>
-              </a:lnSpc>
-              <a:buNone/>
-            </a:pPr>
-            <a:r>
-              <a:rPr sz="1700" b="1" i="0" lang="he-IL">
+            <a:pPr rtl="1" algn="ctr" marL="0" indent="0">
+              <a:lnSpc>
+                <a:spcPct val="108000"/>
+              </a:lnSpc>
+              <a:buNone/>
+            </a:pPr>
+            <a:r>
+              <a:rPr sz="1900" b="1" i="0" lang="he-IL">
                 <a:solidFill>
                   <a:srgbClr val="EBEDF0"/>
                 </a:solidFill>
                 <a:latin typeface="Arial"/>
                 <a:cs typeface="Arial"/>
               </a:rPr>
-              <a:t>Gmail: Send an email</a:t>
-            </a:r>
-          </a:p>
-        </p:txBody>
-      </p:sp>
-      <p:sp>
-        <p:nvSpPr>
-          <p:cNvPr id="12" name="TextBox 11"/>
-          <p:cNvSpPr txBox="1"/>
-          <p:nvPr/>
-        </p:nvSpPr>
-        <p:spPr>
-          <a:xfrm>
-            <a:off x="6309360" y="3639312"/>
-            <a:ext cx="4572000" cy="548640"/>
+              <a:t>Make</a:t>
+            </a:r>
+          </a:p>
+        </p:txBody>
+      </p:sp>
+      <p:sp>
+        <p:nvSpPr>
+          <p:cNvPr id="13" name="TextBox 12"/>
+          <p:cNvSpPr txBox="1"/>
+          <p:nvPr/>
+        </p:nvSpPr>
+        <p:spPr>
+          <a:xfrm>
+            <a:off x="4681728" y="3520440"/>
+            <a:ext cx="2834640" cy="365760"/>
           </a:xfrm>
           <a:prstGeom prst="rect">
             <a:avLst/>
@@ -19275,40 +19576,166 @@
           </a:bodyPr>
           <a:lstStyle/>
           <a:p>
-            <a:pPr rtl="1" algn="r" marL="0" indent="0">
-              <a:lnSpc>
-                <a:spcPct val="108000"/>
-              </a:lnSpc>
-              <a:buNone/>
-            </a:pPr>
-            <a:r>
-              <a:rPr sz="1350" b="0" i="0" lang="he-IL">
+            <a:pPr rtl="1" algn="ctr" marL="0" indent="0">
+              <a:lnSpc>
+                <a:spcPct val="108000"/>
+              </a:lnSpc>
+              <a:buNone/>
+            </a:pPr>
+            <a:r>
+              <a:rPr sz="1400" b="0" i="0" lang="he-IL">
                 <a:solidFill>
                   <a:srgbClr val="A9B4C6"/>
                 </a:solidFill>
                 <a:latin typeface="Arial"/>
                 <a:cs typeface="Arial"/>
               </a:rPr>
-              <a:t>"תודה שפנית! נחזור אליך תוך יום"</a:t>
-            </a:r>
-          </a:p>
-        </p:txBody>
-      </p:sp>
-      <p:sp>
-        <p:nvSpPr>
-          <p:cNvPr id="13" name="Rounded Rectangle 12"/>
+              <a:t>מעביר הלאה</a:t>
+            </a:r>
+          </a:p>
+        </p:txBody>
+      </p:sp>
+      <p:sp>
+        <p:nvSpPr>
+          <p:cNvPr id="14" name="TextBox 13"/>
+          <p:cNvSpPr txBox="1"/>
+          <p:nvPr/>
+        </p:nvSpPr>
+        <p:spPr>
+          <a:xfrm>
+            <a:off x="4681728" y="4023360"/>
+            <a:ext cx="2834640" cy="731520"/>
+          </a:xfrm>
+          <a:prstGeom prst="rect">
+            <a:avLst/>
+          </a:prstGeom>
+          <a:noFill/>
+        </p:spPr>
+        <p:txBody>
+          <a:bodyPr wrap="square" lIns="0" rIns="0" tIns="0" bIns="0" anchor="t" rtlCol="0">
+            <a:spAutoFit/>
+          </a:bodyPr>
+          <a:lstStyle/>
+          <a:p>
+            <a:pPr rtl="1" algn="ctr" marL="0" indent="0">
+              <a:lnSpc>
+                <a:spcPct val="108000"/>
+              </a:lnSpc>
+              <a:buNone/>
+            </a:pPr>
+            <a:r>
+              <a:rPr sz="1450" b="0" i="0" lang="he-IL">
+                <a:solidFill>
+                  <a:srgbClr val="F2F5FA"/>
+                </a:solidFill>
+                <a:latin typeface="Arial"/>
+                <a:cs typeface="Arial"/>
+              </a:rPr>
+              <a:t>לוקח את הפרטים</a:t>
+            </a:r>
+          </a:p>
+        </p:txBody>
+      </p:sp>
+      <p:sp>
+        <p:nvSpPr>
+          <p:cNvPr id="15" name="TextBox 14"/>
+          <p:cNvSpPr txBox="1"/>
+          <p:nvPr/>
+        </p:nvSpPr>
+        <p:spPr>
+          <a:xfrm>
+            <a:off x="4023360" y="3108960"/>
+            <a:ext cx="365760" cy="457200"/>
+          </a:xfrm>
+          <a:prstGeom prst="rect">
+            <a:avLst/>
+          </a:prstGeom>
+          <a:noFill/>
+        </p:spPr>
+        <p:txBody>
+          <a:bodyPr wrap="square" lIns="0" rIns="0" tIns="0" bIns="0" anchor="t" rtlCol="0">
+            <a:spAutoFit/>
+          </a:bodyPr>
+          <a:lstStyle/>
+          <a:p>
+            <a:pPr rtl="1" algn="ctr" marL="0" indent="0">
+              <a:lnSpc>
+                <a:spcPct val="108000"/>
+              </a:lnSpc>
+              <a:buNone/>
+            </a:pPr>
+            <a:r>
+              <a:rPr sz="2600" b="1" i="0" lang="he-IL">
+                <a:solidFill>
+                  <a:srgbClr val="6296FF"/>
+                </a:solidFill>
+                <a:latin typeface="Arial"/>
+                <a:cs typeface="Arial"/>
+              </a:rPr>
+              <a:t>←</a:t>
+            </a:r>
+          </a:p>
+        </p:txBody>
+      </p:sp>
+      <p:sp>
+        <p:nvSpPr>
+          <p:cNvPr id="16" name="Rounded Rectangle 15"/>
           <p:cNvSpPr/>
           <p:nvPr/>
         </p:nvSpPr>
         <p:spPr>
           <a:xfrm>
-            <a:off x="11027664" y="3913632"/>
-            <a:ext cx="457200" cy="457200"/>
+            <a:off x="658368" y="1920240"/>
+            <a:ext cx="3383280" cy="3017520"/>
           </a:xfrm>
           <a:prstGeom prst="roundRect">
             <a:avLst>
-              <a:gd name="adj" fmla="val 20000"/>
+              <a:gd name="adj" fmla="val 3000"/>
             </a:avLst>
+          </a:prstGeom>
+          <a:solidFill>
+            <a:srgbClr val="101620"/>
+          </a:solidFill>
+          <a:ln w="19050">
+            <a:solidFill>
+              <a:srgbClr val="002A80"/>
+            </a:solidFill>
+          </a:ln>
+          <a:effectLst/>
+        </p:spPr>
+        <p:style>
+          <a:lnRef idx="1">
+            <a:schemeClr val="accent1"/>
+          </a:lnRef>
+          <a:fillRef idx="3">
+            <a:schemeClr val="accent1"/>
+          </a:fillRef>
+          <a:effectRef idx="2">
+            <a:schemeClr val="accent1"/>
+          </a:effectRef>
+          <a:fontRef idx="minor">
+            <a:schemeClr val="lt1"/>
+          </a:fontRef>
+        </p:style>
+        <p:txBody>
+          <a:bodyPr rtlCol="0" anchor="ctr"/>
+          <a:lstStyle/>
+          <a:p/>
+        </p:txBody>
+      </p:sp>
+      <p:sp>
+        <p:nvSpPr>
+          <p:cNvPr id="17" name="Oval 16"/>
+          <p:cNvSpPr/>
+          <p:nvPr/>
+        </p:nvSpPr>
+        <p:spPr>
+          <a:xfrm>
+            <a:off x="1938528" y="2103120"/>
+            <a:ext cx="822960" cy="822960"/>
+          </a:xfrm>
+          <a:prstGeom prst="ellipse">
+            <a:avLst/>
           </a:prstGeom>
           <a:solidFill>
             <a:srgbClr val="022349"/>
@@ -19345,28 +19772,28 @@
               <a:buNone/>
             </a:pPr>
             <a:r>
-              <a:rPr sz="1500" b="1" i="0" lang="he-IL">
+              <a:rPr sz="2600" b="1" i="0" lang="he-IL">
                 <a:solidFill>
                   <a:srgbClr val="F2F5FA"/>
                 </a:solidFill>
                 <a:latin typeface="Arial"/>
                 <a:cs typeface="Arial"/>
               </a:rPr>
-              <a:t>4</a:t>
-            </a:r>
-          </a:p>
-        </p:txBody>
-      </p:sp>
-      <p:sp>
-        <p:nvSpPr>
-          <p:cNvPr id="14" name="TextBox 13"/>
-          <p:cNvSpPr txBox="1"/>
-          <p:nvPr/>
-        </p:nvSpPr>
-        <p:spPr>
-          <a:xfrm>
-            <a:off x="6309360" y="3941064"/>
-            <a:ext cx="4572000" cy="365760"/>
+              <a:t>✅</a:t>
+            </a:r>
+          </a:p>
+        </p:txBody>
+      </p:sp>
+      <p:sp>
+        <p:nvSpPr>
+          <p:cNvPr id="18" name="TextBox 17"/>
+          <p:cNvSpPr txBox="1"/>
+          <p:nvPr/>
+        </p:nvSpPr>
+        <p:spPr>
+          <a:xfrm>
+            <a:off x="859536" y="3063240"/>
+            <a:ext cx="2980944" cy="365760"/>
           </a:xfrm>
           <a:prstGeom prst="rect">
             <a:avLst/>
@@ -19379,35 +19806,35 @@
           </a:bodyPr>
           <a:lstStyle/>
           <a:p>
-            <a:pPr rtl="1" algn="r" marL="0" indent="0">
-              <a:lnSpc>
-                <a:spcPct val="108000"/>
-              </a:lnSpc>
-              <a:buNone/>
-            </a:pPr>
-            <a:r>
-              <a:rPr sz="1700" b="1" i="0" lang="he-IL">
+            <a:pPr rtl="1" algn="ctr" marL="0" indent="0">
+              <a:lnSpc>
+                <a:spcPct val="108000"/>
+              </a:lnSpc>
+              <a:buNone/>
+            </a:pPr>
+            <a:r>
+              <a:rPr sz="1900" b="1" i="0" lang="he-IL">
                 <a:solidFill>
                   <a:srgbClr val="EBEDF0"/>
                 </a:solidFill>
                 <a:latin typeface="Arial"/>
                 <a:cs typeface="Arial"/>
               </a:rPr>
-              <a:t>Google Sheets: Add a row</a:t>
-            </a:r>
-          </a:p>
-        </p:txBody>
-      </p:sp>
-      <p:sp>
-        <p:nvSpPr>
-          <p:cNvPr id="15" name="TextBox 14"/>
-          <p:cNvSpPr txBox="1"/>
-          <p:nvPr/>
-        </p:nvSpPr>
-        <p:spPr>
-          <a:xfrm>
-            <a:off x="6309360" y="4334256"/>
-            <a:ext cx="4572000" cy="548640"/>
+              <a:t>פעולה</a:t>
+            </a:r>
+          </a:p>
+        </p:txBody>
+      </p:sp>
+      <p:sp>
+        <p:nvSpPr>
+          <p:cNvPr id="19" name="TextBox 18"/>
+          <p:cNvSpPr txBox="1"/>
+          <p:nvPr/>
+        </p:nvSpPr>
+        <p:spPr>
+          <a:xfrm>
+            <a:off x="932688" y="3520440"/>
+            <a:ext cx="2834640" cy="365760"/>
           </a:xfrm>
           <a:prstGeom prst="rect">
             <a:avLst/>
@@ -19420,48 +19847,87 @@
           </a:bodyPr>
           <a:lstStyle/>
           <a:p>
-            <a:pPr rtl="1" algn="r" marL="0" indent="0">
-              <a:lnSpc>
-                <a:spcPct val="108000"/>
-              </a:lnSpc>
-              <a:buNone/>
-            </a:pPr>
-            <a:r>
-              <a:rPr sz="1350" b="0" i="0" lang="he-IL">
+            <a:pPr rtl="1" algn="ctr" marL="0" indent="0">
+              <a:lnSpc>
+                <a:spcPct val="108000"/>
+              </a:lnSpc>
+              <a:buNone/>
+            </a:pPr>
+            <a:r>
+              <a:rPr sz="1400" b="0" i="0" lang="he-IL">
                 <a:solidFill>
                   <a:srgbClr val="A9B4C6"/>
                 </a:solidFill>
                 <a:latin typeface="Arial"/>
                 <a:cs typeface="Arial"/>
               </a:rPr>
-              <a:t>כל ליד נשמר בגיליון</a:t>
-            </a:r>
-          </a:p>
-        </p:txBody>
-      </p:sp>
-      <p:sp>
-        <p:nvSpPr>
-          <p:cNvPr id="16" name="Rounded Rectangle 15"/>
+              <a:t>משהו נעשה</a:t>
+            </a:r>
+          </a:p>
+        </p:txBody>
+      </p:sp>
+      <p:sp>
+        <p:nvSpPr>
+          <p:cNvPr id="20" name="TextBox 19"/>
+          <p:cNvSpPr txBox="1"/>
+          <p:nvPr/>
+        </p:nvSpPr>
+        <p:spPr>
+          <a:xfrm>
+            <a:off x="932688" y="4023360"/>
+            <a:ext cx="2834640" cy="731520"/>
+          </a:xfrm>
+          <a:prstGeom prst="rect">
+            <a:avLst/>
+          </a:prstGeom>
+          <a:noFill/>
+        </p:spPr>
+        <p:txBody>
+          <a:bodyPr wrap="square" lIns="0" rIns="0" tIns="0" bIns="0" anchor="t" rtlCol="0">
+            <a:spAutoFit/>
+          </a:bodyPr>
+          <a:lstStyle/>
+          <a:p>
+            <a:pPr rtl="1" algn="ctr" marL="0" indent="0">
+              <a:lnSpc>
+                <a:spcPct val="108000"/>
+              </a:lnSpc>
+              <a:buNone/>
+            </a:pPr>
+            <a:r>
+              <a:rPr sz="1450" b="0" i="0" lang="he-IL">
+                <a:solidFill>
+                  <a:srgbClr val="F2F5FA"/>
+                </a:solidFill>
+                <a:latin typeface="Arial"/>
+                <a:cs typeface="Arial"/>
+              </a:rPr>
+              <a:t>מייל תודה + שורה בגיליון</a:t>
+            </a:r>
+          </a:p>
+        </p:txBody>
+      </p:sp>
+      <p:sp>
+        <p:nvSpPr>
+          <p:cNvPr id="21" name="Rounded Rectangle 20"/>
           <p:cNvSpPr/>
           <p:nvPr/>
         </p:nvSpPr>
         <p:spPr>
           <a:xfrm>
-            <a:off x="11027664" y="4608576"/>
-            <a:ext cx="457200" cy="457200"/>
+            <a:off x="658368" y="5212080"/>
+            <a:ext cx="10872216" cy="822960"/>
           </a:xfrm>
           <a:prstGeom prst="roundRect">
             <a:avLst>
-              <a:gd name="adj" fmla="val 20000"/>
+              <a:gd name="adj" fmla="val 3000"/>
             </a:avLst>
           </a:prstGeom>
           <a:solidFill>
-            <a:srgbClr val="022349"/>
+            <a:srgbClr val="183A13"/>
           </a:solidFill>
-          <a:ln w="19050">
-            <a:solidFill>
-              <a:srgbClr val="487CFF"/>
-            </a:solidFill>
+          <a:ln>
+            <a:noFill/>
           </a:ln>
           <a:effectLst/>
         </p:spPr>
@@ -19480,46 +19946,29 @@
           </a:fontRef>
         </p:style>
         <p:txBody>
-          <a:bodyPr rtlCol="0" anchor="ctr" lIns="0" rIns="0" tIns="0" bIns="0"/>
-          <a:lstStyle/>
-          <a:p>
-            <a:pPr rtl="1" algn="ctr" marL="0" indent="0">
-              <a:lnSpc>
-                <a:spcPct val="108000"/>
-              </a:lnSpc>
-              <a:buNone/>
-            </a:pPr>
-            <a:r>
-              <a:rPr sz="1500" b="1" i="0" lang="he-IL">
-                <a:solidFill>
-                  <a:srgbClr val="F2F5FA"/>
-                </a:solidFill>
-                <a:latin typeface="Arial"/>
-                <a:cs typeface="Arial"/>
-              </a:rPr>
-              <a:t>5</a:t>
-            </a:r>
-          </a:p>
-        </p:txBody>
-      </p:sp>
-      <p:sp>
-        <p:nvSpPr>
-          <p:cNvPr id="17" name="TextBox 16"/>
-          <p:cNvSpPr txBox="1"/>
-          <p:nvPr/>
-        </p:nvSpPr>
-        <p:spPr>
-          <a:xfrm>
-            <a:off x="6309360" y="4636008"/>
-            <a:ext cx="4572000" cy="365760"/>
-          </a:xfrm>
-          <a:prstGeom prst="rect">
-            <a:avLst/>
-          </a:prstGeom>
-          <a:noFill/>
-        </p:spPr>
-        <p:txBody>
-          <a:bodyPr wrap="square" lIns="0" rIns="0" tIns="0" bIns="0" anchor="t" rtlCol="0">
+          <a:bodyPr rtlCol="0" anchor="ctr"/>
+          <a:lstStyle/>
+          <a:p/>
+        </p:txBody>
+      </p:sp>
+      <p:sp>
+        <p:nvSpPr>
+          <p:cNvPr id="22" name="TextBox 21"/>
+          <p:cNvSpPr txBox="1"/>
+          <p:nvPr/>
+        </p:nvSpPr>
+        <p:spPr>
+          <a:xfrm>
+            <a:off x="886968" y="5212080"/>
+            <a:ext cx="10415016" cy="822960"/>
+          </a:xfrm>
+          <a:prstGeom prst="rect">
+            <a:avLst/>
+          </a:prstGeom>
+          <a:noFill/>
+        </p:spPr>
+        <p:txBody>
+          <a:bodyPr wrap="square" lIns="0" rIns="0" tIns="0" bIns="0" anchor="ctr" rtlCol="0">
             <a:spAutoFit/>
           </a:bodyPr>
           <a:lstStyle/>
@@ -19531,342 +19980,21 @@
               <a:buNone/>
             </a:pPr>
             <a:r>
-              <a:rPr sz="1700" b="1" i="0" lang="he-IL">
+              <a:rPr sz="1450" b="0" i="0" lang="he-IL">
                 <a:solidFill>
                   <a:srgbClr val="EBEDF0"/>
                 </a:solidFill>
                 <a:latin typeface="Arial"/>
                 <a:cs typeface="Arial"/>
               </a:rPr>
-              <a:t>Run once, ואז ON</a:t>
-            </a:r>
-          </a:p>
-        </p:txBody>
-      </p:sp>
-      <p:sp>
-        <p:nvSpPr>
-          <p:cNvPr id="18" name="TextBox 17"/>
-          <p:cNvSpPr txBox="1"/>
-          <p:nvPr/>
-        </p:nvSpPr>
-        <p:spPr>
-          <a:xfrm>
-            <a:off x="6309360" y="5029200"/>
-            <a:ext cx="4572000" cy="548640"/>
-          </a:xfrm>
-          <a:prstGeom prst="rect">
-            <a:avLst/>
-          </a:prstGeom>
-          <a:noFill/>
-        </p:spPr>
-        <p:txBody>
-          <a:bodyPr wrap="square" lIns="0" rIns="0" tIns="0" bIns="0" anchor="t" rtlCol="0">
-            <a:spAutoFit/>
-          </a:bodyPr>
-          <a:lstStyle/>
-          <a:p>
-            <a:pPr rtl="1" algn="r" marL="0" indent="0">
-              <a:lnSpc>
-                <a:spcPct val="108000"/>
-              </a:lnSpc>
-              <a:buNone/>
-            </a:pPr>
-            <a:r>
-              <a:rPr sz="1350" b="0" i="0" lang="he-IL">
-                <a:solidFill>
-                  <a:srgbClr val="A9B4C6"/>
-                </a:solidFill>
-                <a:latin typeface="Arial"/>
-                <a:cs typeface="Arial"/>
-              </a:rPr>
-              <a:t>ממלאים את הטופס ורואים את הקסם</a:t>
-            </a:r>
-          </a:p>
-        </p:txBody>
-      </p:sp>
-      <p:sp>
-        <p:nvSpPr>
-          <p:cNvPr id="19" name="Rounded Rectangle 18"/>
-          <p:cNvSpPr/>
-          <p:nvPr/>
-        </p:nvSpPr>
-        <p:spPr>
-          <a:xfrm>
-            <a:off x="658368" y="1874519"/>
-            <a:ext cx="5394960" cy="3520440"/>
-          </a:xfrm>
-          <a:prstGeom prst="roundRect">
-            <a:avLst>
-              <a:gd name="adj" fmla="val 3000"/>
-            </a:avLst>
-          </a:prstGeom>
-          <a:solidFill>
-            <a:srgbClr val="022349"/>
-          </a:solidFill>
-          <a:ln w="19050">
-            <a:solidFill>
-              <a:srgbClr val="487CFF"/>
-            </a:solidFill>
-          </a:ln>
-          <a:effectLst/>
-        </p:spPr>
-        <p:style>
-          <a:lnRef idx="1">
-            <a:schemeClr val="accent1"/>
-          </a:lnRef>
-          <a:fillRef idx="3">
-            <a:schemeClr val="accent1"/>
-          </a:fillRef>
-          <a:effectRef idx="2">
-            <a:schemeClr val="accent1"/>
-          </a:effectRef>
-          <a:fontRef idx="minor">
-            <a:schemeClr val="lt1"/>
-          </a:fontRef>
-        </p:style>
-        <p:txBody>
-          <a:bodyPr rtlCol="0" anchor="ctr"/>
-          <a:lstStyle/>
-          <a:p/>
-        </p:txBody>
-      </p:sp>
-      <p:sp>
-        <p:nvSpPr>
-          <p:cNvPr id="20" name="TextBox 19"/>
-          <p:cNvSpPr txBox="1"/>
-          <p:nvPr/>
-        </p:nvSpPr>
-        <p:spPr>
-          <a:xfrm>
-            <a:off x="886968" y="2057400"/>
-            <a:ext cx="4937760" cy="365760"/>
-          </a:xfrm>
-          <a:prstGeom prst="rect">
-            <a:avLst/>
-          </a:prstGeom>
-          <a:noFill/>
-        </p:spPr>
-        <p:txBody>
-          <a:bodyPr wrap="square" lIns="0" rIns="0" tIns="0" bIns="0" anchor="t" rtlCol="0">
-            <a:spAutoFit/>
-          </a:bodyPr>
-          <a:lstStyle/>
-          <a:p>
-            <a:pPr rtl="1" algn="r" marL="0" indent="0">
-              <a:lnSpc>
-                <a:spcPct val="108000"/>
-              </a:lnSpc>
-              <a:buNone/>
-            </a:pPr>
-            <a:r>
-              <a:rPr sz="1600" b="1" i="0" lang="he-IL">
-                <a:solidFill>
-                  <a:srgbClr val="F2F5FA"/>
-                </a:solidFill>
-                <a:latin typeface="Arial"/>
-                <a:cs typeface="Arial"/>
-              </a:rPr>
-              <a:t>🧭  אם נתקעים</a:t>
-            </a:r>
-          </a:p>
-        </p:txBody>
-      </p:sp>
-      <p:sp>
-        <p:nvSpPr>
-          <p:cNvPr id="21" name="TextBox 20"/>
-          <p:cNvSpPr txBox="1"/>
-          <p:nvPr/>
-        </p:nvSpPr>
-        <p:spPr>
-          <a:xfrm>
-            <a:off x="886968" y="2560320"/>
-            <a:ext cx="4937760" cy="2743200"/>
-          </a:xfrm>
-          <a:prstGeom prst="rect">
-            <a:avLst/>
-          </a:prstGeom>
-          <a:noFill/>
-        </p:spPr>
-        <p:txBody>
-          <a:bodyPr wrap="square" lIns="0" rIns="0" tIns="0" bIns="0" anchor="t" rtlCol="0">
-            <a:spAutoFit/>
-          </a:bodyPr>
-          <a:lstStyle/>
-          <a:p>
-            <a:pPr rtl="1" algn="r" marL="285750" indent="-285750">
-              <a:lnSpc>
-                <a:spcPct val="108000"/>
-              </a:lnSpc>
-              <a:spcAft>
-                <a:spcPts val="800"/>
-              </a:spcAft>
-              <a:buSzPct val="100000"/>
-              <a:buChar char="•"/>
-            </a:pPr>
-            <a:r>
-              <a:rPr sz="1450" b="0" i="0" lang="he-IL">
-                <a:solidFill>
-                  <a:srgbClr val="EBEDF0"/>
-                </a:solidFill>
-                <a:latin typeface="Arial"/>
-                <a:cs typeface="Arial"/>
-              </a:rPr>
-              <a:t>כל מודול צריך חיבור לחשבון: Add connection</a:t>
-            </a:r>
-          </a:p>
-          <a:p>
-            <a:pPr rtl="1" algn="r" marL="285750" indent="-285750">
-              <a:lnSpc>
-                <a:spcPct val="108000"/>
-              </a:lnSpc>
-              <a:spcAft>
-                <a:spcPts val="800"/>
-              </a:spcAft>
-              <a:buSzPct val="100000"/>
-              <a:buChar char="•"/>
-            </a:pPr>
-            <a:r>
-              <a:rPr sz="1450" b="0" i="0" lang="he-IL">
-                <a:solidFill>
-                  <a:srgbClr val="EBEDF0"/>
-                </a:solidFill>
-                <a:latin typeface="Arial"/>
-                <a:cs typeface="Arial"/>
-              </a:rPr>
-              <a:t>לא רואים תגובה? ממלאים את הטופס שוב</a:t>
-            </a:r>
-          </a:p>
-          <a:p>
-            <a:pPr rtl="1" algn="r" marL="285750" indent="-285750">
-              <a:lnSpc>
-                <a:spcPct val="108000"/>
-              </a:lnSpc>
-              <a:spcAft>
-                <a:spcPts val="800"/>
-              </a:spcAft>
-              <a:buSzPct val="100000"/>
-              <a:buChar char="•"/>
-            </a:pPr>
-            <a:r>
-              <a:rPr sz="1450" b="0" i="0" lang="he-IL">
-                <a:solidFill>
-                  <a:srgbClr val="EBEDF0"/>
-                </a:solidFill>
-                <a:latin typeface="Arial"/>
-                <a:cs typeface="Arial"/>
-              </a:rPr>
-              <a:t>שגיאה אדומה? מצלמים מסך ושואלים את ג'מיני</a:t>
-            </a:r>
-          </a:p>
-          <a:p>
-            <a:pPr rtl="1" algn="r" marL="285750" indent="-285750">
-              <a:lnSpc>
-                <a:spcPct val="108000"/>
-              </a:lnSpc>
-              <a:buSzPct val="100000"/>
-              <a:buChar char="•"/>
-            </a:pPr>
-            <a:r>
-              <a:rPr sz="1450" b="0" i="0" lang="he-IL">
-                <a:solidFill>
-                  <a:srgbClr val="EBEDF0"/>
-                </a:solidFill>
-                <a:latin typeface="Arial"/>
-                <a:cs typeface="Arial"/>
-              </a:rPr>
-              <a:t>בחינם: 2 תרחישים פעילים, 1,000 קרדיטים בחודש</a:t>
-            </a:r>
-          </a:p>
-        </p:txBody>
-      </p:sp>
-      <p:sp>
-        <p:nvSpPr>
-          <p:cNvPr id="22" name="Rounded Rectangle 21"/>
-          <p:cNvSpPr/>
-          <p:nvPr/>
-        </p:nvSpPr>
-        <p:spPr>
-          <a:xfrm>
-            <a:off x="658368" y="5577840"/>
-            <a:ext cx="10872216" cy="594360"/>
-          </a:xfrm>
-          <a:prstGeom prst="roundRect">
-            <a:avLst>
-              <a:gd name="adj" fmla="val 3000"/>
-            </a:avLst>
-          </a:prstGeom>
-          <a:solidFill>
-            <a:srgbClr val="4B3F02"/>
-          </a:solidFill>
-          <a:ln>
-            <a:noFill/>
-          </a:ln>
-          <a:effectLst/>
-        </p:spPr>
-        <p:style>
-          <a:lnRef idx="1">
-            <a:schemeClr val="accent1"/>
-          </a:lnRef>
-          <a:fillRef idx="3">
-            <a:schemeClr val="accent1"/>
-          </a:fillRef>
-          <a:effectRef idx="2">
-            <a:schemeClr val="accent1"/>
-          </a:effectRef>
-          <a:fontRef idx="minor">
-            <a:schemeClr val="lt1"/>
-          </a:fontRef>
-        </p:style>
-        <p:txBody>
-          <a:bodyPr rtlCol="0" anchor="ctr"/>
-          <a:lstStyle/>
-          <a:p/>
+              <a:t>🏆  אתגר באפליקציה: "אוטומציה ראשונה". כתבו במשפט אחד: כש[טריגר], אז [פעולה]. הכי שימושית מנצחת.</a:t>
+            </a:r>
+          </a:p>
         </p:txBody>
       </p:sp>
       <p:sp>
         <p:nvSpPr>
           <p:cNvPr id="23" name="TextBox 22"/>
-          <p:cNvSpPr txBox="1"/>
-          <p:nvPr/>
-        </p:nvSpPr>
-        <p:spPr>
-          <a:xfrm>
-            <a:off x="886968" y="5577840"/>
-            <a:ext cx="10415016" cy="594360"/>
-          </a:xfrm>
-          <a:prstGeom prst="rect">
-            <a:avLst/>
-          </a:prstGeom>
-          <a:noFill/>
-        </p:spPr>
-        <p:txBody>
-          <a:bodyPr wrap="square" lIns="0" rIns="0" tIns="0" bIns="0" anchor="ctr" rtlCol="0">
-            <a:spAutoFit/>
-          </a:bodyPr>
-          <a:lstStyle/>
-          <a:p>
-            <a:pPr rtl="1" algn="r" marL="0" indent="0">
-              <a:lnSpc>
-                <a:spcPct val="108000"/>
-              </a:lnSpc>
-              <a:buNone/>
-            </a:pPr>
-            <a:r>
-              <a:rPr sz="1450" b="0" i="0" lang="he-IL">
-                <a:solidFill>
-                  <a:srgbClr val="EBEDF0"/>
-                </a:solidFill>
-                <a:latin typeface="Arial"/>
-                <a:cs typeface="Arial"/>
-              </a:rPr>
-              <a:t>🎁  בונוס למתקדמים: מוסיפים באמצע מודול AI שמנסח תשובה אישית לכל פנייה.</a:t>
-            </a:r>
-          </a:p>
-        </p:txBody>
-      </p:sp>
-      <p:sp>
-        <p:nvSpPr>
-          <p:cNvPr id="24" name="TextBox 23"/>
           <p:cNvSpPr txBox="1"/>
           <p:nvPr/>
         </p:nvSpPr>
@@ -19954,6 +20082,1147 @@
                 <a:latin typeface="Arial"/>
                 <a:cs typeface="Arial"/>
               </a:rPr>
+              <a:t>🛠️ בונים יחד: טופס לידים שעונה לבד</a:t>
+            </a:r>
+          </a:p>
+        </p:txBody>
+      </p:sp>
+      <p:sp>
+        <p:nvSpPr>
+          <p:cNvPr id="3" name="TextBox 2"/>
+          <p:cNvSpPr txBox="1"/>
+          <p:nvPr/>
+        </p:nvSpPr>
+        <p:spPr>
+          <a:xfrm>
+            <a:off x="658368" y="1280160"/>
+            <a:ext cx="10872216" cy="365760"/>
+          </a:xfrm>
+          <a:prstGeom prst="rect">
+            <a:avLst/>
+          </a:prstGeom>
+          <a:noFill/>
+        </p:spPr>
+        <p:txBody>
+          <a:bodyPr wrap="square" lIns="0" rIns="0" tIns="0" bIns="0" anchor="t" rtlCol="0">
+            <a:spAutoFit/>
+          </a:bodyPr>
+          <a:lstStyle/>
+          <a:p>
+            <a:pPr rtl="1" algn="r" marL="0" indent="0">
+              <a:lnSpc>
+                <a:spcPct val="108000"/>
+              </a:lnSpc>
+              <a:buNone/>
+            </a:pPr>
+            <a:r>
+              <a:rPr sz="1450" b="0" i="0" lang="he-IL">
+                <a:solidFill>
+                  <a:srgbClr val="FAC496"/>
+                </a:solidFill>
+                <a:latin typeface="Arial"/>
+                <a:cs typeface="Arial"/>
+              </a:rPr>
+              <a:t>20 דקות, חינם, בלי קוד</a:t>
+            </a:r>
+          </a:p>
+        </p:txBody>
+      </p:sp>
+      <p:sp>
+        <p:nvSpPr>
+          <p:cNvPr id="4" name="Rounded Rectangle 3"/>
+          <p:cNvSpPr/>
+          <p:nvPr/>
+        </p:nvSpPr>
+        <p:spPr>
+          <a:xfrm>
+            <a:off x="11027664" y="1828800"/>
+            <a:ext cx="457200" cy="457200"/>
+          </a:xfrm>
+          <a:prstGeom prst="roundRect">
+            <a:avLst>
+              <a:gd name="adj" fmla="val 20000"/>
+            </a:avLst>
+          </a:prstGeom>
+          <a:solidFill>
+            <a:srgbClr val="022349"/>
+          </a:solidFill>
+          <a:ln w="19050">
+            <a:solidFill>
+              <a:srgbClr val="487CFF"/>
+            </a:solidFill>
+          </a:ln>
+          <a:effectLst/>
+        </p:spPr>
+        <p:style>
+          <a:lnRef idx="1">
+            <a:schemeClr val="accent1"/>
+          </a:lnRef>
+          <a:fillRef idx="3">
+            <a:schemeClr val="accent1"/>
+          </a:fillRef>
+          <a:effectRef idx="2">
+            <a:schemeClr val="accent1"/>
+          </a:effectRef>
+          <a:fontRef idx="minor">
+            <a:schemeClr val="lt1"/>
+          </a:fontRef>
+        </p:style>
+        <p:txBody>
+          <a:bodyPr rtlCol="0" anchor="ctr" lIns="0" rIns="0" tIns="0" bIns="0"/>
+          <a:lstStyle/>
+          <a:p>
+            <a:pPr rtl="1" algn="ctr" marL="0" indent="0">
+              <a:lnSpc>
+                <a:spcPct val="108000"/>
+              </a:lnSpc>
+              <a:buNone/>
+            </a:pPr>
+            <a:r>
+              <a:rPr sz="1500" b="1" i="0" lang="he-IL">
+                <a:solidFill>
+                  <a:srgbClr val="F2F5FA"/>
+                </a:solidFill>
+                <a:latin typeface="Arial"/>
+                <a:cs typeface="Arial"/>
+              </a:rPr>
+              <a:t>1</a:t>
+            </a:r>
+          </a:p>
+        </p:txBody>
+      </p:sp>
+      <p:sp>
+        <p:nvSpPr>
+          <p:cNvPr id="5" name="TextBox 4"/>
+          <p:cNvSpPr txBox="1"/>
+          <p:nvPr/>
+        </p:nvSpPr>
+        <p:spPr>
+          <a:xfrm>
+            <a:off x="6309360" y="1856231"/>
+            <a:ext cx="4572000" cy="365760"/>
+          </a:xfrm>
+          <a:prstGeom prst="rect">
+            <a:avLst/>
+          </a:prstGeom>
+          <a:noFill/>
+        </p:spPr>
+        <p:txBody>
+          <a:bodyPr wrap="square" lIns="0" rIns="0" tIns="0" bIns="0" anchor="t" rtlCol="0">
+            <a:spAutoFit/>
+          </a:bodyPr>
+          <a:lstStyle/>
+          <a:p>
+            <a:pPr rtl="1" algn="r" marL="0" indent="0">
+              <a:lnSpc>
+                <a:spcPct val="108000"/>
+              </a:lnSpc>
+              <a:buNone/>
+            </a:pPr>
+            <a:r>
+              <a:rPr sz="1700" b="1" i="0" lang="he-IL">
+                <a:solidFill>
+                  <a:srgbClr val="EBEDF0"/>
+                </a:solidFill>
+                <a:latin typeface="Arial"/>
+                <a:cs typeface="Arial"/>
+              </a:rPr>
+              <a:t>Google Forms: טופס "צור קשר"</a:t>
+            </a:r>
+          </a:p>
+        </p:txBody>
+      </p:sp>
+      <p:sp>
+        <p:nvSpPr>
+          <p:cNvPr id="6" name="TextBox 5"/>
+          <p:cNvSpPr txBox="1"/>
+          <p:nvPr/>
+        </p:nvSpPr>
+        <p:spPr>
+          <a:xfrm>
+            <a:off x="6309360" y="2249424"/>
+            <a:ext cx="4572000" cy="548640"/>
+          </a:xfrm>
+          <a:prstGeom prst="rect">
+            <a:avLst/>
+          </a:prstGeom>
+          <a:noFill/>
+        </p:spPr>
+        <p:txBody>
+          <a:bodyPr wrap="square" lIns="0" rIns="0" tIns="0" bIns="0" anchor="t" rtlCol="0">
+            <a:spAutoFit/>
+          </a:bodyPr>
+          <a:lstStyle/>
+          <a:p>
+            <a:pPr rtl="1" algn="r" marL="0" indent="0">
+              <a:lnSpc>
+                <a:spcPct val="108000"/>
+              </a:lnSpc>
+              <a:buNone/>
+            </a:pPr>
+            <a:r>
+              <a:rPr sz="1350" b="0" i="0" lang="he-IL">
+                <a:solidFill>
+                  <a:srgbClr val="A9B4C6"/>
+                </a:solidFill>
+                <a:latin typeface="Arial"/>
+                <a:cs typeface="Arial"/>
+              </a:rPr>
+              <a:t>שם, מייל, במה אפשר לעזור</a:t>
+            </a:r>
+          </a:p>
+        </p:txBody>
+      </p:sp>
+      <p:sp>
+        <p:nvSpPr>
+          <p:cNvPr id="7" name="Rounded Rectangle 6"/>
+          <p:cNvSpPr/>
+          <p:nvPr/>
+        </p:nvSpPr>
+        <p:spPr>
+          <a:xfrm>
+            <a:off x="11027664" y="2523744"/>
+            <a:ext cx="457200" cy="457200"/>
+          </a:xfrm>
+          <a:prstGeom prst="roundRect">
+            <a:avLst>
+              <a:gd name="adj" fmla="val 20000"/>
+            </a:avLst>
+          </a:prstGeom>
+          <a:solidFill>
+            <a:srgbClr val="022349"/>
+          </a:solidFill>
+          <a:ln w="19050">
+            <a:solidFill>
+              <a:srgbClr val="487CFF"/>
+            </a:solidFill>
+          </a:ln>
+          <a:effectLst/>
+        </p:spPr>
+        <p:style>
+          <a:lnRef idx="1">
+            <a:schemeClr val="accent1"/>
+          </a:lnRef>
+          <a:fillRef idx="3">
+            <a:schemeClr val="accent1"/>
+          </a:fillRef>
+          <a:effectRef idx="2">
+            <a:schemeClr val="accent1"/>
+          </a:effectRef>
+          <a:fontRef idx="minor">
+            <a:schemeClr val="lt1"/>
+          </a:fontRef>
+        </p:style>
+        <p:txBody>
+          <a:bodyPr rtlCol="0" anchor="ctr" lIns="0" rIns="0" tIns="0" bIns="0"/>
+          <a:lstStyle/>
+          <a:p>
+            <a:pPr rtl="1" algn="ctr" marL="0" indent="0">
+              <a:lnSpc>
+                <a:spcPct val="108000"/>
+              </a:lnSpc>
+              <a:buNone/>
+            </a:pPr>
+            <a:r>
+              <a:rPr sz="1500" b="1" i="0" lang="he-IL">
+                <a:solidFill>
+                  <a:srgbClr val="F2F5FA"/>
+                </a:solidFill>
+                <a:latin typeface="Arial"/>
+                <a:cs typeface="Arial"/>
+              </a:rPr>
+              <a:t>2</a:t>
+            </a:r>
+          </a:p>
+        </p:txBody>
+      </p:sp>
+      <p:sp>
+        <p:nvSpPr>
+          <p:cNvPr id="8" name="TextBox 7"/>
+          <p:cNvSpPr txBox="1"/>
+          <p:nvPr/>
+        </p:nvSpPr>
+        <p:spPr>
+          <a:xfrm>
+            <a:off x="6309360" y="2551175"/>
+            <a:ext cx="4572000" cy="365760"/>
+          </a:xfrm>
+          <a:prstGeom prst="rect">
+            <a:avLst/>
+          </a:prstGeom>
+          <a:noFill/>
+        </p:spPr>
+        <p:txBody>
+          <a:bodyPr wrap="square" lIns="0" rIns="0" tIns="0" bIns="0" anchor="t" rtlCol="0">
+            <a:spAutoFit/>
+          </a:bodyPr>
+          <a:lstStyle/>
+          <a:p>
+            <a:pPr rtl="1" algn="r" marL="0" indent="0">
+              <a:lnSpc>
+                <a:spcPct val="108000"/>
+              </a:lnSpc>
+              <a:buNone/>
+            </a:pPr>
+            <a:r>
+              <a:rPr sz="1700" b="1" i="0" lang="he-IL">
+                <a:solidFill>
+                  <a:srgbClr val="EBEDF0"/>
+                </a:solidFill>
+                <a:latin typeface="Arial"/>
+                <a:cs typeface="Arial"/>
+              </a:rPr>
+              <a:t>Make: Create scenario</a:t>
+            </a:r>
+          </a:p>
+        </p:txBody>
+      </p:sp>
+      <p:sp>
+        <p:nvSpPr>
+          <p:cNvPr id="9" name="TextBox 8"/>
+          <p:cNvSpPr txBox="1"/>
+          <p:nvPr/>
+        </p:nvSpPr>
+        <p:spPr>
+          <a:xfrm>
+            <a:off x="6309360" y="2944368"/>
+            <a:ext cx="4572000" cy="548640"/>
+          </a:xfrm>
+          <a:prstGeom prst="rect">
+            <a:avLst/>
+          </a:prstGeom>
+          <a:noFill/>
+        </p:spPr>
+        <p:txBody>
+          <a:bodyPr wrap="square" lIns="0" rIns="0" tIns="0" bIns="0" anchor="t" rtlCol="0">
+            <a:spAutoFit/>
+          </a:bodyPr>
+          <a:lstStyle/>
+          <a:p>
+            <a:pPr rtl="1" algn="r" marL="0" indent="0">
+              <a:lnSpc>
+                <a:spcPct val="108000"/>
+              </a:lnSpc>
+              <a:buNone/>
+            </a:pPr>
+            <a:r>
+              <a:rPr sz="1350" b="0" i="0" lang="he-IL">
+                <a:solidFill>
+                  <a:srgbClr val="A9B4C6"/>
+                </a:solidFill>
+                <a:latin typeface="Arial"/>
+                <a:cs typeface="Arial"/>
+              </a:rPr>
+              <a:t>טריגר: Google Forms &gt; Watch Responses</a:t>
+            </a:r>
+          </a:p>
+        </p:txBody>
+      </p:sp>
+      <p:sp>
+        <p:nvSpPr>
+          <p:cNvPr id="10" name="Rounded Rectangle 9"/>
+          <p:cNvSpPr/>
+          <p:nvPr/>
+        </p:nvSpPr>
+        <p:spPr>
+          <a:xfrm>
+            <a:off x="11027664" y="3218688"/>
+            <a:ext cx="457200" cy="457200"/>
+          </a:xfrm>
+          <a:prstGeom prst="roundRect">
+            <a:avLst>
+              <a:gd name="adj" fmla="val 20000"/>
+            </a:avLst>
+          </a:prstGeom>
+          <a:solidFill>
+            <a:srgbClr val="022349"/>
+          </a:solidFill>
+          <a:ln w="19050">
+            <a:solidFill>
+              <a:srgbClr val="487CFF"/>
+            </a:solidFill>
+          </a:ln>
+          <a:effectLst/>
+        </p:spPr>
+        <p:style>
+          <a:lnRef idx="1">
+            <a:schemeClr val="accent1"/>
+          </a:lnRef>
+          <a:fillRef idx="3">
+            <a:schemeClr val="accent1"/>
+          </a:fillRef>
+          <a:effectRef idx="2">
+            <a:schemeClr val="accent1"/>
+          </a:effectRef>
+          <a:fontRef idx="minor">
+            <a:schemeClr val="lt1"/>
+          </a:fontRef>
+        </p:style>
+        <p:txBody>
+          <a:bodyPr rtlCol="0" anchor="ctr" lIns="0" rIns="0" tIns="0" bIns="0"/>
+          <a:lstStyle/>
+          <a:p>
+            <a:pPr rtl="1" algn="ctr" marL="0" indent="0">
+              <a:lnSpc>
+                <a:spcPct val="108000"/>
+              </a:lnSpc>
+              <a:buNone/>
+            </a:pPr>
+            <a:r>
+              <a:rPr sz="1500" b="1" i="0" lang="he-IL">
+                <a:solidFill>
+                  <a:srgbClr val="F2F5FA"/>
+                </a:solidFill>
+                <a:latin typeface="Arial"/>
+                <a:cs typeface="Arial"/>
+              </a:rPr>
+              <a:t>3</a:t>
+            </a:r>
+          </a:p>
+        </p:txBody>
+      </p:sp>
+      <p:sp>
+        <p:nvSpPr>
+          <p:cNvPr id="11" name="TextBox 10"/>
+          <p:cNvSpPr txBox="1"/>
+          <p:nvPr/>
+        </p:nvSpPr>
+        <p:spPr>
+          <a:xfrm>
+            <a:off x="6309360" y="3246120"/>
+            <a:ext cx="4572000" cy="365760"/>
+          </a:xfrm>
+          <a:prstGeom prst="rect">
+            <a:avLst/>
+          </a:prstGeom>
+          <a:noFill/>
+        </p:spPr>
+        <p:txBody>
+          <a:bodyPr wrap="square" lIns="0" rIns="0" tIns="0" bIns="0" anchor="t" rtlCol="0">
+            <a:spAutoFit/>
+          </a:bodyPr>
+          <a:lstStyle/>
+          <a:p>
+            <a:pPr rtl="1" algn="r" marL="0" indent="0">
+              <a:lnSpc>
+                <a:spcPct val="108000"/>
+              </a:lnSpc>
+              <a:buNone/>
+            </a:pPr>
+            <a:r>
+              <a:rPr sz="1700" b="1" i="0" lang="he-IL">
+                <a:solidFill>
+                  <a:srgbClr val="EBEDF0"/>
+                </a:solidFill>
+                <a:latin typeface="Arial"/>
+                <a:cs typeface="Arial"/>
+              </a:rPr>
+              <a:t>Gmail: Send an email</a:t>
+            </a:r>
+          </a:p>
+        </p:txBody>
+      </p:sp>
+      <p:sp>
+        <p:nvSpPr>
+          <p:cNvPr id="12" name="TextBox 11"/>
+          <p:cNvSpPr txBox="1"/>
+          <p:nvPr/>
+        </p:nvSpPr>
+        <p:spPr>
+          <a:xfrm>
+            <a:off x="6309360" y="3639312"/>
+            <a:ext cx="4572000" cy="548640"/>
+          </a:xfrm>
+          <a:prstGeom prst="rect">
+            <a:avLst/>
+          </a:prstGeom>
+          <a:noFill/>
+        </p:spPr>
+        <p:txBody>
+          <a:bodyPr wrap="square" lIns="0" rIns="0" tIns="0" bIns="0" anchor="t" rtlCol="0">
+            <a:spAutoFit/>
+          </a:bodyPr>
+          <a:lstStyle/>
+          <a:p>
+            <a:pPr rtl="1" algn="r" marL="0" indent="0">
+              <a:lnSpc>
+                <a:spcPct val="108000"/>
+              </a:lnSpc>
+              <a:buNone/>
+            </a:pPr>
+            <a:r>
+              <a:rPr sz="1350" b="0" i="0" lang="he-IL">
+                <a:solidFill>
+                  <a:srgbClr val="A9B4C6"/>
+                </a:solidFill>
+                <a:latin typeface="Arial"/>
+                <a:cs typeface="Arial"/>
+              </a:rPr>
+              <a:t>"תודה שפנית! נחזור אליך תוך יום"</a:t>
+            </a:r>
+          </a:p>
+        </p:txBody>
+      </p:sp>
+      <p:sp>
+        <p:nvSpPr>
+          <p:cNvPr id="13" name="Rounded Rectangle 12"/>
+          <p:cNvSpPr/>
+          <p:nvPr/>
+        </p:nvSpPr>
+        <p:spPr>
+          <a:xfrm>
+            <a:off x="11027664" y="3913632"/>
+            <a:ext cx="457200" cy="457200"/>
+          </a:xfrm>
+          <a:prstGeom prst="roundRect">
+            <a:avLst>
+              <a:gd name="adj" fmla="val 20000"/>
+            </a:avLst>
+          </a:prstGeom>
+          <a:solidFill>
+            <a:srgbClr val="022349"/>
+          </a:solidFill>
+          <a:ln w="19050">
+            <a:solidFill>
+              <a:srgbClr val="487CFF"/>
+            </a:solidFill>
+          </a:ln>
+          <a:effectLst/>
+        </p:spPr>
+        <p:style>
+          <a:lnRef idx="1">
+            <a:schemeClr val="accent1"/>
+          </a:lnRef>
+          <a:fillRef idx="3">
+            <a:schemeClr val="accent1"/>
+          </a:fillRef>
+          <a:effectRef idx="2">
+            <a:schemeClr val="accent1"/>
+          </a:effectRef>
+          <a:fontRef idx="minor">
+            <a:schemeClr val="lt1"/>
+          </a:fontRef>
+        </p:style>
+        <p:txBody>
+          <a:bodyPr rtlCol="0" anchor="ctr" lIns="0" rIns="0" tIns="0" bIns="0"/>
+          <a:lstStyle/>
+          <a:p>
+            <a:pPr rtl="1" algn="ctr" marL="0" indent="0">
+              <a:lnSpc>
+                <a:spcPct val="108000"/>
+              </a:lnSpc>
+              <a:buNone/>
+            </a:pPr>
+            <a:r>
+              <a:rPr sz="1500" b="1" i="0" lang="he-IL">
+                <a:solidFill>
+                  <a:srgbClr val="F2F5FA"/>
+                </a:solidFill>
+                <a:latin typeface="Arial"/>
+                <a:cs typeface="Arial"/>
+              </a:rPr>
+              <a:t>4</a:t>
+            </a:r>
+          </a:p>
+        </p:txBody>
+      </p:sp>
+      <p:sp>
+        <p:nvSpPr>
+          <p:cNvPr id="14" name="TextBox 13"/>
+          <p:cNvSpPr txBox="1"/>
+          <p:nvPr/>
+        </p:nvSpPr>
+        <p:spPr>
+          <a:xfrm>
+            <a:off x="6309360" y="3941064"/>
+            <a:ext cx="4572000" cy="365760"/>
+          </a:xfrm>
+          <a:prstGeom prst="rect">
+            <a:avLst/>
+          </a:prstGeom>
+          <a:noFill/>
+        </p:spPr>
+        <p:txBody>
+          <a:bodyPr wrap="square" lIns="0" rIns="0" tIns="0" bIns="0" anchor="t" rtlCol="0">
+            <a:spAutoFit/>
+          </a:bodyPr>
+          <a:lstStyle/>
+          <a:p>
+            <a:pPr rtl="1" algn="r" marL="0" indent="0">
+              <a:lnSpc>
+                <a:spcPct val="108000"/>
+              </a:lnSpc>
+              <a:buNone/>
+            </a:pPr>
+            <a:r>
+              <a:rPr sz="1700" b="1" i="0" lang="he-IL">
+                <a:solidFill>
+                  <a:srgbClr val="EBEDF0"/>
+                </a:solidFill>
+                <a:latin typeface="Arial"/>
+                <a:cs typeface="Arial"/>
+              </a:rPr>
+              <a:t>Google Sheets: Add a row</a:t>
+            </a:r>
+          </a:p>
+        </p:txBody>
+      </p:sp>
+      <p:sp>
+        <p:nvSpPr>
+          <p:cNvPr id="15" name="TextBox 14"/>
+          <p:cNvSpPr txBox="1"/>
+          <p:nvPr/>
+        </p:nvSpPr>
+        <p:spPr>
+          <a:xfrm>
+            <a:off x="6309360" y="4334256"/>
+            <a:ext cx="4572000" cy="548640"/>
+          </a:xfrm>
+          <a:prstGeom prst="rect">
+            <a:avLst/>
+          </a:prstGeom>
+          <a:noFill/>
+        </p:spPr>
+        <p:txBody>
+          <a:bodyPr wrap="square" lIns="0" rIns="0" tIns="0" bIns="0" anchor="t" rtlCol="0">
+            <a:spAutoFit/>
+          </a:bodyPr>
+          <a:lstStyle/>
+          <a:p>
+            <a:pPr rtl="1" algn="r" marL="0" indent="0">
+              <a:lnSpc>
+                <a:spcPct val="108000"/>
+              </a:lnSpc>
+              <a:buNone/>
+            </a:pPr>
+            <a:r>
+              <a:rPr sz="1350" b="0" i="0" lang="he-IL">
+                <a:solidFill>
+                  <a:srgbClr val="A9B4C6"/>
+                </a:solidFill>
+                <a:latin typeface="Arial"/>
+                <a:cs typeface="Arial"/>
+              </a:rPr>
+              <a:t>כל ליד נשמר בגיליון</a:t>
+            </a:r>
+          </a:p>
+        </p:txBody>
+      </p:sp>
+      <p:sp>
+        <p:nvSpPr>
+          <p:cNvPr id="16" name="Rounded Rectangle 15"/>
+          <p:cNvSpPr/>
+          <p:nvPr/>
+        </p:nvSpPr>
+        <p:spPr>
+          <a:xfrm>
+            <a:off x="11027664" y="4608576"/>
+            <a:ext cx="457200" cy="457200"/>
+          </a:xfrm>
+          <a:prstGeom prst="roundRect">
+            <a:avLst>
+              <a:gd name="adj" fmla="val 20000"/>
+            </a:avLst>
+          </a:prstGeom>
+          <a:solidFill>
+            <a:srgbClr val="022349"/>
+          </a:solidFill>
+          <a:ln w="19050">
+            <a:solidFill>
+              <a:srgbClr val="487CFF"/>
+            </a:solidFill>
+          </a:ln>
+          <a:effectLst/>
+        </p:spPr>
+        <p:style>
+          <a:lnRef idx="1">
+            <a:schemeClr val="accent1"/>
+          </a:lnRef>
+          <a:fillRef idx="3">
+            <a:schemeClr val="accent1"/>
+          </a:fillRef>
+          <a:effectRef idx="2">
+            <a:schemeClr val="accent1"/>
+          </a:effectRef>
+          <a:fontRef idx="minor">
+            <a:schemeClr val="lt1"/>
+          </a:fontRef>
+        </p:style>
+        <p:txBody>
+          <a:bodyPr rtlCol="0" anchor="ctr" lIns="0" rIns="0" tIns="0" bIns="0"/>
+          <a:lstStyle/>
+          <a:p>
+            <a:pPr rtl="1" algn="ctr" marL="0" indent="0">
+              <a:lnSpc>
+                <a:spcPct val="108000"/>
+              </a:lnSpc>
+              <a:buNone/>
+            </a:pPr>
+            <a:r>
+              <a:rPr sz="1500" b="1" i="0" lang="he-IL">
+                <a:solidFill>
+                  <a:srgbClr val="F2F5FA"/>
+                </a:solidFill>
+                <a:latin typeface="Arial"/>
+                <a:cs typeface="Arial"/>
+              </a:rPr>
+              <a:t>5</a:t>
+            </a:r>
+          </a:p>
+        </p:txBody>
+      </p:sp>
+      <p:sp>
+        <p:nvSpPr>
+          <p:cNvPr id="17" name="TextBox 16"/>
+          <p:cNvSpPr txBox="1"/>
+          <p:nvPr/>
+        </p:nvSpPr>
+        <p:spPr>
+          <a:xfrm>
+            <a:off x="6309360" y="4636008"/>
+            <a:ext cx="4572000" cy="365760"/>
+          </a:xfrm>
+          <a:prstGeom prst="rect">
+            <a:avLst/>
+          </a:prstGeom>
+          <a:noFill/>
+        </p:spPr>
+        <p:txBody>
+          <a:bodyPr wrap="square" lIns="0" rIns="0" tIns="0" bIns="0" anchor="t" rtlCol="0">
+            <a:spAutoFit/>
+          </a:bodyPr>
+          <a:lstStyle/>
+          <a:p>
+            <a:pPr rtl="1" algn="r" marL="0" indent="0">
+              <a:lnSpc>
+                <a:spcPct val="108000"/>
+              </a:lnSpc>
+              <a:buNone/>
+            </a:pPr>
+            <a:r>
+              <a:rPr sz="1700" b="1" i="0" lang="he-IL">
+                <a:solidFill>
+                  <a:srgbClr val="EBEDF0"/>
+                </a:solidFill>
+                <a:latin typeface="Arial"/>
+                <a:cs typeface="Arial"/>
+              </a:rPr>
+              <a:t>Run once, ואז ON</a:t>
+            </a:r>
+          </a:p>
+        </p:txBody>
+      </p:sp>
+      <p:sp>
+        <p:nvSpPr>
+          <p:cNvPr id="18" name="TextBox 17"/>
+          <p:cNvSpPr txBox="1"/>
+          <p:nvPr/>
+        </p:nvSpPr>
+        <p:spPr>
+          <a:xfrm>
+            <a:off x="6309360" y="5029200"/>
+            <a:ext cx="4572000" cy="548640"/>
+          </a:xfrm>
+          <a:prstGeom prst="rect">
+            <a:avLst/>
+          </a:prstGeom>
+          <a:noFill/>
+        </p:spPr>
+        <p:txBody>
+          <a:bodyPr wrap="square" lIns="0" rIns="0" tIns="0" bIns="0" anchor="t" rtlCol="0">
+            <a:spAutoFit/>
+          </a:bodyPr>
+          <a:lstStyle/>
+          <a:p>
+            <a:pPr rtl="1" algn="r" marL="0" indent="0">
+              <a:lnSpc>
+                <a:spcPct val="108000"/>
+              </a:lnSpc>
+              <a:buNone/>
+            </a:pPr>
+            <a:r>
+              <a:rPr sz="1350" b="0" i="0" lang="he-IL">
+                <a:solidFill>
+                  <a:srgbClr val="A9B4C6"/>
+                </a:solidFill>
+                <a:latin typeface="Arial"/>
+                <a:cs typeface="Arial"/>
+              </a:rPr>
+              <a:t>ממלאים את הטופס ורואים את הקסם</a:t>
+            </a:r>
+          </a:p>
+        </p:txBody>
+      </p:sp>
+      <p:sp>
+        <p:nvSpPr>
+          <p:cNvPr id="19" name="Rounded Rectangle 18"/>
+          <p:cNvSpPr/>
+          <p:nvPr/>
+        </p:nvSpPr>
+        <p:spPr>
+          <a:xfrm>
+            <a:off x="658368" y="1874519"/>
+            <a:ext cx="5394960" cy="3520440"/>
+          </a:xfrm>
+          <a:prstGeom prst="roundRect">
+            <a:avLst>
+              <a:gd name="adj" fmla="val 3000"/>
+            </a:avLst>
+          </a:prstGeom>
+          <a:solidFill>
+            <a:srgbClr val="022349"/>
+          </a:solidFill>
+          <a:ln w="19050">
+            <a:solidFill>
+              <a:srgbClr val="487CFF"/>
+            </a:solidFill>
+          </a:ln>
+          <a:effectLst/>
+        </p:spPr>
+        <p:style>
+          <a:lnRef idx="1">
+            <a:schemeClr val="accent1"/>
+          </a:lnRef>
+          <a:fillRef idx="3">
+            <a:schemeClr val="accent1"/>
+          </a:fillRef>
+          <a:effectRef idx="2">
+            <a:schemeClr val="accent1"/>
+          </a:effectRef>
+          <a:fontRef idx="minor">
+            <a:schemeClr val="lt1"/>
+          </a:fontRef>
+        </p:style>
+        <p:txBody>
+          <a:bodyPr rtlCol="0" anchor="ctr"/>
+          <a:lstStyle/>
+          <a:p/>
+        </p:txBody>
+      </p:sp>
+      <p:sp>
+        <p:nvSpPr>
+          <p:cNvPr id="20" name="TextBox 19"/>
+          <p:cNvSpPr txBox="1"/>
+          <p:nvPr/>
+        </p:nvSpPr>
+        <p:spPr>
+          <a:xfrm>
+            <a:off x="886968" y="2057400"/>
+            <a:ext cx="4937760" cy="365760"/>
+          </a:xfrm>
+          <a:prstGeom prst="rect">
+            <a:avLst/>
+          </a:prstGeom>
+          <a:noFill/>
+        </p:spPr>
+        <p:txBody>
+          <a:bodyPr wrap="square" lIns="0" rIns="0" tIns="0" bIns="0" anchor="t" rtlCol="0">
+            <a:spAutoFit/>
+          </a:bodyPr>
+          <a:lstStyle/>
+          <a:p>
+            <a:pPr rtl="1" algn="r" marL="0" indent="0">
+              <a:lnSpc>
+                <a:spcPct val="108000"/>
+              </a:lnSpc>
+              <a:buNone/>
+            </a:pPr>
+            <a:r>
+              <a:rPr sz="1600" b="1" i="0" lang="he-IL">
+                <a:solidFill>
+                  <a:srgbClr val="F2F5FA"/>
+                </a:solidFill>
+                <a:latin typeface="Arial"/>
+                <a:cs typeface="Arial"/>
+              </a:rPr>
+              <a:t>🧭  אם נתקעים</a:t>
+            </a:r>
+          </a:p>
+        </p:txBody>
+      </p:sp>
+      <p:sp>
+        <p:nvSpPr>
+          <p:cNvPr id="21" name="TextBox 20"/>
+          <p:cNvSpPr txBox="1"/>
+          <p:nvPr/>
+        </p:nvSpPr>
+        <p:spPr>
+          <a:xfrm>
+            <a:off x="886968" y="2560320"/>
+            <a:ext cx="4937760" cy="2743200"/>
+          </a:xfrm>
+          <a:prstGeom prst="rect">
+            <a:avLst/>
+          </a:prstGeom>
+          <a:noFill/>
+        </p:spPr>
+        <p:txBody>
+          <a:bodyPr wrap="square" lIns="0" rIns="0" tIns="0" bIns="0" anchor="t" rtlCol="0">
+            <a:spAutoFit/>
+          </a:bodyPr>
+          <a:lstStyle/>
+          <a:p>
+            <a:pPr rtl="1" algn="r" marL="285750" indent="-285750">
+              <a:lnSpc>
+                <a:spcPct val="108000"/>
+              </a:lnSpc>
+              <a:spcAft>
+                <a:spcPts val="800"/>
+              </a:spcAft>
+              <a:buSzPct val="100000"/>
+              <a:buChar char="•"/>
+            </a:pPr>
+            <a:r>
+              <a:rPr sz="1450" b="0" i="0" lang="he-IL">
+                <a:solidFill>
+                  <a:srgbClr val="EBEDF0"/>
+                </a:solidFill>
+                <a:latin typeface="Arial"/>
+                <a:cs typeface="Arial"/>
+              </a:rPr>
+              <a:t>כל מודול צריך חיבור לחשבון: Add connection</a:t>
+            </a:r>
+          </a:p>
+          <a:p>
+            <a:pPr rtl="1" algn="r" marL="285750" indent="-285750">
+              <a:lnSpc>
+                <a:spcPct val="108000"/>
+              </a:lnSpc>
+              <a:spcAft>
+                <a:spcPts val="800"/>
+              </a:spcAft>
+              <a:buSzPct val="100000"/>
+              <a:buChar char="•"/>
+            </a:pPr>
+            <a:r>
+              <a:rPr sz="1450" b="0" i="0" lang="he-IL">
+                <a:solidFill>
+                  <a:srgbClr val="EBEDF0"/>
+                </a:solidFill>
+                <a:latin typeface="Arial"/>
+                <a:cs typeface="Arial"/>
+              </a:rPr>
+              <a:t>לא רואים תגובה? ממלאים את הטופס שוב</a:t>
+            </a:r>
+          </a:p>
+          <a:p>
+            <a:pPr rtl="1" algn="r" marL="285750" indent="-285750">
+              <a:lnSpc>
+                <a:spcPct val="108000"/>
+              </a:lnSpc>
+              <a:spcAft>
+                <a:spcPts val="800"/>
+              </a:spcAft>
+              <a:buSzPct val="100000"/>
+              <a:buChar char="•"/>
+            </a:pPr>
+            <a:r>
+              <a:rPr sz="1450" b="0" i="0" lang="he-IL">
+                <a:solidFill>
+                  <a:srgbClr val="EBEDF0"/>
+                </a:solidFill>
+                <a:latin typeface="Arial"/>
+                <a:cs typeface="Arial"/>
+              </a:rPr>
+              <a:t>שגיאה אדומה? מצלמים מסך ושואלים את ג'מיני</a:t>
+            </a:r>
+          </a:p>
+          <a:p>
+            <a:pPr rtl="1" algn="r" marL="285750" indent="-285750">
+              <a:lnSpc>
+                <a:spcPct val="108000"/>
+              </a:lnSpc>
+              <a:buSzPct val="100000"/>
+              <a:buChar char="•"/>
+            </a:pPr>
+            <a:r>
+              <a:rPr sz="1450" b="0" i="0" lang="he-IL">
+                <a:solidFill>
+                  <a:srgbClr val="EBEDF0"/>
+                </a:solidFill>
+                <a:latin typeface="Arial"/>
+                <a:cs typeface="Arial"/>
+              </a:rPr>
+              <a:t>בחינם: 2 תרחישים פעילים, 1,000 קרדיטים בחודש</a:t>
+            </a:r>
+          </a:p>
+        </p:txBody>
+      </p:sp>
+      <p:sp>
+        <p:nvSpPr>
+          <p:cNvPr id="22" name="Rounded Rectangle 21"/>
+          <p:cNvSpPr/>
+          <p:nvPr/>
+        </p:nvSpPr>
+        <p:spPr>
+          <a:xfrm>
+            <a:off x="658368" y="5577840"/>
+            <a:ext cx="10872216" cy="594360"/>
+          </a:xfrm>
+          <a:prstGeom prst="roundRect">
+            <a:avLst>
+              <a:gd name="adj" fmla="val 3000"/>
+            </a:avLst>
+          </a:prstGeom>
+          <a:solidFill>
+            <a:srgbClr val="4B3F02"/>
+          </a:solidFill>
+          <a:ln>
+            <a:noFill/>
+          </a:ln>
+          <a:effectLst/>
+        </p:spPr>
+        <p:style>
+          <a:lnRef idx="1">
+            <a:schemeClr val="accent1"/>
+          </a:lnRef>
+          <a:fillRef idx="3">
+            <a:schemeClr val="accent1"/>
+          </a:fillRef>
+          <a:effectRef idx="2">
+            <a:schemeClr val="accent1"/>
+          </a:effectRef>
+          <a:fontRef idx="minor">
+            <a:schemeClr val="lt1"/>
+          </a:fontRef>
+        </p:style>
+        <p:txBody>
+          <a:bodyPr rtlCol="0" anchor="ctr"/>
+          <a:lstStyle/>
+          <a:p/>
+        </p:txBody>
+      </p:sp>
+      <p:sp>
+        <p:nvSpPr>
+          <p:cNvPr id="23" name="TextBox 22"/>
+          <p:cNvSpPr txBox="1"/>
+          <p:nvPr/>
+        </p:nvSpPr>
+        <p:spPr>
+          <a:xfrm>
+            <a:off x="886968" y="5577840"/>
+            <a:ext cx="10415016" cy="594360"/>
+          </a:xfrm>
+          <a:prstGeom prst="rect">
+            <a:avLst/>
+          </a:prstGeom>
+          <a:noFill/>
+        </p:spPr>
+        <p:txBody>
+          <a:bodyPr wrap="square" lIns="0" rIns="0" tIns="0" bIns="0" anchor="ctr" rtlCol="0">
+            <a:spAutoFit/>
+          </a:bodyPr>
+          <a:lstStyle/>
+          <a:p>
+            <a:pPr rtl="1" algn="r" marL="0" indent="0">
+              <a:lnSpc>
+                <a:spcPct val="108000"/>
+              </a:lnSpc>
+              <a:buNone/>
+            </a:pPr>
+            <a:r>
+              <a:rPr sz="1450" b="0" i="0" lang="he-IL">
+                <a:solidFill>
+                  <a:srgbClr val="EBEDF0"/>
+                </a:solidFill>
+                <a:latin typeface="Arial"/>
+                <a:cs typeface="Arial"/>
+              </a:rPr>
+              <a:t>🎁  בונוס למתקדמים: מוסיפים באמצע מודול AI שמנסח תשובה אישית לכל פנייה.</a:t>
+            </a:r>
+          </a:p>
+        </p:txBody>
+      </p:sp>
+      <p:sp>
+        <p:nvSpPr>
+          <p:cNvPr id="24" name="TextBox 23"/>
+          <p:cNvSpPr txBox="1"/>
+          <p:nvPr/>
+        </p:nvSpPr>
+        <p:spPr>
+          <a:xfrm>
+            <a:off x="6675120" y="6473952"/>
+            <a:ext cx="4846320" cy="292608"/>
+          </a:xfrm>
+          <a:prstGeom prst="rect">
+            <a:avLst/>
+          </a:prstGeom>
+          <a:noFill/>
+        </p:spPr>
+        <p:txBody>
+          <a:bodyPr wrap="none" lIns="0" rIns="0" tIns="0" bIns="0">
+            <a:spAutoFit/>
+          </a:bodyPr>
+          <a:lstStyle/>
+          <a:p>
+            <a:pPr algn="r" rtl="1"/>
+            <a:r>
+              <a:rPr sz="1000">
+                <a:solidFill>
+                  <a:srgbClr val="8A96AA"/>
+                </a:solidFill>
+                <a:latin typeface="Arial"/>
+                <a:cs typeface="Arial"/>
+              </a:rPr>
+              <a:t>© נערך על ידי AI Finance</a:t>
+            </a:r>
+          </a:p>
+        </p:txBody>
+      </p:sp>
+    </p:spTree>
+  </p:cSld>
+  <p:clrMapOvr>
+    <a:masterClrMapping/>
+  </p:clrMapOvr>
+</p:sld>
+</file>
+
+<file path=ppt/slides/slide2019.xml><?xml version="1.0" encoding="utf-8"?>
+<p:sld xmlns:a="http://schemas.openxmlformats.org/drawingml/2006/main" xmlns:p="http://schemas.openxmlformats.org/presentationml/2006/main" xmlns:r="http://schemas.openxmlformats.org/officeDocument/2006/relationships">
+  <p:cSld>
+    <p:spTree>
+      <p:nvGrpSpPr>
+        <p:cNvPr id="1" name=""/>
+        <p:cNvGrpSpPr/>
+        <p:nvPr/>
+      </p:nvGrpSpPr>
+      <p:grpSpPr/>
+      <p:sp>
+        <p:nvSpPr>
+          <p:cNvPr id="2" name="Title"/>
+          <p:cNvSpPr txBox="1"/>
+          <p:nvPr/>
+        </p:nvSpPr>
+        <p:spPr>
+          <a:xfrm>
+            <a:off x="658368" y="502920"/>
+            <a:ext cx="10872216" cy="640080"/>
+          </a:xfrm>
+          <a:prstGeom prst="rect">
+            <a:avLst/>
+          </a:prstGeom>
+          <a:noFill/>
+        </p:spPr>
+        <p:txBody>
+          <a:bodyPr wrap="square" lIns="0" rIns="0" tIns="0" bIns="0" anchor="t" rtlCol="0">
+            <a:spAutoFit/>
+          </a:bodyPr>
+          <a:lstStyle/>
+          <a:p>
+            <a:pPr rtl="1" algn="r" marL="0" indent="0">
+              <a:lnSpc>
+                <a:spcPct val="108000"/>
+              </a:lnSpc>
+              <a:buNone/>
+            </a:pPr>
+            <a:r>
+              <a:rPr sz="3700" b="1" i="0" lang="he-IL">
+                <a:solidFill>
+                  <a:srgbClr val="F2F5FA"/>
+                </a:solidFill>
+                <a:latin typeface="Arial"/>
+                <a:cs typeface="Arial"/>
+              </a:rPr>
               <a:t>🛡️ ארבעה כללים לאוטומציה בטוחה</a:t>
             </a:r>
           </a:p>
@@ -20885,7 +22154,7 @@
 </p:sld>
 </file>
 
-<file path=ppt/slides/slide2019.xml><?xml version="1.0" encoding="utf-8"?>
+<file path=ppt/slides/slide2020.xml><?xml version="1.0" encoding="utf-8"?>
 <p:sld xmlns:a="http://schemas.openxmlformats.org/drawingml/2006/main" xmlns:p="http://schemas.openxmlformats.org/presentationml/2006/main" xmlns:r="http://schemas.openxmlformats.org/officeDocument/2006/relationships">
   <p:cSld>
     <p:spTree>
@@ -21768,1379 +23037,6 @@
 </p:sld>
 </file>
 
-<file path=ppt/slides/slide2020.xml><?xml version="1.0" encoding="utf-8"?>
-<p:sld xmlns:a="http://schemas.openxmlformats.org/drawingml/2006/main" xmlns:p="http://schemas.openxmlformats.org/presentationml/2006/main" xmlns:r="http://schemas.openxmlformats.org/officeDocument/2006/relationships">
-  <p:cSld>
-    <p:spTree>
-      <p:nvGrpSpPr>
-        <p:cNvPr id="1" name=""/>
-        <p:cNvGrpSpPr/>
-        <p:nvPr/>
-      </p:nvGrpSpPr>
-      <p:grpSpPr/>
-      <p:sp>
-        <p:nvSpPr>
-          <p:cNvPr id="2" name="Title"/>
-          <p:cNvSpPr txBox="1"/>
-          <p:nvPr/>
-        </p:nvSpPr>
-        <p:spPr>
-          <a:xfrm>
-            <a:off x="658368" y="502920"/>
-            <a:ext cx="10872216" cy="640080"/>
-          </a:xfrm>
-          <a:prstGeom prst="rect">
-            <a:avLst/>
-          </a:prstGeom>
-          <a:noFill/>
-        </p:spPr>
-        <p:txBody>
-          <a:bodyPr wrap="square" lIns="0" rIns="0" tIns="0" bIns="0" anchor="t" rtlCol="0">
-            <a:spAutoFit/>
-          </a:bodyPr>
-          <a:lstStyle/>
-          <a:p>
-            <a:pPr rtl="1" algn="r" marL="0" indent="0">
-              <a:lnSpc>
-                <a:spcPct val="108000"/>
-              </a:lnSpc>
-              <a:buNone/>
-            </a:pPr>
-            <a:r>
-              <a:rPr sz="3700" b="1" i="0" lang="he-IL">
-                <a:solidFill>
-                  <a:srgbClr val="F2F5FA"/>
-                </a:solidFill>
-                <a:latin typeface="Arial"/>
-                <a:cs typeface="Arial"/>
-              </a:rPr>
-              <a:t>🧰 ארגז הכלים של היום</a:t>
-            </a:r>
-          </a:p>
-        </p:txBody>
-      </p:sp>
-      <p:sp>
-        <p:nvSpPr>
-          <p:cNvPr id="3" name="TextBox 2"/>
-          <p:cNvSpPr txBox="1"/>
-          <p:nvPr/>
-        </p:nvSpPr>
-        <p:spPr>
-          <a:xfrm>
-            <a:off x="658368" y="1280160"/>
-            <a:ext cx="10872216" cy="365760"/>
-          </a:xfrm>
-          <a:prstGeom prst="rect">
-            <a:avLst/>
-          </a:prstGeom>
-          <a:noFill/>
-        </p:spPr>
-        <p:txBody>
-          <a:bodyPr wrap="square" lIns="0" rIns="0" tIns="0" bIns="0" anchor="t" rtlCol="0">
-            <a:spAutoFit/>
-          </a:bodyPr>
-          <a:lstStyle/>
-          <a:p>
-            <a:pPr rtl="1" algn="r" marL="0" indent="0">
-              <a:lnSpc>
-                <a:spcPct val="108000"/>
-              </a:lnSpc>
-              <a:buNone/>
-            </a:pPr>
-            <a:r>
-              <a:rPr sz="1450" b="0" i="0" lang="he-IL">
-                <a:solidFill>
-                  <a:srgbClr val="FAC496"/>
-                </a:solidFill>
-                <a:latin typeface="Arial"/>
-                <a:cs typeface="Arial"/>
-              </a:rPr>
-              <a:t>הקישורים להעתקה. חלקם נותנים לכם קרדיטים או ניסיון חינם</a:t>
-            </a:r>
-          </a:p>
-        </p:txBody>
-      </p:sp>
-      <p:sp>
-        <p:nvSpPr>
-          <p:cNvPr id="4" name="Rounded Rectangle 3"/>
-          <p:cNvSpPr/>
-          <p:nvPr/>
-        </p:nvSpPr>
-        <p:spPr>
-          <a:xfrm>
-            <a:off x="6208776" y="1874519"/>
-            <a:ext cx="5321808" cy="566928"/>
-          </a:xfrm>
-          <a:prstGeom prst="roundRect">
-            <a:avLst>
-              <a:gd name="adj" fmla="val 25000"/>
-            </a:avLst>
-          </a:prstGeom>
-          <a:solidFill>
-            <a:srgbClr val="022349"/>
-          </a:solidFill>
-          <a:ln w="19050">
-            <a:solidFill>
-              <a:srgbClr val="487CFF"/>
-            </a:solidFill>
-          </a:ln>
-          <a:effectLst/>
-        </p:spPr>
-        <p:style>
-          <a:lnRef idx="1">
-            <a:schemeClr val="accent1"/>
-          </a:lnRef>
-          <a:fillRef idx="3">
-            <a:schemeClr val="accent1"/>
-          </a:fillRef>
-          <a:effectRef idx="2">
-            <a:schemeClr val="accent1"/>
-          </a:effectRef>
-          <a:fontRef idx="minor">
-            <a:schemeClr val="lt1"/>
-          </a:fontRef>
-        </p:style>
-        <p:txBody>
-          <a:bodyPr rtlCol="0" anchor="ctr"/>
-          <a:lstStyle/>
-          <a:p/>
-        </p:txBody>
-      </p:sp>
-      <p:sp>
-        <p:nvSpPr>
-          <p:cNvPr id="5" name="TextBox 4"/>
-          <p:cNvSpPr txBox="1"/>
-          <p:nvPr/>
-        </p:nvSpPr>
-        <p:spPr>
-          <a:xfrm>
-            <a:off x="9610344" y="1874519"/>
-            <a:ext cx="1783080" cy="566928"/>
-          </a:xfrm>
-          <a:prstGeom prst="rect">
-            <a:avLst/>
-          </a:prstGeom>
-          <a:noFill/>
-        </p:spPr>
-        <p:txBody>
-          <a:bodyPr wrap="square" lIns="0" rIns="0" tIns="0" bIns="0" anchor="ctr" rtlCol="0">
-            <a:spAutoFit/>
-          </a:bodyPr>
-          <a:lstStyle/>
-          <a:p>
-            <a:pPr rtl="1" algn="r" marL="0" indent="0">
-              <a:lnSpc>
-                <a:spcPct val="108000"/>
-              </a:lnSpc>
-              <a:buNone/>
-            </a:pPr>
-            <a:r>
-              <a:rPr sz="1400" b="1" i="0" lang="he-IL">
-                <a:solidFill>
-                  <a:srgbClr val="F2F5FA"/>
-                </a:solidFill>
-                <a:latin typeface="Arial"/>
-                <a:cs typeface="Arial"/>
-              </a:rPr>
-              <a:t>Claude</a:t>
-            </a:r>
-          </a:p>
-        </p:txBody>
-      </p:sp>
-      <p:sp>
-        <p:nvSpPr>
-          <p:cNvPr id="6" name="TextBox 5"/>
-          <p:cNvSpPr txBox="1"/>
-          <p:nvPr/>
-        </p:nvSpPr>
-        <p:spPr>
-          <a:xfrm>
-            <a:off x="6318504" y="1874519"/>
-            <a:ext cx="3264408" cy="566928"/>
-          </a:xfrm>
-          <a:prstGeom prst="rect">
-            <a:avLst/>
-          </a:prstGeom>
-          <a:noFill/>
-        </p:spPr>
-        <p:txBody>
-          <a:bodyPr wrap="square" lIns="0" rIns="0" tIns="0" bIns="0" anchor="ctr" rtlCol="0">
-            <a:spAutoFit/>
-          </a:bodyPr>
-          <a:lstStyle/>
-          <a:p>
-            <a:pPr rtl="1" algn="l" marL="0" indent="0">
-              <a:lnSpc>
-                <a:spcPct val="108000"/>
-              </a:lnSpc>
-              <a:buNone/>
-            </a:pPr>
-            <a:r>
-              <a:rPr sz="1300" b="0" i="0" lang="he-IL">
-                <a:solidFill>
-                  <a:srgbClr val="6296FF"/>
-                </a:solidFill>
-                <a:latin typeface="Arial"/>
-                <a:cs typeface="Arial"/>
-              </a:rPr>
-              <a:t>claude.ai</a:t>
-            </a:r>
-          </a:p>
-        </p:txBody>
-      </p:sp>
-      <p:sp>
-        <p:nvSpPr>
-          <p:cNvPr id="7" name="Rounded Rectangle 6"/>
-          <p:cNvSpPr/>
-          <p:nvPr/>
-        </p:nvSpPr>
-        <p:spPr>
-          <a:xfrm>
-            <a:off x="6208776" y="2569463"/>
-            <a:ext cx="5321808" cy="566928"/>
-          </a:xfrm>
-          <a:prstGeom prst="roundRect">
-            <a:avLst>
-              <a:gd name="adj" fmla="val 25000"/>
-            </a:avLst>
-          </a:prstGeom>
-          <a:solidFill>
-            <a:srgbClr val="022349"/>
-          </a:solidFill>
-          <a:ln w="19050">
-            <a:solidFill>
-              <a:srgbClr val="487CFF"/>
-            </a:solidFill>
-          </a:ln>
-          <a:effectLst/>
-        </p:spPr>
-        <p:style>
-          <a:lnRef idx="1">
-            <a:schemeClr val="accent1"/>
-          </a:lnRef>
-          <a:fillRef idx="3">
-            <a:schemeClr val="accent1"/>
-          </a:fillRef>
-          <a:effectRef idx="2">
-            <a:schemeClr val="accent1"/>
-          </a:effectRef>
-          <a:fontRef idx="minor">
-            <a:schemeClr val="lt1"/>
-          </a:fontRef>
-        </p:style>
-        <p:txBody>
-          <a:bodyPr rtlCol="0" anchor="ctr"/>
-          <a:lstStyle/>
-          <a:p/>
-        </p:txBody>
-      </p:sp>
-      <p:sp>
-        <p:nvSpPr>
-          <p:cNvPr id="8" name="TextBox 7"/>
-          <p:cNvSpPr txBox="1"/>
-          <p:nvPr/>
-        </p:nvSpPr>
-        <p:spPr>
-          <a:xfrm>
-            <a:off x="9610344" y="2569463"/>
-            <a:ext cx="1783080" cy="566928"/>
-          </a:xfrm>
-          <a:prstGeom prst="rect">
-            <a:avLst/>
-          </a:prstGeom>
-          <a:noFill/>
-        </p:spPr>
-        <p:txBody>
-          <a:bodyPr wrap="square" lIns="0" rIns="0" tIns="0" bIns="0" anchor="ctr" rtlCol="0">
-            <a:spAutoFit/>
-          </a:bodyPr>
-          <a:lstStyle/>
-          <a:p>
-            <a:pPr rtl="1" algn="r" marL="0" indent="0">
-              <a:lnSpc>
-                <a:spcPct val="108000"/>
-              </a:lnSpc>
-              <a:buNone/>
-            </a:pPr>
-            <a:r>
-              <a:rPr sz="1400" b="1" i="0" lang="he-IL">
-                <a:solidFill>
-                  <a:srgbClr val="F2F5FA"/>
-                </a:solidFill>
-                <a:latin typeface="Arial"/>
-                <a:cs typeface="Arial"/>
-              </a:rPr>
-              <a:t>ChatGPT</a:t>
-            </a:r>
-          </a:p>
-        </p:txBody>
-      </p:sp>
-      <p:sp>
-        <p:nvSpPr>
-          <p:cNvPr id="9" name="TextBox 8"/>
-          <p:cNvSpPr txBox="1"/>
-          <p:nvPr/>
-        </p:nvSpPr>
-        <p:spPr>
-          <a:xfrm>
-            <a:off x="6318504" y="2569463"/>
-            <a:ext cx="3264408" cy="566928"/>
-          </a:xfrm>
-          <a:prstGeom prst="rect">
-            <a:avLst/>
-          </a:prstGeom>
-          <a:noFill/>
-        </p:spPr>
-        <p:txBody>
-          <a:bodyPr wrap="square" lIns="0" rIns="0" tIns="0" bIns="0" anchor="ctr" rtlCol="0">
-            <a:spAutoFit/>
-          </a:bodyPr>
-          <a:lstStyle/>
-          <a:p>
-            <a:pPr rtl="1" algn="l" marL="0" indent="0">
-              <a:lnSpc>
-                <a:spcPct val="108000"/>
-              </a:lnSpc>
-              <a:buNone/>
-            </a:pPr>
-            <a:r>
-              <a:rPr sz="1300" b="0" i="0" lang="he-IL">
-                <a:solidFill>
-                  <a:srgbClr val="6296FF"/>
-                </a:solidFill>
-                <a:latin typeface="Arial"/>
-                <a:cs typeface="Arial"/>
-              </a:rPr>
-              <a:t>chatgpt.com</a:t>
-            </a:r>
-          </a:p>
-        </p:txBody>
-      </p:sp>
-      <p:sp>
-        <p:nvSpPr>
-          <p:cNvPr id="10" name="Rounded Rectangle 9"/>
-          <p:cNvSpPr/>
-          <p:nvPr/>
-        </p:nvSpPr>
-        <p:spPr>
-          <a:xfrm>
-            <a:off x="6208776" y="3264408"/>
-            <a:ext cx="5321808" cy="566928"/>
-          </a:xfrm>
-          <a:prstGeom prst="roundRect">
-            <a:avLst>
-              <a:gd name="adj" fmla="val 25000"/>
-            </a:avLst>
-          </a:prstGeom>
-          <a:solidFill>
-            <a:srgbClr val="022349"/>
-          </a:solidFill>
-          <a:ln w="19050">
-            <a:solidFill>
-              <a:srgbClr val="487CFF"/>
-            </a:solidFill>
-          </a:ln>
-          <a:effectLst/>
-        </p:spPr>
-        <p:style>
-          <a:lnRef idx="1">
-            <a:schemeClr val="accent1"/>
-          </a:lnRef>
-          <a:fillRef idx="3">
-            <a:schemeClr val="accent1"/>
-          </a:fillRef>
-          <a:effectRef idx="2">
-            <a:schemeClr val="accent1"/>
-          </a:effectRef>
-          <a:fontRef idx="minor">
-            <a:schemeClr val="lt1"/>
-          </a:fontRef>
-        </p:style>
-        <p:txBody>
-          <a:bodyPr rtlCol="0" anchor="ctr"/>
-          <a:lstStyle/>
-          <a:p/>
-        </p:txBody>
-      </p:sp>
-      <p:sp>
-        <p:nvSpPr>
-          <p:cNvPr id="11" name="TextBox 10"/>
-          <p:cNvSpPr txBox="1"/>
-          <p:nvPr/>
-        </p:nvSpPr>
-        <p:spPr>
-          <a:xfrm>
-            <a:off x="9610344" y="3264408"/>
-            <a:ext cx="1783080" cy="566928"/>
-          </a:xfrm>
-          <a:prstGeom prst="rect">
-            <a:avLst/>
-          </a:prstGeom>
-          <a:noFill/>
-        </p:spPr>
-        <p:txBody>
-          <a:bodyPr wrap="square" lIns="0" rIns="0" tIns="0" bIns="0" anchor="ctr" rtlCol="0">
-            <a:spAutoFit/>
-          </a:bodyPr>
-          <a:lstStyle/>
-          <a:p>
-            <a:pPr rtl="1" algn="r" marL="0" indent="0">
-              <a:lnSpc>
-                <a:spcPct val="108000"/>
-              </a:lnSpc>
-              <a:buNone/>
-            </a:pPr>
-            <a:r>
-              <a:rPr sz="1400" b="1" i="0" lang="he-IL">
-                <a:solidFill>
-                  <a:srgbClr val="F2F5FA"/>
-                </a:solidFill>
-                <a:latin typeface="Arial"/>
-                <a:cs typeface="Arial"/>
-              </a:rPr>
-              <a:t>Make</a:t>
-            </a:r>
-          </a:p>
-        </p:txBody>
-      </p:sp>
-      <p:sp>
-        <p:nvSpPr>
-          <p:cNvPr id="12" name="TextBox 11"/>
-          <p:cNvSpPr txBox="1"/>
-          <p:nvPr/>
-        </p:nvSpPr>
-        <p:spPr>
-          <a:xfrm>
-            <a:off x="6318504" y="3264408"/>
-            <a:ext cx="3264408" cy="566928"/>
-          </a:xfrm>
-          <a:prstGeom prst="rect">
-            <a:avLst/>
-          </a:prstGeom>
-          <a:noFill/>
-        </p:spPr>
-        <p:txBody>
-          <a:bodyPr wrap="square" lIns="0" rIns="0" tIns="0" bIns="0" anchor="ctr" rtlCol="0">
-            <a:spAutoFit/>
-          </a:bodyPr>
-          <a:lstStyle/>
-          <a:p>
-            <a:pPr rtl="1" algn="l" marL="0" indent="0">
-              <a:lnSpc>
-                <a:spcPct val="108000"/>
-              </a:lnSpc>
-              <a:buNone/>
-            </a:pPr>
-            <a:r>
-              <a:rPr sz="1300" b="0" i="0" lang="he-IL">
-                <a:solidFill>
-                  <a:srgbClr val="6296FF"/>
-                </a:solidFill>
-                <a:latin typeface="Arial"/>
-                <a:cs typeface="Arial"/>
-              </a:rPr>
-              <a:t>make.com</a:t>
-            </a:r>
-          </a:p>
-        </p:txBody>
-      </p:sp>
-      <p:sp>
-        <p:nvSpPr>
-          <p:cNvPr id="13" name="Rounded Rectangle 12"/>
-          <p:cNvSpPr/>
-          <p:nvPr/>
-        </p:nvSpPr>
-        <p:spPr>
-          <a:xfrm>
-            <a:off x="6208776" y="3959352"/>
-            <a:ext cx="5321808" cy="566928"/>
-          </a:xfrm>
-          <a:prstGeom prst="roundRect">
-            <a:avLst>
-              <a:gd name="adj" fmla="val 25000"/>
-            </a:avLst>
-          </a:prstGeom>
-          <a:solidFill>
-            <a:srgbClr val="022349"/>
-          </a:solidFill>
-          <a:ln w="19050">
-            <a:solidFill>
-              <a:srgbClr val="487CFF"/>
-            </a:solidFill>
-          </a:ln>
-          <a:effectLst/>
-        </p:spPr>
-        <p:style>
-          <a:lnRef idx="1">
-            <a:schemeClr val="accent1"/>
-          </a:lnRef>
-          <a:fillRef idx="3">
-            <a:schemeClr val="accent1"/>
-          </a:fillRef>
-          <a:effectRef idx="2">
-            <a:schemeClr val="accent1"/>
-          </a:effectRef>
-          <a:fontRef idx="minor">
-            <a:schemeClr val="lt1"/>
-          </a:fontRef>
-        </p:style>
-        <p:txBody>
-          <a:bodyPr rtlCol="0" anchor="ctr"/>
-          <a:lstStyle/>
-          <a:p/>
-        </p:txBody>
-      </p:sp>
-      <p:sp>
-        <p:nvSpPr>
-          <p:cNvPr id="14" name="TextBox 13"/>
-          <p:cNvSpPr txBox="1"/>
-          <p:nvPr/>
-        </p:nvSpPr>
-        <p:spPr>
-          <a:xfrm>
-            <a:off x="9610344" y="3959352"/>
-            <a:ext cx="1783080" cy="566928"/>
-          </a:xfrm>
-          <a:prstGeom prst="rect">
-            <a:avLst/>
-          </a:prstGeom>
-          <a:noFill/>
-        </p:spPr>
-        <p:txBody>
-          <a:bodyPr wrap="square" lIns="0" rIns="0" tIns="0" bIns="0" anchor="ctr" rtlCol="0">
-            <a:spAutoFit/>
-          </a:bodyPr>
-          <a:lstStyle/>
-          <a:p>
-            <a:pPr rtl="1" algn="r" marL="0" indent="0">
-              <a:lnSpc>
-                <a:spcPct val="108000"/>
-              </a:lnSpc>
-              <a:buNone/>
-            </a:pPr>
-            <a:r>
-              <a:rPr sz="1400" b="1" i="0" lang="he-IL">
-                <a:solidFill>
-                  <a:srgbClr val="F2F5FA"/>
-                </a:solidFill>
-                <a:latin typeface="Arial"/>
-                <a:cs typeface="Arial"/>
-              </a:rPr>
-              <a:t>Lovable</a:t>
-            </a:r>
-          </a:p>
-        </p:txBody>
-      </p:sp>
-      <p:sp>
-        <p:nvSpPr>
-          <p:cNvPr id="15" name="TextBox 14"/>
-          <p:cNvSpPr txBox="1"/>
-          <p:nvPr/>
-        </p:nvSpPr>
-        <p:spPr>
-          <a:xfrm>
-            <a:off x="6318504" y="3959352"/>
-            <a:ext cx="3264408" cy="566928"/>
-          </a:xfrm>
-          <a:prstGeom prst="rect">
-            <a:avLst/>
-          </a:prstGeom>
-          <a:noFill/>
-        </p:spPr>
-        <p:txBody>
-          <a:bodyPr wrap="square" lIns="0" rIns="0" tIns="0" bIns="0" anchor="ctr" rtlCol="0">
-            <a:spAutoFit/>
-          </a:bodyPr>
-          <a:lstStyle/>
-          <a:p>
-            <a:pPr rtl="1" algn="l" marL="0" indent="0">
-              <a:lnSpc>
-                <a:spcPct val="108000"/>
-              </a:lnSpc>
-              <a:buNone/>
-            </a:pPr>
-            <a:r>
-              <a:rPr sz="1300" b="0" i="0" lang="he-IL">
-                <a:solidFill>
-                  <a:srgbClr val="6296FF"/>
-                </a:solidFill>
-                <a:latin typeface="Arial"/>
-                <a:cs typeface="Arial"/>
-              </a:rPr>
-              <a:t>lovable.dev</a:t>
-            </a:r>
-          </a:p>
-        </p:txBody>
-      </p:sp>
-      <p:sp>
-        <p:nvSpPr>
-          <p:cNvPr id="16" name="Rounded Rectangle 15"/>
-          <p:cNvSpPr/>
-          <p:nvPr/>
-        </p:nvSpPr>
-        <p:spPr>
-          <a:xfrm>
-            <a:off x="6208776" y="4654296"/>
-            <a:ext cx="5321808" cy="566928"/>
-          </a:xfrm>
-          <a:prstGeom prst="roundRect">
-            <a:avLst>
-              <a:gd name="adj" fmla="val 25000"/>
-            </a:avLst>
-          </a:prstGeom>
-          <a:solidFill>
-            <a:srgbClr val="022349"/>
-          </a:solidFill>
-          <a:ln w="19050">
-            <a:solidFill>
-              <a:srgbClr val="487CFF"/>
-            </a:solidFill>
-          </a:ln>
-          <a:effectLst/>
-        </p:spPr>
-        <p:style>
-          <a:lnRef idx="1">
-            <a:schemeClr val="accent1"/>
-          </a:lnRef>
-          <a:fillRef idx="3">
-            <a:schemeClr val="accent1"/>
-          </a:fillRef>
-          <a:effectRef idx="2">
-            <a:schemeClr val="accent1"/>
-          </a:effectRef>
-          <a:fontRef idx="minor">
-            <a:schemeClr val="lt1"/>
-          </a:fontRef>
-        </p:style>
-        <p:txBody>
-          <a:bodyPr rtlCol="0" anchor="ctr"/>
-          <a:lstStyle/>
-          <a:p/>
-        </p:txBody>
-      </p:sp>
-      <p:sp>
-        <p:nvSpPr>
-          <p:cNvPr id="17" name="TextBox 16"/>
-          <p:cNvSpPr txBox="1"/>
-          <p:nvPr/>
-        </p:nvSpPr>
-        <p:spPr>
-          <a:xfrm>
-            <a:off x="9610344" y="4654296"/>
-            <a:ext cx="1783080" cy="566928"/>
-          </a:xfrm>
-          <a:prstGeom prst="rect">
-            <a:avLst/>
-          </a:prstGeom>
-          <a:noFill/>
-        </p:spPr>
-        <p:txBody>
-          <a:bodyPr wrap="square" lIns="0" rIns="0" tIns="0" bIns="0" anchor="ctr" rtlCol="0">
-            <a:spAutoFit/>
-          </a:bodyPr>
-          <a:lstStyle/>
-          <a:p>
-            <a:pPr rtl="1" algn="r" marL="0" indent="0">
-              <a:lnSpc>
-                <a:spcPct val="108000"/>
-              </a:lnSpc>
-              <a:buNone/>
-            </a:pPr>
-            <a:r>
-              <a:rPr sz="1400" b="1" i="0" lang="he-IL">
-                <a:solidFill>
-                  <a:srgbClr val="F2F5FA"/>
-                </a:solidFill>
-                <a:latin typeface="Arial"/>
-                <a:cs typeface="Arial"/>
-              </a:rPr>
-              <a:t>Base44</a:t>
-            </a:r>
-          </a:p>
-        </p:txBody>
-      </p:sp>
-      <p:sp>
-        <p:nvSpPr>
-          <p:cNvPr id="18" name="TextBox 17"/>
-          <p:cNvSpPr txBox="1"/>
-          <p:nvPr/>
-        </p:nvSpPr>
-        <p:spPr>
-          <a:xfrm>
-            <a:off x="6318504" y="4654296"/>
-            <a:ext cx="3264408" cy="566928"/>
-          </a:xfrm>
-          <a:prstGeom prst="rect">
-            <a:avLst/>
-          </a:prstGeom>
-          <a:noFill/>
-        </p:spPr>
-        <p:txBody>
-          <a:bodyPr wrap="square" lIns="0" rIns="0" tIns="0" bIns="0" anchor="ctr" rtlCol="0">
-            <a:spAutoFit/>
-          </a:bodyPr>
-          <a:lstStyle/>
-          <a:p>
-            <a:pPr rtl="1" algn="l" marL="0" indent="0">
-              <a:lnSpc>
-                <a:spcPct val="108000"/>
-              </a:lnSpc>
-              <a:buNone/>
-            </a:pPr>
-            <a:r>
-              <a:rPr sz="1300" b="0" i="0" lang="he-IL">
-                <a:solidFill>
-                  <a:srgbClr val="6296FF"/>
-                </a:solidFill>
-                <a:latin typeface="Arial"/>
-                <a:cs typeface="Arial"/>
-              </a:rPr>
-              <a:t>base44.com</a:t>
-            </a:r>
-          </a:p>
-        </p:txBody>
-      </p:sp>
-      <p:sp>
-        <p:nvSpPr>
-          <p:cNvPr id="19" name="Rounded Rectangle 18"/>
-          <p:cNvSpPr/>
-          <p:nvPr/>
-        </p:nvSpPr>
-        <p:spPr>
-          <a:xfrm>
-            <a:off x="658368" y="1874519"/>
-            <a:ext cx="5321808" cy="566928"/>
-          </a:xfrm>
-          <a:prstGeom prst="roundRect">
-            <a:avLst>
-              <a:gd name="adj" fmla="val 25000"/>
-            </a:avLst>
-          </a:prstGeom>
-          <a:solidFill>
-            <a:srgbClr val="022349"/>
-          </a:solidFill>
-          <a:ln w="19050">
-            <a:solidFill>
-              <a:srgbClr val="487CFF"/>
-            </a:solidFill>
-          </a:ln>
-          <a:effectLst/>
-        </p:spPr>
-        <p:style>
-          <a:lnRef idx="1">
-            <a:schemeClr val="accent1"/>
-          </a:lnRef>
-          <a:fillRef idx="3">
-            <a:schemeClr val="accent1"/>
-          </a:fillRef>
-          <a:effectRef idx="2">
-            <a:schemeClr val="accent1"/>
-          </a:effectRef>
-          <a:fontRef idx="minor">
-            <a:schemeClr val="lt1"/>
-          </a:fontRef>
-        </p:style>
-        <p:txBody>
-          <a:bodyPr rtlCol="0" anchor="ctr"/>
-          <a:lstStyle/>
-          <a:p/>
-        </p:txBody>
-      </p:sp>
-      <p:sp>
-        <p:nvSpPr>
-          <p:cNvPr id="20" name="TextBox 19"/>
-          <p:cNvSpPr txBox="1"/>
-          <p:nvPr/>
-        </p:nvSpPr>
-        <p:spPr>
-          <a:xfrm>
-            <a:off x="4059936" y="1874519"/>
-            <a:ext cx="1783080" cy="566928"/>
-          </a:xfrm>
-          <a:prstGeom prst="rect">
-            <a:avLst/>
-          </a:prstGeom>
-          <a:noFill/>
-        </p:spPr>
-        <p:txBody>
-          <a:bodyPr wrap="square" lIns="0" rIns="0" tIns="0" bIns="0" anchor="ctr" rtlCol="0">
-            <a:spAutoFit/>
-          </a:bodyPr>
-          <a:lstStyle/>
-          <a:p>
-            <a:pPr rtl="1" algn="r" marL="0" indent="0">
-              <a:lnSpc>
-                <a:spcPct val="108000"/>
-              </a:lnSpc>
-              <a:buNone/>
-            </a:pPr>
-            <a:r>
-              <a:rPr sz="1400" b="1" i="0" lang="he-IL">
-                <a:solidFill>
-                  <a:srgbClr val="F2F5FA"/>
-                </a:solidFill>
-                <a:latin typeface="Arial"/>
-                <a:cs typeface="Arial"/>
-              </a:rPr>
-              <a:t>Codex</a:t>
-            </a:r>
-          </a:p>
-        </p:txBody>
-      </p:sp>
-      <p:sp>
-        <p:nvSpPr>
-          <p:cNvPr id="21" name="TextBox 20"/>
-          <p:cNvSpPr txBox="1"/>
-          <p:nvPr/>
-        </p:nvSpPr>
-        <p:spPr>
-          <a:xfrm>
-            <a:off x="768096" y="1874519"/>
-            <a:ext cx="3264408" cy="566928"/>
-          </a:xfrm>
-          <a:prstGeom prst="rect">
-            <a:avLst/>
-          </a:prstGeom>
-          <a:noFill/>
-        </p:spPr>
-        <p:txBody>
-          <a:bodyPr wrap="square" lIns="0" rIns="0" tIns="0" bIns="0" anchor="ctr" rtlCol="0">
-            <a:spAutoFit/>
-          </a:bodyPr>
-          <a:lstStyle/>
-          <a:p>
-            <a:pPr rtl="1" algn="l" marL="0" indent="0">
-              <a:lnSpc>
-                <a:spcPct val="108000"/>
-              </a:lnSpc>
-              <a:buNone/>
-            </a:pPr>
-            <a:r>
-              <a:rPr sz="1300" b="0" i="0" lang="he-IL">
-                <a:solidFill>
-                  <a:srgbClr val="6296FF"/>
-                </a:solidFill>
-                <a:latin typeface="Arial"/>
-                <a:cs typeface="Arial"/>
-              </a:rPr>
-              <a:t>chatgpt.com/codex</a:t>
-            </a:r>
-          </a:p>
-        </p:txBody>
-      </p:sp>
-      <p:sp>
-        <p:nvSpPr>
-          <p:cNvPr id="22" name="Rounded Rectangle 21"/>
-          <p:cNvSpPr/>
-          <p:nvPr/>
-        </p:nvSpPr>
-        <p:spPr>
-          <a:xfrm>
-            <a:off x="658368" y="2569463"/>
-            <a:ext cx="5321808" cy="566928"/>
-          </a:xfrm>
-          <a:prstGeom prst="roundRect">
-            <a:avLst>
-              <a:gd name="adj" fmla="val 25000"/>
-            </a:avLst>
-          </a:prstGeom>
-          <a:solidFill>
-            <a:srgbClr val="022349"/>
-          </a:solidFill>
-          <a:ln w="19050">
-            <a:solidFill>
-              <a:srgbClr val="487CFF"/>
-            </a:solidFill>
-          </a:ln>
-          <a:effectLst/>
-        </p:spPr>
-        <p:style>
-          <a:lnRef idx="1">
-            <a:schemeClr val="accent1"/>
-          </a:lnRef>
-          <a:fillRef idx="3">
-            <a:schemeClr val="accent1"/>
-          </a:fillRef>
-          <a:effectRef idx="2">
-            <a:schemeClr val="accent1"/>
-          </a:effectRef>
-          <a:fontRef idx="minor">
-            <a:schemeClr val="lt1"/>
-          </a:fontRef>
-        </p:style>
-        <p:txBody>
-          <a:bodyPr rtlCol="0" anchor="ctr"/>
-          <a:lstStyle/>
-          <a:p/>
-        </p:txBody>
-      </p:sp>
-      <p:sp>
-        <p:nvSpPr>
-          <p:cNvPr id="23" name="TextBox 22"/>
-          <p:cNvSpPr txBox="1"/>
-          <p:nvPr/>
-        </p:nvSpPr>
-        <p:spPr>
-          <a:xfrm>
-            <a:off x="4059936" y="2569463"/>
-            <a:ext cx="1783080" cy="566928"/>
-          </a:xfrm>
-          <a:prstGeom prst="rect">
-            <a:avLst/>
-          </a:prstGeom>
-          <a:noFill/>
-        </p:spPr>
-        <p:txBody>
-          <a:bodyPr wrap="square" lIns="0" rIns="0" tIns="0" bIns="0" anchor="ctr" rtlCol="0">
-            <a:spAutoFit/>
-          </a:bodyPr>
-          <a:lstStyle/>
-          <a:p>
-            <a:pPr rtl="1" algn="r" marL="0" indent="0">
-              <a:lnSpc>
-                <a:spcPct val="108000"/>
-              </a:lnSpc>
-              <a:buNone/>
-            </a:pPr>
-            <a:r>
-              <a:rPr sz="1400" b="1" i="0" lang="he-IL">
-                <a:solidFill>
-                  <a:srgbClr val="F2F5FA"/>
-                </a:solidFill>
-                <a:latin typeface="Arial"/>
-                <a:cs typeface="Arial"/>
-              </a:rPr>
-              <a:t>Claude Code</a:t>
-            </a:r>
-          </a:p>
-        </p:txBody>
-      </p:sp>
-      <p:sp>
-        <p:nvSpPr>
-          <p:cNvPr id="24" name="TextBox 23"/>
-          <p:cNvSpPr txBox="1"/>
-          <p:nvPr/>
-        </p:nvSpPr>
-        <p:spPr>
-          <a:xfrm>
-            <a:off x="768096" y="2569463"/>
-            <a:ext cx="3264408" cy="566928"/>
-          </a:xfrm>
-          <a:prstGeom prst="rect">
-            <a:avLst/>
-          </a:prstGeom>
-          <a:noFill/>
-        </p:spPr>
-        <p:txBody>
-          <a:bodyPr wrap="square" lIns="0" rIns="0" tIns="0" bIns="0" anchor="ctr" rtlCol="0">
-            <a:spAutoFit/>
-          </a:bodyPr>
-          <a:lstStyle/>
-          <a:p>
-            <a:pPr rtl="1" algn="l" marL="0" indent="0">
-              <a:lnSpc>
-                <a:spcPct val="108000"/>
-              </a:lnSpc>
-              <a:buNone/>
-            </a:pPr>
-            <a:r>
-              <a:rPr sz="1300" b="0" i="0" lang="he-IL">
-                <a:solidFill>
-                  <a:srgbClr val="6296FF"/>
-                </a:solidFill>
-                <a:latin typeface="Arial"/>
-                <a:cs typeface="Arial"/>
-              </a:rPr>
-              <a:t>claude.ai/code</a:t>
-            </a:r>
-          </a:p>
-        </p:txBody>
-      </p:sp>
-      <p:sp>
-        <p:nvSpPr>
-          <p:cNvPr id="25" name="Rounded Rectangle 24"/>
-          <p:cNvSpPr/>
-          <p:nvPr/>
-        </p:nvSpPr>
-        <p:spPr>
-          <a:xfrm>
-            <a:off x="658368" y="3264408"/>
-            <a:ext cx="5321808" cy="566928"/>
-          </a:xfrm>
-          <a:prstGeom prst="roundRect">
-            <a:avLst>
-              <a:gd name="adj" fmla="val 25000"/>
-            </a:avLst>
-          </a:prstGeom>
-          <a:solidFill>
-            <a:srgbClr val="022349"/>
-          </a:solidFill>
-          <a:ln w="19050">
-            <a:solidFill>
-              <a:srgbClr val="487CFF"/>
-            </a:solidFill>
-          </a:ln>
-          <a:effectLst/>
-        </p:spPr>
-        <p:style>
-          <a:lnRef idx="1">
-            <a:schemeClr val="accent1"/>
-          </a:lnRef>
-          <a:fillRef idx="3">
-            <a:schemeClr val="accent1"/>
-          </a:fillRef>
-          <a:effectRef idx="2">
-            <a:schemeClr val="accent1"/>
-          </a:effectRef>
-          <a:fontRef idx="minor">
-            <a:schemeClr val="lt1"/>
-          </a:fontRef>
-        </p:style>
-        <p:txBody>
-          <a:bodyPr rtlCol="0" anchor="ctr"/>
-          <a:lstStyle/>
-          <a:p/>
-        </p:txBody>
-      </p:sp>
-      <p:sp>
-        <p:nvSpPr>
-          <p:cNvPr id="26" name="TextBox 25"/>
-          <p:cNvSpPr txBox="1"/>
-          <p:nvPr/>
-        </p:nvSpPr>
-        <p:spPr>
-          <a:xfrm>
-            <a:off x="4059936" y="3264408"/>
-            <a:ext cx="1783080" cy="566928"/>
-          </a:xfrm>
-          <a:prstGeom prst="rect">
-            <a:avLst/>
-          </a:prstGeom>
-          <a:noFill/>
-        </p:spPr>
-        <p:txBody>
-          <a:bodyPr wrap="square" lIns="0" rIns="0" tIns="0" bIns="0" anchor="ctr" rtlCol="0">
-            <a:spAutoFit/>
-          </a:bodyPr>
-          <a:lstStyle/>
-          <a:p>
-            <a:pPr rtl="1" algn="r" marL="0" indent="0">
-              <a:lnSpc>
-                <a:spcPct val="108000"/>
-              </a:lnSpc>
-              <a:buNone/>
-            </a:pPr>
-            <a:r>
-              <a:rPr sz="1400" b="1" i="0" lang="he-IL">
-                <a:solidFill>
-                  <a:srgbClr val="F2F5FA"/>
-                </a:solidFill>
-                <a:latin typeface="Arial"/>
-                <a:cs typeface="Arial"/>
-              </a:rPr>
-              <a:t>Grok</a:t>
-            </a:r>
-          </a:p>
-        </p:txBody>
-      </p:sp>
-      <p:sp>
-        <p:nvSpPr>
-          <p:cNvPr id="27" name="TextBox 26"/>
-          <p:cNvSpPr txBox="1"/>
-          <p:nvPr/>
-        </p:nvSpPr>
-        <p:spPr>
-          <a:xfrm>
-            <a:off x="768096" y="3264408"/>
-            <a:ext cx="3264408" cy="566928"/>
-          </a:xfrm>
-          <a:prstGeom prst="rect">
-            <a:avLst/>
-          </a:prstGeom>
-          <a:noFill/>
-        </p:spPr>
-        <p:txBody>
-          <a:bodyPr wrap="square" lIns="0" rIns="0" tIns="0" bIns="0" anchor="ctr" rtlCol="0">
-            <a:spAutoFit/>
-          </a:bodyPr>
-          <a:lstStyle/>
-          <a:p>
-            <a:pPr rtl="1" algn="l" marL="0" indent="0">
-              <a:lnSpc>
-                <a:spcPct val="108000"/>
-              </a:lnSpc>
-              <a:buNone/>
-            </a:pPr>
-            <a:r>
-              <a:rPr sz="1300" b="0" i="0" lang="he-IL">
-                <a:solidFill>
-                  <a:srgbClr val="6296FF"/>
-                </a:solidFill>
-                <a:latin typeface="Arial"/>
-                <a:cs typeface="Arial"/>
-              </a:rPr>
-              <a:t>grok.com</a:t>
-            </a:r>
-          </a:p>
-        </p:txBody>
-      </p:sp>
-      <p:sp>
-        <p:nvSpPr>
-          <p:cNvPr id="28" name="Rounded Rectangle 27"/>
-          <p:cNvSpPr/>
-          <p:nvPr/>
-        </p:nvSpPr>
-        <p:spPr>
-          <a:xfrm>
-            <a:off x="658368" y="3959352"/>
-            <a:ext cx="5321808" cy="566928"/>
-          </a:xfrm>
-          <a:prstGeom prst="roundRect">
-            <a:avLst>
-              <a:gd name="adj" fmla="val 25000"/>
-            </a:avLst>
-          </a:prstGeom>
-          <a:solidFill>
-            <a:srgbClr val="022349"/>
-          </a:solidFill>
-          <a:ln w="19050">
-            <a:solidFill>
-              <a:srgbClr val="487CFF"/>
-            </a:solidFill>
-          </a:ln>
-          <a:effectLst/>
-        </p:spPr>
-        <p:style>
-          <a:lnRef idx="1">
-            <a:schemeClr val="accent1"/>
-          </a:lnRef>
-          <a:fillRef idx="3">
-            <a:schemeClr val="accent1"/>
-          </a:fillRef>
-          <a:effectRef idx="2">
-            <a:schemeClr val="accent1"/>
-          </a:effectRef>
-          <a:fontRef idx="minor">
-            <a:schemeClr val="lt1"/>
-          </a:fontRef>
-        </p:style>
-        <p:txBody>
-          <a:bodyPr rtlCol="0" anchor="ctr"/>
-          <a:lstStyle/>
-          <a:p/>
-        </p:txBody>
-      </p:sp>
-      <p:sp>
-        <p:nvSpPr>
-          <p:cNvPr id="29" name="TextBox 28"/>
-          <p:cNvSpPr txBox="1"/>
-          <p:nvPr/>
-        </p:nvSpPr>
-        <p:spPr>
-          <a:xfrm>
-            <a:off x="4059936" y="3959352"/>
-            <a:ext cx="1783080" cy="566928"/>
-          </a:xfrm>
-          <a:prstGeom prst="rect">
-            <a:avLst/>
-          </a:prstGeom>
-          <a:noFill/>
-        </p:spPr>
-        <p:txBody>
-          <a:bodyPr wrap="square" lIns="0" rIns="0" tIns="0" bIns="0" anchor="ctr" rtlCol="0">
-            <a:spAutoFit/>
-          </a:bodyPr>
-          <a:lstStyle/>
-          <a:p>
-            <a:pPr rtl="1" algn="r" marL="0" indent="0">
-              <a:lnSpc>
-                <a:spcPct val="108000"/>
-              </a:lnSpc>
-              <a:buNone/>
-            </a:pPr>
-            <a:r>
-              <a:rPr sz="1400" b="1" i="0" lang="he-IL">
-                <a:solidFill>
-                  <a:srgbClr val="F2F5FA"/>
-                </a:solidFill>
-                <a:latin typeface="Arial"/>
-                <a:cs typeface="Arial"/>
-              </a:rPr>
-              <a:t>Instinct</a:t>
-            </a:r>
-          </a:p>
-        </p:txBody>
-      </p:sp>
-      <p:sp>
-        <p:nvSpPr>
-          <p:cNvPr id="30" name="TextBox 29"/>
-          <p:cNvSpPr txBox="1"/>
-          <p:nvPr/>
-        </p:nvSpPr>
-        <p:spPr>
-          <a:xfrm>
-            <a:off x="768096" y="3959352"/>
-            <a:ext cx="3264408" cy="566928"/>
-          </a:xfrm>
-          <a:prstGeom prst="rect">
-            <a:avLst/>
-          </a:prstGeom>
-          <a:noFill/>
-        </p:spPr>
-        <p:txBody>
-          <a:bodyPr wrap="square" lIns="0" rIns="0" tIns="0" bIns="0" anchor="ctr" rtlCol="0">
-            <a:spAutoFit/>
-          </a:bodyPr>
-          <a:lstStyle/>
-          <a:p>
-            <a:pPr rtl="1" algn="l" marL="0" indent="0">
-              <a:lnSpc>
-                <a:spcPct val="108000"/>
-              </a:lnSpc>
-              <a:buNone/>
-            </a:pPr>
-            <a:r>
-              <a:rPr sz="1300" b="0" i="0" lang="he-IL">
-                <a:solidFill>
-                  <a:srgbClr val="6296FF"/>
-                </a:solidFill>
-                <a:latin typeface="Arial"/>
-                <a:cs typeface="Arial"/>
-              </a:rPr>
-              <a:t>instinct.ai</a:t>
-            </a:r>
-          </a:p>
-        </p:txBody>
-      </p:sp>
-      <p:sp>
-        <p:nvSpPr>
-          <p:cNvPr id="31" name="Rounded Rectangle 30"/>
-          <p:cNvSpPr/>
-          <p:nvPr/>
-        </p:nvSpPr>
-        <p:spPr>
-          <a:xfrm>
-            <a:off x="658368" y="5577840"/>
-            <a:ext cx="10872216" cy="594360"/>
-          </a:xfrm>
-          <a:prstGeom prst="roundRect">
-            <a:avLst>
-              <a:gd name="adj" fmla="val 3000"/>
-            </a:avLst>
-          </a:prstGeom>
-          <a:solidFill>
-            <a:srgbClr val="022349"/>
-          </a:solidFill>
-          <a:ln>
-            <a:noFill/>
-          </a:ln>
-          <a:effectLst/>
-        </p:spPr>
-        <p:style>
-          <a:lnRef idx="1">
-            <a:schemeClr val="accent1"/>
-          </a:lnRef>
-          <a:fillRef idx="3">
-            <a:schemeClr val="accent1"/>
-          </a:fillRef>
-          <a:effectRef idx="2">
-            <a:schemeClr val="accent1"/>
-          </a:effectRef>
-          <a:fontRef idx="minor">
-            <a:schemeClr val="lt1"/>
-          </a:fontRef>
-        </p:style>
-        <p:txBody>
-          <a:bodyPr rtlCol="0" anchor="ctr"/>
-          <a:lstStyle/>
-          <a:p/>
-        </p:txBody>
-      </p:sp>
-      <p:sp>
-        <p:nvSpPr>
-          <p:cNvPr id="32" name="TextBox 31"/>
-          <p:cNvSpPr txBox="1"/>
-          <p:nvPr/>
-        </p:nvSpPr>
-        <p:spPr>
-          <a:xfrm>
-            <a:off x="886968" y="5577840"/>
-            <a:ext cx="10415016" cy="594360"/>
-          </a:xfrm>
-          <a:prstGeom prst="rect">
-            <a:avLst/>
-          </a:prstGeom>
-          <a:noFill/>
-        </p:spPr>
-        <p:txBody>
-          <a:bodyPr wrap="square" lIns="0" rIns="0" tIns="0" bIns="0" anchor="ctr" rtlCol="0">
-            <a:spAutoFit/>
-          </a:bodyPr>
-          <a:lstStyle/>
-          <a:p>
-            <a:pPr rtl="1" algn="r" marL="0" indent="0">
-              <a:lnSpc>
-                <a:spcPct val="108000"/>
-              </a:lnSpc>
-              <a:buNone/>
-            </a:pPr>
-            <a:r>
-              <a:rPr sz="1400" b="0" i="0" lang="he-IL">
-                <a:solidFill>
-                  <a:srgbClr val="EBEDF0"/>
-                </a:solidFill>
-                <a:latin typeface="Arial"/>
-                <a:cs typeface="Arial"/>
-              </a:rPr>
-              <a:t>📋  כל הקישורים נמצאים גם בארגז הכלים באפליקציית הקורס ובחוברת.</a:t>
-            </a:r>
-          </a:p>
-        </p:txBody>
-      </p:sp>
-      <p:sp>
-        <p:nvSpPr>
-          <p:cNvPr id="33" name="TextBox 32"/>
-          <p:cNvSpPr txBox="1"/>
-          <p:nvPr/>
-        </p:nvSpPr>
-        <p:spPr>
-          <a:xfrm>
-            <a:off x="6675120" y="6473952"/>
-            <a:ext cx="4846320" cy="292608"/>
-          </a:xfrm>
-          <a:prstGeom prst="rect">
-            <a:avLst/>
-          </a:prstGeom>
-          <a:noFill/>
-        </p:spPr>
-        <p:txBody>
-          <a:bodyPr wrap="none" lIns="0" rIns="0" tIns="0" bIns="0">
-            <a:spAutoFit/>
-          </a:bodyPr>
-          <a:lstStyle/>
-          <a:p>
-            <a:pPr algn="r" rtl="1"/>
-            <a:r>
-              <a:rPr sz="1000">
-                <a:solidFill>
-                  <a:srgbClr val="8A96AA"/>
-                </a:solidFill>
-                <a:latin typeface="Arial"/>
-                <a:cs typeface="Arial"/>
-              </a:rPr>
-              <a:t>© נערך על ידי AI Finance</a:t>
-            </a:r>
-          </a:p>
-        </p:txBody>
-      </p:sp>
-    </p:spTree>
-  </p:cSld>
-  <p:clrMapOvr>
-    <a:masterClrMapping/>
-  </p:clrMapOvr>
-</p:sld>
-</file>
-
 <file path=ppt/slides/slide2021.xml><?xml version="1.0" encoding="utf-8"?>
 <p:sld xmlns:a="http://schemas.openxmlformats.org/drawingml/2006/main" xmlns:p="http://schemas.openxmlformats.org/presentationml/2006/main" xmlns:r="http://schemas.openxmlformats.org/officeDocument/2006/relationships">
   <p:cSld>
@@ -23187,6 +23083,1379 @@
                 <a:latin typeface="Arial"/>
                 <a:cs typeface="Arial"/>
               </a:rPr>
+              <a:t>🧰 ארגז הכלים של היום</a:t>
+            </a:r>
+          </a:p>
+        </p:txBody>
+      </p:sp>
+      <p:sp>
+        <p:nvSpPr>
+          <p:cNvPr id="3" name="TextBox 2"/>
+          <p:cNvSpPr txBox="1"/>
+          <p:nvPr/>
+        </p:nvSpPr>
+        <p:spPr>
+          <a:xfrm>
+            <a:off x="658368" y="1280160"/>
+            <a:ext cx="10872216" cy="365760"/>
+          </a:xfrm>
+          <a:prstGeom prst="rect">
+            <a:avLst/>
+          </a:prstGeom>
+          <a:noFill/>
+        </p:spPr>
+        <p:txBody>
+          <a:bodyPr wrap="square" lIns="0" rIns="0" tIns="0" bIns="0" anchor="t" rtlCol="0">
+            <a:spAutoFit/>
+          </a:bodyPr>
+          <a:lstStyle/>
+          <a:p>
+            <a:pPr rtl="1" algn="r" marL="0" indent="0">
+              <a:lnSpc>
+                <a:spcPct val="108000"/>
+              </a:lnSpc>
+              <a:buNone/>
+            </a:pPr>
+            <a:r>
+              <a:rPr sz="1450" b="0" i="0" lang="he-IL">
+                <a:solidFill>
+                  <a:srgbClr val="FAC496"/>
+                </a:solidFill>
+                <a:latin typeface="Arial"/>
+                <a:cs typeface="Arial"/>
+              </a:rPr>
+              <a:t>הקישורים להעתקה. חלקם נותנים לכם קרדיטים או ניסיון חינם</a:t>
+            </a:r>
+          </a:p>
+        </p:txBody>
+      </p:sp>
+      <p:sp>
+        <p:nvSpPr>
+          <p:cNvPr id="4" name="Rounded Rectangle 3"/>
+          <p:cNvSpPr/>
+          <p:nvPr/>
+        </p:nvSpPr>
+        <p:spPr>
+          <a:xfrm>
+            <a:off x="6208776" y="1874519"/>
+            <a:ext cx="5321808" cy="566928"/>
+          </a:xfrm>
+          <a:prstGeom prst="roundRect">
+            <a:avLst>
+              <a:gd name="adj" fmla="val 25000"/>
+            </a:avLst>
+          </a:prstGeom>
+          <a:solidFill>
+            <a:srgbClr val="022349"/>
+          </a:solidFill>
+          <a:ln w="19050">
+            <a:solidFill>
+              <a:srgbClr val="487CFF"/>
+            </a:solidFill>
+          </a:ln>
+          <a:effectLst/>
+        </p:spPr>
+        <p:style>
+          <a:lnRef idx="1">
+            <a:schemeClr val="accent1"/>
+          </a:lnRef>
+          <a:fillRef idx="3">
+            <a:schemeClr val="accent1"/>
+          </a:fillRef>
+          <a:effectRef idx="2">
+            <a:schemeClr val="accent1"/>
+          </a:effectRef>
+          <a:fontRef idx="minor">
+            <a:schemeClr val="lt1"/>
+          </a:fontRef>
+        </p:style>
+        <p:txBody>
+          <a:bodyPr rtlCol="0" anchor="ctr"/>
+          <a:lstStyle/>
+          <a:p/>
+        </p:txBody>
+      </p:sp>
+      <p:sp>
+        <p:nvSpPr>
+          <p:cNvPr id="5" name="TextBox 4"/>
+          <p:cNvSpPr txBox="1"/>
+          <p:nvPr/>
+        </p:nvSpPr>
+        <p:spPr>
+          <a:xfrm>
+            <a:off x="9610344" y="1874519"/>
+            <a:ext cx="1783080" cy="566928"/>
+          </a:xfrm>
+          <a:prstGeom prst="rect">
+            <a:avLst/>
+          </a:prstGeom>
+          <a:noFill/>
+        </p:spPr>
+        <p:txBody>
+          <a:bodyPr wrap="square" lIns="0" rIns="0" tIns="0" bIns="0" anchor="ctr" rtlCol="0">
+            <a:spAutoFit/>
+          </a:bodyPr>
+          <a:lstStyle/>
+          <a:p>
+            <a:pPr rtl="1" algn="r" marL="0" indent="0">
+              <a:lnSpc>
+                <a:spcPct val="108000"/>
+              </a:lnSpc>
+              <a:buNone/>
+            </a:pPr>
+            <a:r>
+              <a:rPr sz="1400" b="1" i="0" lang="he-IL">
+                <a:solidFill>
+                  <a:srgbClr val="F2F5FA"/>
+                </a:solidFill>
+                <a:latin typeface="Arial"/>
+                <a:cs typeface="Arial"/>
+              </a:rPr>
+              <a:t>Claude</a:t>
+            </a:r>
+          </a:p>
+        </p:txBody>
+      </p:sp>
+      <p:sp>
+        <p:nvSpPr>
+          <p:cNvPr id="6" name="TextBox 5"/>
+          <p:cNvSpPr txBox="1"/>
+          <p:nvPr/>
+        </p:nvSpPr>
+        <p:spPr>
+          <a:xfrm>
+            <a:off x="6318504" y="1874519"/>
+            <a:ext cx="3264408" cy="566928"/>
+          </a:xfrm>
+          <a:prstGeom prst="rect">
+            <a:avLst/>
+          </a:prstGeom>
+          <a:noFill/>
+        </p:spPr>
+        <p:txBody>
+          <a:bodyPr wrap="square" lIns="0" rIns="0" tIns="0" bIns="0" anchor="ctr" rtlCol="0">
+            <a:spAutoFit/>
+          </a:bodyPr>
+          <a:lstStyle/>
+          <a:p>
+            <a:pPr rtl="1" algn="l" marL="0" indent="0">
+              <a:lnSpc>
+                <a:spcPct val="108000"/>
+              </a:lnSpc>
+              <a:buNone/>
+            </a:pPr>
+            <a:r>
+              <a:rPr sz="1300" b="0" i="0" lang="he-IL">
+                <a:solidFill>
+                  <a:srgbClr val="6296FF"/>
+                </a:solidFill>
+                <a:latin typeface="Arial"/>
+                <a:cs typeface="Arial"/>
+              </a:rPr>
+              <a:t>claude.ai</a:t>
+            </a:r>
+          </a:p>
+        </p:txBody>
+      </p:sp>
+      <p:sp>
+        <p:nvSpPr>
+          <p:cNvPr id="7" name="Rounded Rectangle 6"/>
+          <p:cNvSpPr/>
+          <p:nvPr/>
+        </p:nvSpPr>
+        <p:spPr>
+          <a:xfrm>
+            <a:off x="6208776" y="2569463"/>
+            <a:ext cx="5321808" cy="566928"/>
+          </a:xfrm>
+          <a:prstGeom prst="roundRect">
+            <a:avLst>
+              <a:gd name="adj" fmla="val 25000"/>
+            </a:avLst>
+          </a:prstGeom>
+          <a:solidFill>
+            <a:srgbClr val="022349"/>
+          </a:solidFill>
+          <a:ln w="19050">
+            <a:solidFill>
+              <a:srgbClr val="487CFF"/>
+            </a:solidFill>
+          </a:ln>
+          <a:effectLst/>
+        </p:spPr>
+        <p:style>
+          <a:lnRef idx="1">
+            <a:schemeClr val="accent1"/>
+          </a:lnRef>
+          <a:fillRef idx="3">
+            <a:schemeClr val="accent1"/>
+          </a:fillRef>
+          <a:effectRef idx="2">
+            <a:schemeClr val="accent1"/>
+          </a:effectRef>
+          <a:fontRef idx="minor">
+            <a:schemeClr val="lt1"/>
+          </a:fontRef>
+        </p:style>
+        <p:txBody>
+          <a:bodyPr rtlCol="0" anchor="ctr"/>
+          <a:lstStyle/>
+          <a:p/>
+        </p:txBody>
+      </p:sp>
+      <p:sp>
+        <p:nvSpPr>
+          <p:cNvPr id="8" name="TextBox 7"/>
+          <p:cNvSpPr txBox="1"/>
+          <p:nvPr/>
+        </p:nvSpPr>
+        <p:spPr>
+          <a:xfrm>
+            <a:off x="9610344" y="2569463"/>
+            <a:ext cx="1783080" cy="566928"/>
+          </a:xfrm>
+          <a:prstGeom prst="rect">
+            <a:avLst/>
+          </a:prstGeom>
+          <a:noFill/>
+        </p:spPr>
+        <p:txBody>
+          <a:bodyPr wrap="square" lIns="0" rIns="0" tIns="0" bIns="0" anchor="ctr" rtlCol="0">
+            <a:spAutoFit/>
+          </a:bodyPr>
+          <a:lstStyle/>
+          <a:p>
+            <a:pPr rtl="1" algn="r" marL="0" indent="0">
+              <a:lnSpc>
+                <a:spcPct val="108000"/>
+              </a:lnSpc>
+              <a:buNone/>
+            </a:pPr>
+            <a:r>
+              <a:rPr sz="1400" b="1" i="0" lang="he-IL">
+                <a:solidFill>
+                  <a:srgbClr val="F2F5FA"/>
+                </a:solidFill>
+                <a:latin typeface="Arial"/>
+                <a:cs typeface="Arial"/>
+              </a:rPr>
+              <a:t>ChatGPT</a:t>
+            </a:r>
+          </a:p>
+        </p:txBody>
+      </p:sp>
+      <p:sp>
+        <p:nvSpPr>
+          <p:cNvPr id="9" name="TextBox 8"/>
+          <p:cNvSpPr txBox="1"/>
+          <p:nvPr/>
+        </p:nvSpPr>
+        <p:spPr>
+          <a:xfrm>
+            <a:off x="6318504" y="2569463"/>
+            <a:ext cx="3264408" cy="566928"/>
+          </a:xfrm>
+          <a:prstGeom prst="rect">
+            <a:avLst/>
+          </a:prstGeom>
+          <a:noFill/>
+        </p:spPr>
+        <p:txBody>
+          <a:bodyPr wrap="square" lIns="0" rIns="0" tIns="0" bIns="0" anchor="ctr" rtlCol="0">
+            <a:spAutoFit/>
+          </a:bodyPr>
+          <a:lstStyle/>
+          <a:p>
+            <a:pPr rtl="1" algn="l" marL="0" indent="0">
+              <a:lnSpc>
+                <a:spcPct val="108000"/>
+              </a:lnSpc>
+              <a:buNone/>
+            </a:pPr>
+            <a:r>
+              <a:rPr sz="1300" b="0" i="0" lang="he-IL">
+                <a:solidFill>
+                  <a:srgbClr val="6296FF"/>
+                </a:solidFill>
+                <a:latin typeface="Arial"/>
+                <a:cs typeface="Arial"/>
+              </a:rPr>
+              <a:t>chatgpt.com</a:t>
+            </a:r>
+          </a:p>
+        </p:txBody>
+      </p:sp>
+      <p:sp>
+        <p:nvSpPr>
+          <p:cNvPr id="10" name="Rounded Rectangle 9"/>
+          <p:cNvSpPr/>
+          <p:nvPr/>
+        </p:nvSpPr>
+        <p:spPr>
+          <a:xfrm>
+            <a:off x="6208776" y="3264408"/>
+            <a:ext cx="5321808" cy="566928"/>
+          </a:xfrm>
+          <a:prstGeom prst="roundRect">
+            <a:avLst>
+              <a:gd name="adj" fmla="val 25000"/>
+            </a:avLst>
+          </a:prstGeom>
+          <a:solidFill>
+            <a:srgbClr val="022349"/>
+          </a:solidFill>
+          <a:ln w="19050">
+            <a:solidFill>
+              <a:srgbClr val="487CFF"/>
+            </a:solidFill>
+          </a:ln>
+          <a:effectLst/>
+        </p:spPr>
+        <p:style>
+          <a:lnRef idx="1">
+            <a:schemeClr val="accent1"/>
+          </a:lnRef>
+          <a:fillRef idx="3">
+            <a:schemeClr val="accent1"/>
+          </a:fillRef>
+          <a:effectRef idx="2">
+            <a:schemeClr val="accent1"/>
+          </a:effectRef>
+          <a:fontRef idx="minor">
+            <a:schemeClr val="lt1"/>
+          </a:fontRef>
+        </p:style>
+        <p:txBody>
+          <a:bodyPr rtlCol="0" anchor="ctr"/>
+          <a:lstStyle/>
+          <a:p/>
+        </p:txBody>
+      </p:sp>
+      <p:sp>
+        <p:nvSpPr>
+          <p:cNvPr id="11" name="TextBox 10"/>
+          <p:cNvSpPr txBox="1"/>
+          <p:nvPr/>
+        </p:nvSpPr>
+        <p:spPr>
+          <a:xfrm>
+            <a:off x="9610344" y="3264408"/>
+            <a:ext cx="1783080" cy="566928"/>
+          </a:xfrm>
+          <a:prstGeom prst="rect">
+            <a:avLst/>
+          </a:prstGeom>
+          <a:noFill/>
+        </p:spPr>
+        <p:txBody>
+          <a:bodyPr wrap="square" lIns="0" rIns="0" tIns="0" bIns="0" anchor="ctr" rtlCol="0">
+            <a:spAutoFit/>
+          </a:bodyPr>
+          <a:lstStyle/>
+          <a:p>
+            <a:pPr rtl="1" algn="r" marL="0" indent="0">
+              <a:lnSpc>
+                <a:spcPct val="108000"/>
+              </a:lnSpc>
+              <a:buNone/>
+            </a:pPr>
+            <a:r>
+              <a:rPr sz="1400" b="1" i="0" lang="he-IL">
+                <a:solidFill>
+                  <a:srgbClr val="F2F5FA"/>
+                </a:solidFill>
+                <a:latin typeface="Arial"/>
+                <a:cs typeface="Arial"/>
+              </a:rPr>
+              <a:t>Make</a:t>
+            </a:r>
+          </a:p>
+        </p:txBody>
+      </p:sp>
+      <p:sp>
+        <p:nvSpPr>
+          <p:cNvPr id="12" name="TextBox 11"/>
+          <p:cNvSpPr txBox="1"/>
+          <p:nvPr/>
+        </p:nvSpPr>
+        <p:spPr>
+          <a:xfrm>
+            <a:off x="6318504" y="3264408"/>
+            <a:ext cx="3264408" cy="566928"/>
+          </a:xfrm>
+          <a:prstGeom prst="rect">
+            <a:avLst/>
+          </a:prstGeom>
+          <a:noFill/>
+        </p:spPr>
+        <p:txBody>
+          <a:bodyPr wrap="square" lIns="0" rIns="0" tIns="0" bIns="0" anchor="ctr" rtlCol="0">
+            <a:spAutoFit/>
+          </a:bodyPr>
+          <a:lstStyle/>
+          <a:p>
+            <a:pPr rtl="1" algn="l" marL="0" indent="0">
+              <a:lnSpc>
+                <a:spcPct val="108000"/>
+              </a:lnSpc>
+              <a:buNone/>
+            </a:pPr>
+            <a:r>
+              <a:rPr sz="1300" b="0" i="0" lang="he-IL">
+                <a:solidFill>
+                  <a:srgbClr val="6296FF"/>
+                </a:solidFill>
+                <a:latin typeface="Arial"/>
+                <a:cs typeface="Arial"/>
+              </a:rPr>
+              <a:t>make.com</a:t>
+            </a:r>
+          </a:p>
+        </p:txBody>
+      </p:sp>
+      <p:sp>
+        <p:nvSpPr>
+          <p:cNvPr id="13" name="Rounded Rectangle 12"/>
+          <p:cNvSpPr/>
+          <p:nvPr/>
+        </p:nvSpPr>
+        <p:spPr>
+          <a:xfrm>
+            <a:off x="6208776" y="3959352"/>
+            <a:ext cx="5321808" cy="566928"/>
+          </a:xfrm>
+          <a:prstGeom prst="roundRect">
+            <a:avLst>
+              <a:gd name="adj" fmla="val 25000"/>
+            </a:avLst>
+          </a:prstGeom>
+          <a:solidFill>
+            <a:srgbClr val="022349"/>
+          </a:solidFill>
+          <a:ln w="19050">
+            <a:solidFill>
+              <a:srgbClr val="487CFF"/>
+            </a:solidFill>
+          </a:ln>
+          <a:effectLst/>
+        </p:spPr>
+        <p:style>
+          <a:lnRef idx="1">
+            <a:schemeClr val="accent1"/>
+          </a:lnRef>
+          <a:fillRef idx="3">
+            <a:schemeClr val="accent1"/>
+          </a:fillRef>
+          <a:effectRef idx="2">
+            <a:schemeClr val="accent1"/>
+          </a:effectRef>
+          <a:fontRef idx="minor">
+            <a:schemeClr val="lt1"/>
+          </a:fontRef>
+        </p:style>
+        <p:txBody>
+          <a:bodyPr rtlCol="0" anchor="ctr"/>
+          <a:lstStyle/>
+          <a:p/>
+        </p:txBody>
+      </p:sp>
+      <p:sp>
+        <p:nvSpPr>
+          <p:cNvPr id="14" name="TextBox 13"/>
+          <p:cNvSpPr txBox="1"/>
+          <p:nvPr/>
+        </p:nvSpPr>
+        <p:spPr>
+          <a:xfrm>
+            <a:off x="9610344" y="3959352"/>
+            <a:ext cx="1783080" cy="566928"/>
+          </a:xfrm>
+          <a:prstGeom prst="rect">
+            <a:avLst/>
+          </a:prstGeom>
+          <a:noFill/>
+        </p:spPr>
+        <p:txBody>
+          <a:bodyPr wrap="square" lIns="0" rIns="0" tIns="0" bIns="0" anchor="ctr" rtlCol="0">
+            <a:spAutoFit/>
+          </a:bodyPr>
+          <a:lstStyle/>
+          <a:p>
+            <a:pPr rtl="1" algn="r" marL="0" indent="0">
+              <a:lnSpc>
+                <a:spcPct val="108000"/>
+              </a:lnSpc>
+              <a:buNone/>
+            </a:pPr>
+            <a:r>
+              <a:rPr sz="1400" b="1" i="0" lang="he-IL">
+                <a:solidFill>
+                  <a:srgbClr val="F2F5FA"/>
+                </a:solidFill>
+                <a:latin typeface="Arial"/>
+                <a:cs typeface="Arial"/>
+              </a:rPr>
+              <a:t>Lovable</a:t>
+            </a:r>
+          </a:p>
+        </p:txBody>
+      </p:sp>
+      <p:sp>
+        <p:nvSpPr>
+          <p:cNvPr id="15" name="TextBox 14"/>
+          <p:cNvSpPr txBox="1"/>
+          <p:nvPr/>
+        </p:nvSpPr>
+        <p:spPr>
+          <a:xfrm>
+            <a:off x="6318504" y="3959352"/>
+            <a:ext cx="3264408" cy="566928"/>
+          </a:xfrm>
+          <a:prstGeom prst="rect">
+            <a:avLst/>
+          </a:prstGeom>
+          <a:noFill/>
+        </p:spPr>
+        <p:txBody>
+          <a:bodyPr wrap="square" lIns="0" rIns="0" tIns="0" bIns="0" anchor="ctr" rtlCol="0">
+            <a:spAutoFit/>
+          </a:bodyPr>
+          <a:lstStyle/>
+          <a:p>
+            <a:pPr rtl="1" algn="l" marL="0" indent="0">
+              <a:lnSpc>
+                <a:spcPct val="108000"/>
+              </a:lnSpc>
+              <a:buNone/>
+            </a:pPr>
+            <a:r>
+              <a:rPr sz="1300" b="0" i="0" lang="he-IL">
+                <a:solidFill>
+                  <a:srgbClr val="6296FF"/>
+                </a:solidFill>
+                <a:latin typeface="Arial"/>
+                <a:cs typeface="Arial"/>
+              </a:rPr>
+              <a:t>lovable.dev</a:t>
+            </a:r>
+          </a:p>
+        </p:txBody>
+      </p:sp>
+      <p:sp>
+        <p:nvSpPr>
+          <p:cNvPr id="16" name="Rounded Rectangle 15"/>
+          <p:cNvSpPr/>
+          <p:nvPr/>
+        </p:nvSpPr>
+        <p:spPr>
+          <a:xfrm>
+            <a:off x="6208776" y="4654296"/>
+            <a:ext cx="5321808" cy="566928"/>
+          </a:xfrm>
+          <a:prstGeom prst="roundRect">
+            <a:avLst>
+              <a:gd name="adj" fmla="val 25000"/>
+            </a:avLst>
+          </a:prstGeom>
+          <a:solidFill>
+            <a:srgbClr val="022349"/>
+          </a:solidFill>
+          <a:ln w="19050">
+            <a:solidFill>
+              <a:srgbClr val="487CFF"/>
+            </a:solidFill>
+          </a:ln>
+          <a:effectLst/>
+        </p:spPr>
+        <p:style>
+          <a:lnRef idx="1">
+            <a:schemeClr val="accent1"/>
+          </a:lnRef>
+          <a:fillRef idx="3">
+            <a:schemeClr val="accent1"/>
+          </a:fillRef>
+          <a:effectRef idx="2">
+            <a:schemeClr val="accent1"/>
+          </a:effectRef>
+          <a:fontRef idx="minor">
+            <a:schemeClr val="lt1"/>
+          </a:fontRef>
+        </p:style>
+        <p:txBody>
+          <a:bodyPr rtlCol="0" anchor="ctr"/>
+          <a:lstStyle/>
+          <a:p/>
+        </p:txBody>
+      </p:sp>
+      <p:sp>
+        <p:nvSpPr>
+          <p:cNvPr id="17" name="TextBox 16"/>
+          <p:cNvSpPr txBox="1"/>
+          <p:nvPr/>
+        </p:nvSpPr>
+        <p:spPr>
+          <a:xfrm>
+            <a:off x="9610344" y="4654296"/>
+            <a:ext cx="1783080" cy="566928"/>
+          </a:xfrm>
+          <a:prstGeom prst="rect">
+            <a:avLst/>
+          </a:prstGeom>
+          <a:noFill/>
+        </p:spPr>
+        <p:txBody>
+          <a:bodyPr wrap="square" lIns="0" rIns="0" tIns="0" bIns="0" anchor="ctr" rtlCol="0">
+            <a:spAutoFit/>
+          </a:bodyPr>
+          <a:lstStyle/>
+          <a:p>
+            <a:pPr rtl="1" algn="r" marL="0" indent="0">
+              <a:lnSpc>
+                <a:spcPct val="108000"/>
+              </a:lnSpc>
+              <a:buNone/>
+            </a:pPr>
+            <a:r>
+              <a:rPr sz="1400" b="1" i="0" lang="he-IL">
+                <a:solidFill>
+                  <a:srgbClr val="F2F5FA"/>
+                </a:solidFill>
+                <a:latin typeface="Arial"/>
+                <a:cs typeface="Arial"/>
+              </a:rPr>
+              <a:t>Base44</a:t>
+            </a:r>
+          </a:p>
+        </p:txBody>
+      </p:sp>
+      <p:sp>
+        <p:nvSpPr>
+          <p:cNvPr id="18" name="TextBox 17"/>
+          <p:cNvSpPr txBox="1"/>
+          <p:nvPr/>
+        </p:nvSpPr>
+        <p:spPr>
+          <a:xfrm>
+            <a:off x="6318504" y="4654296"/>
+            <a:ext cx="3264408" cy="566928"/>
+          </a:xfrm>
+          <a:prstGeom prst="rect">
+            <a:avLst/>
+          </a:prstGeom>
+          <a:noFill/>
+        </p:spPr>
+        <p:txBody>
+          <a:bodyPr wrap="square" lIns="0" rIns="0" tIns="0" bIns="0" anchor="ctr" rtlCol="0">
+            <a:spAutoFit/>
+          </a:bodyPr>
+          <a:lstStyle/>
+          <a:p>
+            <a:pPr rtl="1" algn="l" marL="0" indent="0">
+              <a:lnSpc>
+                <a:spcPct val="108000"/>
+              </a:lnSpc>
+              <a:buNone/>
+            </a:pPr>
+            <a:r>
+              <a:rPr sz="1300" b="0" i="0" lang="he-IL">
+                <a:solidFill>
+                  <a:srgbClr val="6296FF"/>
+                </a:solidFill>
+                <a:latin typeface="Arial"/>
+                <a:cs typeface="Arial"/>
+              </a:rPr>
+              <a:t>base44.com</a:t>
+            </a:r>
+          </a:p>
+        </p:txBody>
+      </p:sp>
+      <p:sp>
+        <p:nvSpPr>
+          <p:cNvPr id="19" name="Rounded Rectangle 18"/>
+          <p:cNvSpPr/>
+          <p:nvPr/>
+        </p:nvSpPr>
+        <p:spPr>
+          <a:xfrm>
+            <a:off x="658368" y="1874519"/>
+            <a:ext cx="5321808" cy="566928"/>
+          </a:xfrm>
+          <a:prstGeom prst="roundRect">
+            <a:avLst>
+              <a:gd name="adj" fmla="val 25000"/>
+            </a:avLst>
+          </a:prstGeom>
+          <a:solidFill>
+            <a:srgbClr val="022349"/>
+          </a:solidFill>
+          <a:ln w="19050">
+            <a:solidFill>
+              <a:srgbClr val="487CFF"/>
+            </a:solidFill>
+          </a:ln>
+          <a:effectLst/>
+        </p:spPr>
+        <p:style>
+          <a:lnRef idx="1">
+            <a:schemeClr val="accent1"/>
+          </a:lnRef>
+          <a:fillRef idx="3">
+            <a:schemeClr val="accent1"/>
+          </a:fillRef>
+          <a:effectRef idx="2">
+            <a:schemeClr val="accent1"/>
+          </a:effectRef>
+          <a:fontRef idx="minor">
+            <a:schemeClr val="lt1"/>
+          </a:fontRef>
+        </p:style>
+        <p:txBody>
+          <a:bodyPr rtlCol="0" anchor="ctr"/>
+          <a:lstStyle/>
+          <a:p/>
+        </p:txBody>
+      </p:sp>
+      <p:sp>
+        <p:nvSpPr>
+          <p:cNvPr id="20" name="TextBox 19"/>
+          <p:cNvSpPr txBox="1"/>
+          <p:nvPr/>
+        </p:nvSpPr>
+        <p:spPr>
+          <a:xfrm>
+            <a:off x="4059936" y="1874519"/>
+            <a:ext cx="1783080" cy="566928"/>
+          </a:xfrm>
+          <a:prstGeom prst="rect">
+            <a:avLst/>
+          </a:prstGeom>
+          <a:noFill/>
+        </p:spPr>
+        <p:txBody>
+          <a:bodyPr wrap="square" lIns="0" rIns="0" tIns="0" bIns="0" anchor="ctr" rtlCol="0">
+            <a:spAutoFit/>
+          </a:bodyPr>
+          <a:lstStyle/>
+          <a:p>
+            <a:pPr rtl="1" algn="r" marL="0" indent="0">
+              <a:lnSpc>
+                <a:spcPct val="108000"/>
+              </a:lnSpc>
+              <a:buNone/>
+            </a:pPr>
+            <a:r>
+              <a:rPr sz="1400" b="1" i="0" lang="he-IL">
+                <a:solidFill>
+                  <a:srgbClr val="F2F5FA"/>
+                </a:solidFill>
+                <a:latin typeface="Arial"/>
+                <a:cs typeface="Arial"/>
+              </a:rPr>
+              <a:t>Codex</a:t>
+            </a:r>
+          </a:p>
+        </p:txBody>
+      </p:sp>
+      <p:sp>
+        <p:nvSpPr>
+          <p:cNvPr id="21" name="TextBox 20"/>
+          <p:cNvSpPr txBox="1"/>
+          <p:nvPr/>
+        </p:nvSpPr>
+        <p:spPr>
+          <a:xfrm>
+            <a:off x="768096" y="1874519"/>
+            <a:ext cx="3264408" cy="566928"/>
+          </a:xfrm>
+          <a:prstGeom prst="rect">
+            <a:avLst/>
+          </a:prstGeom>
+          <a:noFill/>
+        </p:spPr>
+        <p:txBody>
+          <a:bodyPr wrap="square" lIns="0" rIns="0" tIns="0" bIns="0" anchor="ctr" rtlCol="0">
+            <a:spAutoFit/>
+          </a:bodyPr>
+          <a:lstStyle/>
+          <a:p>
+            <a:pPr rtl="1" algn="l" marL="0" indent="0">
+              <a:lnSpc>
+                <a:spcPct val="108000"/>
+              </a:lnSpc>
+              <a:buNone/>
+            </a:pPr>
+            <a:r>
+              <a:rPr sz="1300" b="0" i="0" lang="he-IL">
+                <a:solidFill>
+                  <a:srgbClr val="6296FF"/>
+                </a:solidFill>
+                <a:latin typeface="Arial"/>
+                <a:cs typeface="Arial"/>
+              </a:rPr>
+              <a:t>chatgpt.com/codex</a:t>
+            </a:r>
+          </a:p>
+        </p:txBody>
+      </p:sp>
+      <p:sp>
+        <p:nvSpPr>
+          <p:cNvPr id="22" name="Rounded Rectangle 21"/>
+          <p:cNvSpPr/>
+          <p:nvPr/>
+        </p:nvSpPr>
+        <p:spPr>
+          <a:xfrm>
+            <a:off x="658368" y="2569463"/>
+            <a:ext cx="5321808" cy="566928"/>
+          </a:xfrm>
+          <a:prstGeom prst="roundRect">
+            <a:avLst>
+              <a:gd name="adj" fmla="val 25000"/>
+            </a:avLst>
+          </a:prstGeom>
+          <a:solidFill>
+            <a:srgbClr val="022349"/>
+          </a:solidFill>
+          <a:ln w="19050">
+            <a:solidFill>
+              <a:srgbClr val="487CFF"/>
+            </a:solidFill>
+          </a:ln>
+          <a:effectLst/>
+        </p:spPr>
+        <p:style>
+          <a:lnRef idx="1">
+            <a:schemeClr val="accent1"/>
+          </a:lnRef>
+          <a:fillRef idx="3">
+            <a:schemeClr val="accent1"/>
+          </a:fillRef>
+          <a:effectRef idx="2">
+            <a:schemeClr val="accent1"/>
+          </a:effectRef>
+          <a:fontRef idx="minor">
+            <a:schemeClr val="lt1"/>
+          </a:fontRef>
+        </p:style>
+        <p:txBody>
+          <a:bodyPr rtlCol="0" anchor="ctr"/>
+          <a:lstStyle/>
+          <a:p/>
+        </p:txBody>
+      </p:sp>
+      <p:sp>
+        <p:nvSpPr>
+          <p:cNvPr id="23" name="TextBox 22"/>
+          <p:cNvSpPr txBox="1"/>
+          <p:nvPr/>
+        </p:nvSpPr>
+        <p:spPr>
+          <a:xfrm>
+            <a:off x="4059936" y="2569463"/>
+            <a:ext cx="1783080" cy="566928"/>
+          </a:xfrm>
+          <a:prstGeom prst="rect">
+            <a:avLst/>
+          </a:prstGeom>
+          <a:noFill/>
+        </p:spPr>
+        <p:txBody>
+          <a:bodyPr wrap="square" lIns="0" rIns="0" tIns="0" bIns="0" anchor="ctr" rtlCol="0">
+            <a:spAutoFit/>
+          </a:bodyPr>
+          <a:lstStyle/>
+          <a:p>
+            <a:pPr rtl="1" algn="r" marL="0" indent="0">
+              <a:lnSpc>
+                <a:spcPct val="108000"/>
+              </a:lnSpc>
+              <a:buNone/>
+            </a:pPr>
+            <a:r>
+              <a:rPr sz="1400" b="1" i="0" lang="he-IL">
+                <a:solidFill>
+                  <a:srgbClr val="F2F5FA"/>
+                </a:solidFill>
+                <a:latin typeface="Arial"/>
+                <a:cs typeface="Arial"/>
+              </a:rPr>
+              <a:t>Claude Code</a:t>
+            </a:r>
+          </a:p>
+        </p:txBody>
+      </p:sp>
+      <p:sp>
+        <p:nvSpPr>
+          <p:cNvPr id="24" name="TextBox 23"/>
+          <p:cNvSpPr txBox="1"/>
+          <p:nvPr/>
+        </p:nvSpPr>
+        <p:spPr>
+          <a:xfrm>
+            <a:off x="768096" y="2569463"/>
+            <a:ext cx="3264408" cy="566928"/>
+          </a:xfrm>
+          <a:prstGeom prst="rect">
+            <a:avLst/>
+          </a:prstGeom>
+          <a:noFill/>
+        </p:spPr>
+        <p:txBody>
+          <a:bodyPr wrap="square" lIns="0" rIns="0" tIns="0" bIns="0" anchor="ctr" rtlCol="0">
+            <a:spAutoFit/>
+          </a:bodyPr>
+          <a:lstStyle/>
+          <a:p>
+            <a:pPr rtl="1" algn="l" marL="0" indent="0">
+              <a:lnSpc>
+                <a:spcPct val="108000"/>
+              </a:lnSpc>
+              <a:buNone/>
+            </a:pPr>
+            <a:r>
+              <a:rPr sz="1300" b="0" i="0" lang="he-IL">
+                <a:solidFill>
+                  <a:srgbClr val="6296FF"/>
+                </a:solidFill>
+                <a:latin typeface="Arial"/>
+                <a:cs typeface="Arial"/>
+              </a:rPr>
+              <a:t>claude.ai/code</a:t>
+            </a:r>
+          </a:p>
+        </p:txBody>
+      </p:sp>
+      <p:sp>
+        <p:nvSpPr>
+          <p:cNvPr id="25" name="Rounded Rectangle 24"/>
+          <p:cNvSpPr/>
+          <p:nvPr/>
+        </p:nvSpPr>
+        <p:spPr>
+          <a:xfrm>
+            <a:off x="658368" y="3264408"/>
+            <a:ext cx="5321808" cy="566928"/>
+          </a:xfrm>
+          <a:prstGeom prst="roundRect">
+            <a:avLst>
+              <a:gd name="adj" fmla="val 25000"/>
+            </a:avLst>
+          </a:prstGeom>
+          <a:solidFill>
+            <a:srgbClr val="022349"/>
+          </a:solidFill>
+          <a:ln w="19050">
+            <a:solidFill>
+              <a:srgbClr val="487CFF"/>
+            </a:solidFill>
+          </a:ln>
+          <a:effectLst/>
+        </p:spPr>
+        <p:style>
+          <a:lnRef idx="1">
+            <a:schemeClr val="accent1"/>
+          </a:lnRef>
+          <a:fillRef idx="3">
+            <a:schemeClr val="accent1"/>
+          </a:fillRef>
+          <a:effectRef idx="2">
+            <a:schemeClr val="accent1"/>
+          </a:effectRef>
+          <a:fontRef idx="minor">
+            <a:schemeClr val="lt1"/>
+          </a:fontRef>
+        </p:style>
+        <p:txBody>
+          <a:bodyPr rtlCol="0" anchor="ctr"/>
+          <a:lstStyle/>
+          <a:p/>
+        </p:txBody>
+      </p:sp>
+      <p:sp>
+        <p:nvSpPr>
+          <p:cNvPr id="26" name="TextBox 25"/>
+          <p:cNvSpPr txBox="1"/>
+          <p:nvPr/>
+        </p:nvSpPr>
+        <p:spPr>
+          <a:xfrm>
+            <a:off x="4059936" y="3264408"/>
+            <a:ext cx="1783080" cy="566928"/>
+          </a:xfrm>
+          <a:prstGeom prst="rect">
+            <a:avLst/>
+          </a:prstGeom>
+          <a:noFill/>
+        </p:spPr>
+        <p:txBody>
+          <a:bodyPr wrap="square" lIns="0" rIns="0" tIns="0" bIns="0" anchor="ctr" rtlCol="0">
+            <a:spAutoFit/>
+          </a:bodyPr>
+          <a:lstStyle/>
+          <a:p>
+            <a:pPr rtl="1" algn="r" marL="0" indent="0">
+              <a:lnSpc>
+                <a:spcPct val="108000"/>
+              </a:lnSpc>
+              <a:buNone/>
+            </a:pPr>
+            <a:r>
+              <a:rPr sz="1400" b="1" i="0" lang="he-IL">
+                <a:solidFill>
+                  <a:srgbClr val="F2F5FA"/>
+                </a:solidFill>
+                <a:latin typeface="Arial"/>
+                <a:cs typeface="Arial"/>
+              </a:rPr>
+              <a:t>Grok</a:t>
+            </a:r>
+          </a:p>
+        </p:txBody>
+      </p:sp>
+      <p:sp>
+        <p:nvSpPr>
+          <p:cNvPr id="27" name="TextBox 26"/>
+          <p:cNvSpPr txBox="1"/>
+          <p:nvPr/>
+        </p:nvSpPr>
+        <p:spPr>
+          <a:xfrm>
+            <a:off x="768096" y="3264408"/>
+            <a:ext cx="3264408" cy="566928"/>
+          </a:xfrm>
+          <a:prstGeom prst="rect">
+            <a:avLst/>
+          </a:prstGeom>
+          <a:noFill/>
+        </p:spPr>
+        <p:txBody>
+          <a:bodyPr wrap="square" lIns="0" rIns="0" tIns="0" bIns="0" anchor="ctr" rtlCol="0">
+            <a:spAutoFit/>
+          </a:bodyPr>
+          <a:lstStyle/>
+          <a:p>
+            <a:pPr rtl="1" algn="l" marL="0" indent="0">
+              <a:lnSpc>
+                <a:spcPct val="108000"/>
+              </a:lnSpc>
+              <a:buNone/>
+            </a:pPr>
+            <a:r>
+              <a:rPr sz="1300" b="0" i="0" lang="he-IL">
+                <a:solidFill>
+                  <a:srgbClr val="6296FF"/>
+                </a:solidFill>
+                <a:latin typeface="Arial"/>
+                <a:cs typeface="Arial"/>
+              </a:rPr>
+              <a:t>grok.com</a:t>
+            </a:r>
+          </a:p>
+        </p:txBody>
+      </p:sp>
+      <p:sp>
+        <p:nvSpPr>
+          <p:cNvPr id="28" name="Rounded Rectangle 27"/>
+          <p:cNvSpPr/>
+          <p:nvPr/>
+        </p:nvSpPr>
+        <p:spPr>
+          <a:xfrm>
+            <a:off x="658368" y="3959352"/>
+            <a:ext cx="5321808" cy="566928"/>
+          </a:xfrm>
+          <a:prstGeom prst="roundRect">
+            <a:avLst>
+              <a:gd name="adj" fmla="val 25000"/>
+            </a:avLst>
+          </a:prstGeom>
+          <a:solidFill>
+            <a:srgbClr val="022349"/>
+          </a:solidFill>
+          <a:ln w="19050">
+            <a:solidFill>
+              <a:srgbClr val="487CFF"/>
+            </a:solidFill>
+          </a:ln>
+          <a:effectLst/>
+        </p:spPr>
+        <p:style>
+          <a:lnRef idx="1">
+            <a:schemeClr val="accent1"/>
+          </a:lnRef>
+          <a:fillRef idx="3">
+            <a:schemeClr val="accent1"/>
+          </a:fillRef>
+          <a:effectRef idx="2">
+            <a:schemeClr val="accent1"/>
+          </a:effectRef>
+          <a:fontRef idx="minor">
+            <a:schemeClr val="lt1"/>
+          </a:fontRef>
+        </p:style>
+        <p:txBody>
+          <a:bodyPr rtlCol="0" anchor="ctr"/>
+          <a:lstStyle/>
+          <a:p/>
+        </p:txBody>
+      </p:sp>
+      <p:sp>
+        <p:nvSpPr>
+          <p:cNvPr id="29" name="TextBox 28"/>
+          <p:cNvSpPr txBox="1"/>
+          <p:nvPr/>
+        </p:nvSpPr>
+        <p:spPr>
+          <a:xfrm>
+            <a:off x="4059936" y="3959352"/>
+            <a:ext cx="1783080" cy="566928"/>
+          </a:xfrm>
+          <a:prstGeom prst="rect">
+            <a:avLst/>
+          </a:prstGeom>
+          <a:noFill/>
+        </p:spPr>
+        <p:txBody>
+          <a:bodyPr wrap="square" lIns="0" rIns="0" tIns="0" bIns="0" anchor="ctr" rtlCol="0">
+            <a:spAutoFit/>
+          </a:bodyPr>
+          <a:lstStyle/>
+          <a:p>
+            <a:pPr rtl="1" algn="r" marL="0" indent="0">
+              <a:lnSpc>
+                <a:spcPct val="108000"/>
+              </a:lnSpc>
+              <a:buNone/>
+            </a:pPr>
+            <a:r>
+              <a:rPr sz="1400" b="1" i="0" lang="he-IL">
+                <a:solidFill>
+                  <a:srgbClr val="F2F5FA"/>
+                </a:solidFill>
+                <a:latin typeface="Arial"/>
+                <a:cs typeface="Arial"/>
+              </a:rPr>
+              <a:t>Instinct</a:t>
+            </a:r>
+          </a:p>
+        </p:txBody>
+      </p:sp>
+      <p:sp>
+        <p:nvSpPr>
+          <p:cNvPr id="30" name="TextBox 29"/>
+          <p:cNvSpPr txBox="1"/>
+          <p:nvPr/>
+        </p:nvSpPr>
+        <p:spPr>
+          <a:xfrm>
+            <a:off x="768096" y="3959352"/>
+            <a:ext cx="3264408" cy="566928"/>
+          </a:xfrm>
+          <a:prstGeom prst="rect">
+            <a:avLst/>
+          </a:prstGeom>
+          <a:noFill/>
+        </p:spPr>
+        <p:txBody>
+          <a:bodyPr wrap="square" lIns="0" rIns="0" tIns="0" bIns="0" anchor="ctr" rtlCol="0">
+            <a:spAutoFit/>
+          </a:bodyPr>
+          <a:lstStyle/>
+          <a:p>
+            <a:pPr rtl="1" algn="l" marL="0" indent="0">
+              <a:lnSpc>
+                <a:spcPct val="108000"/>
+              </a:lnSpc>
+              <a:buNone/>
+            </a:pPr>
+            <a:r>
+              <a:rPr sz="1300" b="0" i="0" lang="he-IL">
+                <a:solidFill>
+                  <a:srgbClr val="6296FF"/>
+                </a:solidFill>
+                <a:latin typeface="Arial"/>
+                <a:cs typeface="Arial"/>
+              </a:rPr>
+              <a:t>instinct.ai</a:t>
+            </a:r>
+          </a:p>
+        </p:txBody>
+      </p:sp>
+      <p:sp>
+        <p:nvSpPr>
+          <p:cNvPr id="31" name="Rounded Rectangle 30"/>
+          <p:cNvSpPr/>
+          <p:nvPr/>
+        </p:nvSpPr>
+        <p:spPr>
+          <a:xfrm>
+            <a:off x="658368" y="5577840"/>
+            <a:ext cx="10872216" cy="594360"/>
+          </a:xfrm>
+          <a:prstGeom prst="roundRect">
+            <a:avLst>
+              <a:gd name="adj" fmla="val 3000"/>
+            </a:avLst>
+          </a:prstGeom>
+          <a:solidFill>
+            <a:srgbClr val="022349"/>
+          </a:solidFill>
+          <a:ln>
+            <a:noFill/>
+          </a:ln>
+          <a:effectLst/>
+        </p:spPr>
+        <p:style>
+          <a:lnRef idx="1">
+            <a:schemeClr val="accent1"/>
+          </a:lnRef>
+          <a:fillRef idx="3">
+            <a:schemeClr val="accent1"/>
+          </a:fillRef>
+          <a:effectRef idx="2">
+            <a:schemeClr val="accent1"/>
+          </a:effectRef>
+          <a:fontRef idx="minor">
+            <a:schemeClr val="lt1"/>
+          </a:fontRef>
+        </p:style>
+        <p:txBody>
+          <a:bodyPr rtlCol="0" anchor="ctr"/>
+          <a:lstStyle/>
+          <a:p/>
+        </p:txBody>
+      </p:sp>
+      <p:sp>
+        <p:nvSpPr>
+          <p:cNvPr id="32" name="TextBox 31"/>
+          <p:cNvSpPr txBox="1"/>
+          <p:nvPr/>
+        </p:nvSpPr>
+        <p:spPr>
+          <a:xfrm>
+            <a:off x="886968" y="5577840"/>
+            <a:ext cx="10415016" cy="594360"/>
+          </a:xfrm>
+          <a:prstGeom prst="rect">
+            <a:avLst/>
+          </a:prstGeom>
+          <a:noFill/>
+        </p:spPr>
+        <p:txBody>
+          <a:bodyPr wrap="square" lIns="0" rIns="0" tIns="0" bIns="0" anchor="ctr" rtlCol="0">
+            <a:spAutoFit/>
+          </a:bodyPr>
+          <a:lstStyle/>
+          <a:p>
+            <a:pPr rtl="1" algn="r" marL="0" indent="0">
+              <a:lnSpc>
+                <a:spcPct val="108000"/>
+              </a:lnSpc>
+              <a:buNone/>
+            </a:pPr>
+            <a:r>
+              <a:rPr sz="1400" b="0" i="0" lang="he-IL">
+                <a:solidFill>
+                  <a:srgbClr val="EBEDF0"/>
+                </a:solidFill>
+                <a:latin typeface="Arial"/>
+                <a:cs typeface="Arial"/>
+              </a:rPr>
+              <a:t>📋  כל הקישורים נמצאים גם בארגז הכלים באפליקציית הקורס ובחוברת.</a:t>
+            </a:r>
+          </a:p>
+        </p:txBody>
+      </p:sp>
+      <p:sp>
+        <p:nvSpPr>
+          <p:cNvPr id="33" name="TextBox 32"/>
+          <p:cNvSpPr txBox="1"/>
+          <p:nvPr/>
+        </p:nvSpPr>
+        <p:spPr>
+          <a:xfrm>
+            <a:off x="6675120" y="6473952"/>
+            <a:ext cx="4846320" cy="292608"/>
+          </a:xfrm>
+          <a:prstGeom prst="rect">
+            <a:avLst/>
+          </a:prstGeom>
+          <a:noFill/>
+        </p:spPr>
+        <p:txBody>
+          <a:bodyPr wrap="none" lIns="0" rIns="0" tIns="0" bIns="0">
+            <a:spAutoFit/>
+          </a:bodyPr>
+          <a:lstStyle/>
+          <a:p>
+            <a:pPr algn="r" rtl="1"/>
+            <a:r>
+              <a:rPr sz="1000">
+                <a:solidFill>
+                  <a:srgbClr val="8A96AA"/>
+                </a:solidFill>
+                <a:latin typeface="Arial"/>
+                <a:cs typeface="Arial"/>
+              </a:rPr>
+              <a:t>© נערך על ידי AI Finance</a:t>
+            </a:r>
+          </a:p>
+        </p:txBody>
+      </p:sp>
+    </p:spTree>
+  </p:cSld>
+  <p:clrMapOvr>
+    <a:masterClrMapping/>
+  </p:clrMapOvr>
+</p:sld>
+</file>
+
+<file path=ppt/slides/slide2022.xml><?xml version="1.0" encoding="utf-8"?>
+<p:sld xmlns:a="http://schemas.openxmlformats.org/drawingml/2006/main" xmlns:p="http://schemas.openxmlformats.org/presentationml/2006/main" xmlns:r="http://schemas.openxmlformats.org/officeDocument/2006/relationships">
+  <p:cSld>
+    <p:spTree>
+      <p:nvGrpSpPr>
+        <p:cNvPr id="1" name=""/>
+        <p:cNvGrpSpPr/>
+        <p:nvPr/>
+      </p:nvGrpSpPr>
+      <p:grpSpPr/>
+      <p:sp>
+        <p:nvSpPr>
+          <p:cNvPr id="2" name="Title"/>
+          <p:cNvSpPr txBox="1"/>
+          <p:nvPr/>
+        </p:nvSpPr>
+        <p:spPr>
+          <a:xfrm>
+            <a:off x="658368" y="502920"/>
+            <a:ext cx="10872216" cy="640080"/>
+          </a:xfrm>
+          <a:prstGeom prst="rect">
+            <a:avLst/>
+          </a:prstGeom>
+          <a:noFill/>
+        </p:spPr>
+        <p:txBody>
+          <a:bodyPr wrap="square" lIns="0" rIns="0" tIns="0" bIns="0" anchor="t" rtlCol="0">
+            <a:spAutoFit/>
+          </a:bodyPr>
+          <a:lstStyle/>
+          <a:p>
+            <a:pPr rtl="1" algn="r" marL="0" indent="0">
+              <a:lnSpc>
+                <a:spcPct val="108000"/>
+              </a:lnSpc>
+              <a:buNone/>
+            </a:pPr>
+            <a:r>
+              <a:rPr sz="3700" b="1" i="0" lang="he-IL">
+                <a:solidFill>
+                  <a:srgbClr val="F2F5FA"/>
+                </a:solidFill>
+                <a:latin typeface="Arial"/>
+                <a:cs typeface="Arial"/>
+              </a:rPr>
               <a:t>🗺️ מה עשינו בארבעה מפגשים</a:t>
             </a:r>
           </a:p>
@@ -24038,7 +25307,7 @@
 </p:sld>
 </file>
 
-<file path=ppt/slides/slide2022.xml><?xml version="1.0" encoding="utf-8"?>
+<file path=ppt/slides/slide2023.xml><?xml version="1.0" encoding="utf-8"?>
 <p:sld xmlns:a="http://schemas.openxmlformats.org/drawingml/2006/main" xmlns:p="http://schemas.openxmlformats.org/presentationml/2006/main" xmlns:r="http://schemas.openxmlformats.org/officeDocument/2006/relationships">
   <p:cSld>
     <p:spTree>
